--- a/cai-shioya-01.pptx
+++ b/cai-shioya-01.pptx
@@ -2,7 +2,7 @@
 <file path=ppt/presentation.xml><?xml version="1.0" encoding="utf-8"?>
 <p:presentation xmlns:a="http://schemas.openxmlformats.org/drawingml/2006/main" xmlns:r="http://schemas.openxmlformats.org/officeDocument/2006/relationships" xmlns:p="http://schemas.openxmlformats.org/presentationml/2006/main" removePersonalInfoOnSave="1" saveSubsetFonts="1">
   <p:sldMasterIdLst>
-    <p:sldMasterId id="2147483664" r:id="rId1"/>
+    <p:sldMasterId id="2147483668" r:id="rId1"/>
   </p:sldMasterIdLst>
   <p:notesMasterIdLst>
     <p:notesMasterId r:id="rId52"/>
@@ -59,7 +59,7 @@
     <p:sldId id="693" r:id="rId50"/>
     <p:sldId id="696" r:id="rId51"/>
   </p:sldIdLst>
-  <p:sldSz cx="9144000" cy="6858000" type="screen4x3"/>
+  <p:sldSz cx="12192000" cy="6858000"/>
   <p:notesSz cx="6858000" cy="9144000"/>
   <p:custDataLst>
     <p:tags r:id="rId53"/>
@@ -220,12 +220,12 @@
     </p:ext>
     <p:ext uri="{EFAFB233-063F-42B5-8137-9DF3F51BA10A}">
       <p15:sldGuideLst xmlns:p15="http://schemas.microsoft.com/office/powerpoint/2012/main">
-        <p15:guide id="1" orient="horz" pos="2160">
+        <p15:guide id="1" orient="horz" pos="2160" userDrawn="1">
           <p15:clr>
             <a:srgbClr val="A4A3A4"/>
           </p15:clr>
         </p15:guide>
-        <p15:guide id="2" pos="2880">
+        <p15:guide id="2" pos="3840" userDrawn="1">
           <p15:clr>
             <a:srgbClr val="A4A3A4"/>
           </p15:clr>
@@ -318,7 +318,7 @@
           <a:p>
             <a:fld id="{BC56210E-A5EE-4707-8EFD-B2050EBAA0B3}" type="datetimeFigureOut">
               <a:rPr kumimoji="1" lang="ja-JP" altLang="en-US" smtClean="0"/>
-              <a:t>2025/4/15</a:t>
+              <a:t>2026/4/14</a:t>
             </a:fld>
             <a:endParaRPr kumimoji="1" lang="ja-JP" altLang="en-US"/>
           </a:p>
@@ -336,8 +336,8 @@
         </p:nvSpPr>
         <p:spPr>
           <a:xfrm>
-            <a:off x="1143000" y="685800"/>
-            <a:ext cx="4572000" cy="3429000"/>
+            <a:off x="381000" y="685800"/>
+            <a:ext cx="6096000" cy="3429000"/>
           </a:xfrm>
           <a:prstGeom prst="rect">
             <a:avLst/>
@@ -620,14 +620,6 @@
 <file path=ppt/slideLayouts/slideLayout1.xml><?xml version="1.0" encoding="utf-8"?>
 <p:sldLayout xmlns:a="http://schemas.openxmlformats.org/drawingml/2006/main" xmlns:r="http://schemas.openxmlformats.org/officeDocument/2006/relationships" xmlns:p="http://schemas.openxmlformats.org/presentationml/2006/main" showMasterSp="0" type="title" preserve="1">
   <p:cSld name="タイトル スライド">
-    <p:bg>
-      <p:bgPr>
-        <a:solidFill>
-          <a:schemeClr val="accent4"/>
-        </a:solidFill>
-        <a:effectLst/>
-      </p:bgPr>
-    </p:bg>
     <p:spTree>
       <p:nvGrpSpPr>
         <p:cNvPr id="1" name=""/>
@@ -651,141 +643,7 @@
         <p:spPr bwMode="auto">
           <a:xfrm>
             <a:off x="0" y="0"/>
-            <a:ext cx="9144000" cy="6858000"/>
-          </a:xfrm>
-          <a:prstGeom prst="rect">
-            <a:avLst/>
-          </a:prstGeom>
-          <a:solidFill>
-            <a:schemeClr val="accent5"/>
-          </a:solidFill>
-          <a:ln>
-            <a:noFill/>
-            <a:headEnd/>
-            <a:tailEnd type="triangle" w="sm" len="med"/>
-          </a:ln>
-        </p:spPr>
-        <p:style>
-          <a:lnRef idx="2">
-            <a:schemeClr val="dk1"/>
-          </a:lnRef>
-          <a:fillRef idx="1">
-            <a:schemeClr val="lt1"/>
-          </a:fillRef>
-          <a:effectRef idx="0">
-            <a:schemeClr val="dk1"/>
-          </a:effectRef>
-          <a:fontRef idx="minor">
-            <a:schemeClr val="dk1"/>
-          </a:fontRef>
-        </p:style>
-        <p:txBody>
-          <a:bodyPr rtlCol="0" anchor="ctr"/>
-          <a:lstStyle/>
-          <a:p>
-            <a:pPr algn="ctr"/>
-            <a:endParaRPr kumimoji="1" lang="ja-JP" altLang="en-US" sz="1350" b="1">
-              <a:solidFill>
-                <a:schemeClr val="bg1"/>
-              </a:solidFill>
-            </a:endParaRPr>
-          </a:p>
-        </p:txBody>
-      </p:sp>
-      <p:sp>
-        <p:nvSpPr>
-          <p:cNvPr id="7170" name="Rectangle 2"/>
-          <p:cNvSpPr>
-            <a:spLocks noGrp="1" noChangeArrowheads="1"/>
-          </p:cNvSpPr>
-          <p:nvPr>
-            <p:ph type="ctrTitle"/>
-          </p:nvPr>
-        </p:nvSpPr>
-        <p:spPr>
-          <a:xfrm>
-            <a:off x="701958" y="278965"/>
-            <a:ext cx="7920088" cy="2340026"/>
-          </a:xfrm>
-          <a:prstGeom prst="rect">
-            <a:avLst/>
-          </a:prstGeom>
-        </p:spPr>
-        <p:txBody>
-          <a:bodyPr anchor="ctr"/>
-          <a:lstStyle>
-            <a:lvl1pPr algn="ctr">
-              <a:defRPr sz="2400" b="1">
-                <a:solidFill>
-                  <a:schemeClr val="bg1"/>
-                </a:solidFill>
-              </a:defRPr>
-            </a:lvl1pPr>
-          </a:lstStyle>
-          <a:p>
-            <a:r>
-              <a:rPr lang="ja-JP" altLang="en-US"/>
-              <a:t>マスター タイトルの書式設定</a:t>
-            </a:r>
-          </a:p>
-        </p:txBody>
-      </p:sp>
-      <p:sp>
-        <p:nvSpPr>
-          <p:cNvPr id="7171" name="Rectangle 3"/>
-          <p:cNvSpPr>
-            <a:spLocks noGrp="1" noChangeArrowheads="1"/>
-          </p:cNvSpPr>
-          <p:nvPr>
-            <p:ph type="subTitle" idx="1"/>
-          </p:nvPr>
-        </p:nvSpPr>
-        <p:spPr>
-          <a:xfrm>
-            <a:off x="1691968" y="4149009"/>
-            <a:ext cx="7200080" cy="1440017"/>
-          </a:xfrm>
-        </p:spPr>
-        <p:txBody>
-          <a:bodyPr anchor="b"/>
-          <a:lstStyle>
-            <a:lvl1pPr marL="0" indent="0" algn="r">
-              <a:lnSpc>
-                <a:spcPct val="150000"/>
-              </a:lnSpc>
-              <a:spcBef>
-                <a:spcPts val="0"/>
-              </a:spcBef>
-              <a:spcAft>
-                <a:spcPts val="0"/>
-              </a:spcAft>
-              <a:buFont typeface="Wingdings" pitchFamily="2" charset="2"/>
-              <a:buNone/>
-              <a:defRPr>
-                <a:solidFill>
-                  <a:schemeClr val="bg1"/>
-                </a:solidFill>
-              </a:defRPr>
-            </a:lvl1pPr>
-          </a:lstStyle>
-          <a:p>
-            <a:r>
-              <a:rPr lang="ja-JP" altLang="en-US"/>
-              <a:t>マスター サブタイトルの書式設定</a:t>
-            </a:r>
-          </a:p>
-        </p:txBody>
-      </p:sp>
-      <p:sp>
-        <p:nvSpPr>
-          <p:cNvPr id="5" name="正方形/長方形 4"/>
-          <p:cNvSpPr/>
-          <p:nvPr/>
-        </p:nvSpPr>
-        <p:spPr bwMode="auto">
-          <a:xfrm>
-            <a:off x="0" y="0"/>
-            <a:ext cx="9144000" cy="6858000"/>
+            <a:ext cx="12192000" cy="6858000"/>
           </a:xfrm>
           <a:prstGeom prst="rect">
             <a:avLst/>
@@ -818,11 +676,97 @@
           <a:lstStyle/>
           <a:p>
             <a:pPr algn="ctr"/>
-            <a:endParaRPr kumimoji="1" lang="ja-JP" altLang="en-US" sz="1350" b="1">
+            <a:endParaRPr kumimoji="1" lang="ja-JP" altLang="en-US" sz="1800" b="1" dirty="0">
               <a:solidFill>
                 <a:schemeClr val="bg1"/>
               </a:solidFill>
             </a:endParaRPr>
+          </a:p>
+        </p:txBody>
+      </p:sp>
+      <p:sp>
+        <p:nvSpPr>
+          <p:cNvPr id="7170" name="Rectangle 2"/>
+          <p:cNvSpPr>
+            <a:spLocks noGrp="1" noChangeArrowheads="1"/>
+          </p:cNvSpPr>
+          <p:nvPr>
+            <p:ph type="ctrTitle"/>
+          </p:nvPr>
+        </p:nvSpPr>
+        <p:spPr>
+          <a:xfrm>
+            <a:off x="965943" y="728968"/>
+            <a:ext cx="10560117" cy="2340026"/>
+          </a:xfrm>
+          <a:prstGeom prst="rect">
+            <a:avLst/>
+          </a:prstGeom>
+        </p:spPr>
+        <p:txBody>
+          <a:bodyPr anchor="ctr"/>
+          <a:lstStyle>
+            <a:lvl1pPr algn="ctr">
+              <a:defRPr sz="3200" b="1">
+                <a:solidFill>
+                  <a:schemeClr val="bg1"/>
+                </a:solidFill>
+              </a:defRPr>
+            </a:lvl1pPr>
+          </a:lstStyle>
+          <a:p>
+            <a:r>
+              <a:rPr lang="ja-JP" altLang="en-US"/>
+              <a:t>マスター タイトルの書式設定</a:t>
+            </a:r>
+            <a:endParaRPr lang="ja-JP" altLang="en-US" dirty="0"/>
+          </a:p>
+        </p:txBody>
+      </p:sp>
+      <p:sp>
+        <p:nvSpPr>
+          <p:cNvPr id="7171" name="Rectangle 3"/>
+          <p:cNvSpPr>
+            <a:spLocks noGrp="1" noChangeArrowheads="1"/>
+          </p:cNvSpPr>
+          <p:nvPr>
+            <p:ph type="subTitle" idx="1"/>
+          </p:nvPr>
+        </p:nvSpPr>
+        <p:spPr>
+          <a:xfrm>
+            <a:off x="2495960" y="4149008"/>
+            <a:ext cx="7170080" cy="1440017"/>
+          </a:xfrm>
+        </p:spPr>
+        <p:txBody>
+          <a:bodyPr anchor="b"/>
+          <a:lstStyle>
+            <a:lvl1pPr marL="0" indent="0" algn="ctr">
+              <a:lnSpc>
+                <a:spcPct val="150000"/>
+              </a:lnSpc>
+              <a:spcBef>
+                <a:spcPts val="0"/>
+              </a:spcBef>
+              <a:spcAft>
+                <a:spcPts val="0"/>
+              </a:spcAft>
+              <a:buFont typeface="Wingdings" pitchFamily="2" charset="2"/>
+              <a:buNone/>
+              <a:defRPr>
+                <a:solidFill>
+                  <a:schemeClr val="bg1"/>
+                </a:solidFill>
+              </a:defRPr>
+            </a:lvl1pPr>
+          </a:lstStyle>
+          <a:p>
+            <a:r>
+              <a:rPr lang="ja-JP" altLang="en-US"/>
+              <a:t>マスター サブタイトルの書式設定</a:t>
+            </a:r>
+            <a:endParaRPr lang="ja-JP" altLang="en-US" dirty="0"/>
           </a:p>
         </p:txBody>
       </p:sp>
@@ -836,8 +780,8 @@
         </p:nvCxnSpPr>
         <p:spPr bwMode="auto">
           <a:xfrm>
-            <a:off x="611956" y="3068996"/>
-            <a:ext cx="7920088" cy="0"/>
+            <a:off x="965943" y="3068996"/>
+            <a:ext cx="10800120" cy="0"/>
           </a:xfrm>
           <a:prstGeom prst="line">
             <a:avLst/>
@@ -846,8 +790,8 @@
           <a:ln w="9525" cap="flat" cmpd="sng" algn="ctr">
             <a:solidFill>
               <a:schemeClr val="accent4">
-                <a:lumMod val="60000"/>
-                <a:lumOff val="40000"/>
+                <a:lumMod val="20000"/>
+                <a:lumOff val="80000"/>
               </a:schemeClr>
             </a:solidFill>
             <a:prstDash val="solid"/>
@@ -861,7 +805,7 @@
     </p:spTree>
     <p:extLst>
       <p:ext uri="{BB962C8B-B14F-4D97-AF65-F5344CB8AC3E}">
-        <p14:creationId xmlns:p14="http://schemas.microsoft.com/office/powerpoint/2010/main" val="4210289852"/>
+        <p14:creationId xmlns:p14="http://schemas.microsoft.com/office/powerpoint/2010/main" val="81152455"/>
       </p:ext>
     </p:extLst>
   </p:cSld>
@@ -872,7 +816,141 @@
 </file>
 
 <file path=ppt/slideLayouts/slideLayout2.xml><?xml version="1.0" encoding="utf-8"?>
-<p:sldLayout xmlns:a="http://schemas.openxmlformats.org/drawingml/2006/main" xmlns:r="http://schemas.openxmlformats.org/officeDocument/2006/relationships" xmlns:p="http://schemas.openxmlformats.org/presentationml/2006/main" preserve="1" userDrawn="1">
+<p:sldLayout xmlns:a="http://schemas.openxmlformats.org/drawingml/2006/main" xmlns:r="http://schemas.openxmlformats.org/officeDocument/2006/relationships" xmlns:p="http://schemas.openxmlformats.org/presentationml/2006/main" showMasterSp="0" preserve="1">
+  <p:cSld name="セクションタイトル">
+    <p:bg>
+      <p:bgPr>
+        <a:solidFill>
+          <a:schemeClr val="accent4"/>
+        </a:solidFill>
+        <a:effectLst/>
+      </p:bgPr>
+    </p:bg>
+    <p:spTree>
+      <p:nvGrpSpPr>
+        <p:cNvPr id="1" name=""/>
+        <p:cNvGrpSpPr/>
+        <p:nvPr/>
+      </p:nvGrpSpPr>
+      <p:grpSpPr>
+        <a:xfrm>
+          <a:off x="0" y="0"/>
+          <a:ext cx="0" cy="0"/>
+          <a:chOff x="0" y="0"/>
+          <a:chExt cx="0" cy="0"/>
+        </a:xfrm>
+      </p:grpSpPr>
+      <p:sp>
+        <p:nvSpPr>
+          <p:cNvPr id="2" name="スライド番号プレースホルダ 1"/>
+          <p:cNvSpPr>
+            <a:spLocks noGrp="1"/>
+          </p:cNvSpPr>
+          <p:nvPr>
+            <p:ph type="sldNum" sz="quarter" idx="10"/>
+          </p:nvPr>
+        </p:nvSpPr>
+        <p:spPr/>
+        <p:txBody>
+          <a:bodyPr/>
+          <a:lstStyle>
+            <a:lvl1pPr>
+              <a:defRPr>
+                <a:solidFill>
+                  <a:schemeClr val="bg1"/>
+                </a:solidFill>
+              </a:defRPr>
+            </a:lvl1pPr>
+          </a:lstStyle>
+          <a:p>
+            <a:fld id="{D2D8002D-B5B0-4BAC-B1F6-782DDCCE6D9C}" type="slidenum">
+              <a:rPr kumimoji="1" lang="ja-JP" altLang="en-US" smtClean="0"/>
+              <a:t>‹#›</a:t>
+            </a:fld>
+            <a:endParaRPr kumimoji="1" lang="ja-JP" altLang="en-US"/>
+          </a:p>
+        </p:txBody>
+      </p:sp>
+      <p:sp>
+        <p:nvSpPr>
+          <p:cNvPr id="3" name="タイトル 2"/>
+          <p:cNvSpPr>
+            <a:spLocks noGrp="1"/>
+          </p:cNvSpPr>
+          <p:nvPr>
+            <p:ph type="title"/>
+          </p:nvPr>
+        </p:nvSpPr>
+        <p:spPr>
+          <a:xfrm>
+            <a:off x="1775952" y="2168986"/>
+            <a:ext cx="8640096" cy="900010"/>
+          </a:xfrm>
+        </p:spPr>
+        <p:txBody>
+          <a:bodyPr anchor="b"/>
+          <a:lstStyle>
+            <a:lvl1pPr algn="ctr">
+              <a:defRPr sz="3200" b="0"/>
+            </a:lvl1pPr>
+          </a:lstStyle>
+          <a:p>
+            <a:r>
+              <a:rPr kumimoji="1" lang="ja-JP" altLang="en-US"/>
+              <a:t>マスター タイトルの書式設定</a:t>
+            </a:r>
+            <a:endParaRPr kumimoji="1" lang="ja-JP" altLang="en-US" dirty="0"/>
+          </a:p>
+        </p:txBody>
+      </p:sp>
+      <p:cxnSp>
+        <p:nvCxnSpPr>
+          <p:cNvPr id="4" name="直線コネクタ 3"/>
+          <p:cNvCxnSpPr>
+            <a:cxnSpLocks/>
+          </p:cNvCxnSpPr>
+          <p:nvPr/>
+        </p:nvCxnSpPr>
+        <p:spPr bwMode="auto">
+          <a:xfrm>
+            <a:off x="1775952" y="3068996"/>
+            <a:ext cx="8640096" cy="0"/>
+          </a:xfrm>
+          <a:prstGeom prst="line">
+            <a:avLst/>
+          </a:prstGeom>
+          <a:noFill/>
+          <a:ln w="9525" cap="flat" cmpd="sng" algn="ctr">
+            <a:solidFill>
+              <a:schemeClr val="accent4">
+                <a:lumMod val="20000"/>
+                <a:lumOff val="80000"/>
+              </a:schemeClr>
+            </a:solidFill>
+            <a:prstDash val="solid"/>
+            <a:round/>
+            <a:headEnd type="none" w="med" len="med"/>
+            <a:tailEnd type="none" w="med" len="med"/>
+          </a:ln>
+          <a:effectLst/>
+        </p:spPr>
+      </p:cxnSp>
+    </p:spTree>
+    <p:extLst>
+      <p:ext uri="{BB962C8B-B14F-4D97-AF65-F5344CB8AC3E}">
+        <p14:creationId xmlns:p14="http://schemas.microsoft.com/office/powerpoint/2010/main" val="3509289102"/>
+      </p:ext>
+    </p:extLst>
+  </p:cSld>
+  <p:clrMapOvr>
+    <a:masterClrMapping/>
+  </p:clrMapOvr>
+  <p:hf hdr="0" ftr="0" dt="0"/>
+</p:sldLayout>
+</file>
+
+<file path=ppt/slideLayouts/slideLayout3.xml><?xml version="1.0" encoding="utf-8"?>
+<p:sldLayout xmlns:a="http://schemas.openxmlformats.org/drawingml/2006/main" xmlns:r="http://schemas.openxmlformats.org/officeDocument/2006/relationships" xmlns:p="http://schemas.openxmlformats.org/presentationml/2006/main" preserve="1">
   <p:cSld name="タイトルとコンテンツ">
     <p:spTree>
       <p:nvGrpSpPr>
@@ -900,8 +978,8 @@
         </p:nvSpPr>
         <p:spPr bwMode="auto">
           <a:xfrm>
-            <a:off x="611956" y="0"/>
-            <a:ext cx="8532044" cy="908972"/>
+            <a:off x="1415948" y="0"/>
+            <a:ext cx="10776052" cy="908972"/>
           </a:xfrm>
           <a:prstGeom prst="rect">
             <a:avLst/>
@@ -923,7 +1001,7 @@
           </a:bodyPr>
           <a:lstStyle>
             <a:lvl1pPr>
-              <a:defRPr sz="2800">
+              <a:defRPr>
                 <a:latin typeface="+mn-lt"/>
               </a:defRPr>
             </a:lvl1pPr>
@@ -934,6 +1012,7 @@
               <a:rPr lang="ja-JP" altLang="en-US"/>
               <a:t>マスター タイトルの書式設定</a:t>
             </a:r>
+            <a:endParaRPr lang="ja-JP" altLang="en-US" dirty="0"/>
           </a:p>
         </p:txBody>
       </p:sp>
@@ -947,8 +1026,8 @@
         </p:nvSpPr>
         <p:spPr bwMode="auto">
           <a:xfrm>
-            <a:off x="8172040" y="6309032"/>
-            <a:ext cx="720008" cy="548971"/>
+            <a:off x="11136056" y="6309032"/>
+            <a:ext cx="815941" cy="548969"/>
           </a:xfrm>
           <a:prstGeom prst="rect">
             <a:avLst/>
@@ -963,7 +1042,7 @@
           <a:effectLst/>
         </p:spPr>
         <p:txBody>
-          <a:bodyPr vert="horz" wrap="none" lIns="68580" tIns="34290" rIns="68580" bIns="34290" numCol="1" anchor="ctr" anchorCtr="0" compatLnSpc="1">
+          <a:bodyPr vert="horz" wrap="none" lIns="91440" tIns="45720" rIns="91440" bIns="45720" numCol="1" anchor="ctr" anchorCtr="0" compatLnSpc="1">
             <a:prstTxWarp prst="textNoShape">
               <a:avLst/>
             </a:prstTxWarp>
@@ -1068,39 +1147,48 @@
           </a:lstStyle>
           <a:p>
             <a:fld id="{D2D8002D-B5B0-4BAC-B1F6-782DDCCE6D9C}" type="slidenum">
-              <a:rPr kumimoji="1" lang="ja-JP" altLang="en-US" sz="1500" smtClean="0"/>
+              <a:rPr kumimoji="1" lang="ja-JP" altLang="en-US" sz="2000" smtClean="0"/>
               <a:pPr/>
               <a:t>‹#›</a:t>
             </a:fld>
-            <a:endParaRPr kumimoji="1" lang="ja-JP" altLang="en-US" sz="1500" dirty="0"/>
+            <a:endParaRPr kumimoji="1" lang="ja-JP" altLang="en-US" sz="2000" dirty="0"/>
           </a:p>
         </p:txBody>
       </p:sp>
       <p:sp>
         <p:nvSpPr>
-          <p:cNvPr id="3" name="コンテンツ プレースホルダー 2">
-            <a:extLst>
-              <a:ext uri="{FF2B5EF4-FFF2-40B4-BE49-F238E27FC236}">
-                <a16:creationId xmlns:a16="http://schemas.microsoft.com/office/drawing/2014/main" id="{ED3F4CC4-3DF1-E96F-EED4-9F7C4C9F5FFE}"/>
-              </a:ext>
-            </a:extLst>
-          </p:cNvPr>
+          <p:cNvPr id="12" name="テキスト プレースホルダー 11"/>
           <p:cNvSpPr>
             <a:spLocks noGrp="1"/>
           </p:cNvSpPr>
           <p:nvPr>
-            <p:ph sz="quarter" idx="10"/>
+            <p:ph type="body" sz="quarter" idx="10"/>
           </p:nvPr>
         </p:nvSpPr>
         <p:spPr>
           <a:xfrm>
-            <a:off x="611956" y="1088974"/>
-            <a:ext cx="8280092" cy="5220058"/>
+            <a:off x="1775952" y="1088974"/>
+            <a:ext cx="8640096" cy="5490061"/>
           </a:xfrm>
         </p:spPr>
         <p:txBody>
           <a:bodyPr/>
-          <a:lstStyle/>
+          <a:lstStyle>
+            <a:lvl2pPr>
+              <a:buClr>
+                <a:schemeClr val="accent4">
+                  <a:lumMod val="60000"/>
+                  <a:lumOff val="40000"/>
+                </a:schemeClr>
+              </a:buClr>
+              <a:defRPr/>
+            </a:lvl2pPr>
+            <a:lvl4pPr marL="1440000" indent="-360000">
+              <a:buFont typeface="メイリオ" panose="020B0604030504040204" pitchFamily="50" charset="-128"/>
+              <a:buChar char="✳"/>
+              <a:defRPr/>
+            </a:lvl4pPr>
+          </a:lstStyle>
           <a:p>
             <a:pPr lvl="0"/>
             <a:r>
@@ -1167,14 +1255,153 @@
               <a:rPr kumimoji="1" lang="ja-JP" altLang="en-US"/>
               <a:t>レベル</a:t>
             </a:r>
-            <a:endParaRPr kumimoji="1" lang="en-US"/>
+            <a:endParaRPr kumimoji="1" lang="ja-JP" altLang="en-US" dirty="0"/>
+          </a:p>
+        </p:txBody>
+      </p:sp>
+      <p:sp>
+        <p:nvSpPr>
+          <p:cNvPr id="6" name="Rectangle 20"/>
+          <p:cNvSpPr txBox="1">
+            <a:spLocks noChangeArrowheads="1"/>
+          </p:cNvSpPr>
+          <p:nvPr/>
+        </p:nvSpPr>
+        <p:spPr bwMode="auto">
+          <a:xfrm>
+            <a:off x="11136056" y="6309032"/>
+            <a:ext cx="815941" cy="548969"/>
+          </a:xfrm>
+          <a:prstGeom prst="rect">
+            <a:avLst/>
+          </a:prstGeom>
+          <a:noFill/>
+          <a:ln w="9525">
+            <a:noFill/>
+            <a:miter lim="800000"/>
+            <a:headEnd/>
+            <a:tailEnd/>
+          </a:ln>
+          <a:effectLst/>
+        </p:spPr>
+        <p:txBody>
+          <a:bodyPr vert="horz" wrap="none" lIns="91440" tIns="45720" rIns="91440" bIns="45720" numCol="1" anchor="ctr" anchorCtr="0" compatLnSpc="1">
+            <a:prstTxWarp prst="textNoShape">
+              <a:avLst/>
+            </a:prstTxWarp>
+          </a:bodyPr>
+          <a:lstStyle>
+            <a:defPPr>
+              <a:defRPr lang="ja-JP"/>
+            </a:defPPr>
+            <a:lvl1pPr marL="0" algn="r" defTabSz="914400" rtl="0" eaLnBrk="1" latinLnBrk="0" hangingPunct="1">
+              <a:defRPr kumimoji="0" sz="2000" kern="1200">
+                <a:solidFill>
+                  <a:schemeClr val="tx1">
+                    <a:lumMod val="75000"/>
+                    <a:lumOff val="25000"/>
+                  </a:schemeClr>
+                </a:solidFill>
+                <a:latin typeface="+mn-lt"/>
+                <a:ea typeface="+mn-ea"/>
+                <a:cs typeface="+mn-cs"/>
+              </a:defRPr>
+            </a:lvl1pPr>
+            <a:lvl2pPr marL="457200" algn="l" defTabSz="914400" rtl="0" eaLnBrk="1" latinLnBrk="0" hangingPunct="1">
+              <a:defRPr kumimoji="1" sz="1800" kern="1200">
+                <a:solidFill>
+                  <a:schemeClr val="tx1"/>
+                </a:solidFill>
+                <a:latin typeface="+mn-lt"/>
+                <a:ea typeface="+mn-ea"/>
+                <a:cs typeface="+mn-cs"/>
+              </a:defRPr>
+            </a:lvl2pPr>
+            <a:lvl3pPr marL="914400" algn="l" defTabSz="914400" rtl="0" eaLnBrk="1" latinLnBrk="0" hangingPunct="1">
+              <a:defRPr kumimoji="1" sz="1800" kern="1200">
+                <a:solidFill>
+                  <a:schemeClr val="tx1"/>
+                </a:solidFill>
+                <a:latin typeface="+mn-lt"/>
+                <a:ea typeface="+mn-ea"/>
+                <a:cs typeface="+mn-cs"/>
+              </a:defRPr>
+            </a:lvl3pPr>
+            <a:lvl4pPr marL="1371600" algn="l" defTabSz="914400" rtl="0" eaLnBrk="1" latinLnBrk="0" hangingPunct="1">
+              <a:defRPr kumimoji="1" sz="1800" kern="1200">
+                <a:solidFill>
+                  <a:schemeClr val="tx1"/>
+                </a:solidFill>
+                <a:latin typeface="+mn-lt"/>
+                <a:ea typeface="+mn-ea"/>
+                <a:cs typeface="+mn-cs"/>
+              </a:defRPr>
+            </a:lvl4pPr>
+            <a:lvl5pPr marL="1828800" algn="l" defTabSz="914400" rtl="0" eaLnBrk="1" latinLnBrk="0" hangingPunct="1">
+              <a:defRPr kumimoji="1" sz="1800" kern="1200">
+                <a:solidFill>
+                  <a:schemeClr val="tx1"/>
+                </a:solidFill>
+                <a:latin typeface="+mn-lt"/>
+                <a:ea typeface="+mn-ea"/>
+                <a:cs typeface="+mn-cs"/>
+              </a:defRPr>
+            </a:lvl5pPr>
+            <a:lvl6pPr marL="2286000" algn="l" defTabSz="914400" rtl="0" eaLnBrk="1" latinLnBrk="0" hangingPunct="1">
+              <a:defRPr kumimoji="1" sz="1800" kern="1200">
+                <a:solidFill>
+                  <a:schemeClr val="tx1"/>
+                </a:solidFill>
+                <a:latin typeface="+mn-lt"/>
+                <a:ea typeface="+mn-ea"/>
+                <a:cs typeface="+mn-cs"/>
+              </a:defRPr>
+            </a:lvl6pPr>
+            <a:lvl7pPr marL="2743200" algn="l" defTabSz="914400" rtl="0" eaLnBrk="1" latinLnBrk="0" hangingPunct="1">
+              <a:defRPr kumimoji="1" sz="1800" kern="1200">
+                <a:solidFill>
+                  <a:schemeClr val="tx1"/>
+                </a:solidFill>
+                <a:latin typeface="+mn-lt"/>
+                <a:ea typeface="+mn-ea"/>
+                <a:cs typeface="+mn-cs"/>
+              </a:defRPr>
+            </a:lvl7pPr>
+            <a:lvl8pPr marL="3200400" algn="l" defTabSz="914400" rtl="0" eaLnBrk="1" latinLnBrk="0" hangingPunct="1">
+              <a:defRPr kumimoji="1" sz="1800" kern="1200">
+                <a:solidFill>
+                  <a:schemeClr val="tx1"/>
+                </a:solidFill>
+                <a:latin typeface="+mn-lt"/>
+                <a:ea typeface="+mn-ea"/>
+                <a:cs typeface="+mn-cs"/>
+              </a:defRPr>
+            </a:lvl8pPr>
+            <a:lvl9pPr marL="3657600" algn="l" defTabSz="914400" rtl="0" eaLnBrk="1" latinLnBrk="0" hangingPunct="1">
+              <a:defRPr kumimoji="1" sz="1800" kern="1200">
+                <a:solidFill>
+                  <a:schemeClr val="tx1"/>
+                </a:solidFill>
+                <a:latin typeface="+mn-lt"/>
+                <a:ea typeface="+mn-ea"/>
+                <a:cs typeface="+mn-cs"/>
+              </a:defRPr>
+            </a:lvl9pPr>
+          </a:lstStyle>
+          <a:p>
+            <a:fld id="{D2D8002D-B5B0-4BAC-B1F6-782DDCCE6D9C}" type="slidenum">
+              <a:rPr kumimoji="1" lang="ja-JP" altLang="en-US" sz="2000" smtClean="0"/>
+              <a:pPr/>
+              <a:t>‹#›</a:t>
+            </a:fld>
+            <a:endParaRPr kumimoji="1" lang="ja-JP" altLang="en-US" sz="2000" dirty="0"/>
           </a:p>
         </p:txBody>
       </p:sp>
     </p:spTree>
     <p:extLst>
       <p:ext uri="{BB962C8B-B14F-4D97-AF65-F5344CB8AC3E}">
-        <p14:creationId xmlns:p14="http://schemas.microsoft.com/office/powerpoint/2010/main" val="3452607853"/>
+        <p14:creationId xmlns:p14="http://schemas.microsoft.com/office/powerpoint/2010/main" val="3066001189"/>
       </p:ext>
     </p:extLst>
   </p:cSld>
@@ -1193,7 +1420,7 @@
 </p:sldLayout>
 </file>
 
-<file path=ppt/slideLayouts/slideLayout3.xml><?xml version="1.0" encoding="utf-8"?>
+<file path=ppt/slideLayouts/slideLayout4.xml><?xml version="1.0" encoding="utf-8"?>
 <p:sldLayout xmlns:a="http://schemas.openxmlformats.org/drawingml/2006/main" xmlns:r="http://schemas.openxmlformats.org/officeDocument/2006/relationships" xmlns:p="http://schemas.openxmlformats.org/presentationml/2006/main" preserve="1">
   <p:cSld name="1_タイトルとコンテンツ">
     <p:spTree>
@@ -1222,8 +1449,621 @@
         </p:nvSpPr>
         <p:spPr bwMode="auto">
           <a:xfrm>
-            <a:off x="431955" y="0"/>
-            <a:ext cx="8712046" cy="908972"/>
+            <a:off x="1415948" y="0"/>
+            <a:ext cx="9000100" cy="908972"/>
+          </a:xfrm>
+          <a:prstGeom prst="rect">
+            <a:avLst/>
+          </a:prstGeom>
+          <a:noFill/>
+          <a:ln w="9525">
+            <a:noFill/>
+            <a:miter lim="800000"/>
+            <a:headEnd/>
+            <a:tailEnd/>
+          </a:ln>
+          <a:effectLst/>
+        </p:spPr>
+        <p:txBody>
+          <a:bodyPr vert="horz" wrap="square" lIns="91440" tIns="0" rIns="91440" bIns="0" numCol="1" anchor="ctr" anchorCtr="0" compatLnSpc="1">
+            <a:prstTxWarp prst="textNoShape">
+              <a:avLst/>
+            </a:prstTxWarp>
+          </a:bodyPr>
+          <a:lstStyle>
+            <a:lvl1pPr>
+              <a:defRPr>
+                <a:latin typeface="+mn-lt"/>
+              </a:defRPr>
+            </a:lvl1pPr>
+          </a:lstStyle>
+          <a:p>
+            <a:pPr lvl="0"/>
+            <a:r>
+              <a:rPr lang="ja-JP" altLang="en-US"/>
+              <a:t>マスター タイトルの書式設定</a:t>
+            </a:r>
+            <a:endParaRPr lang="ja-JP" altLang="en-US" dirty="0"/>
+          </a:p>
+        </p:txBody>
+      </p:sp>
+      <p:sp>
+        <p:nvSpPr>
+          <p:cNvPr id="7" name="Rectangle 20"/>
+          <p:cNvSpPr>
+            <a:spLocks noGrp="1" noChangeArrowheads="1"/>
+          </p:cNvSpPr>
+          <p:nvPr>
+            <p:ph type="sldNum" sz="quarter" idx="4"/>
+          </p:nvPr>
+        </p:nvSpPr>
+        <p:spPr bwMode="auto">
+          <a:xfrm>
+            <a:off x="11136056" y="6309032"/>
+            <a:ext cx="815941" cy="548969"/>
+          </a:xfrm>
+          <a:prstGeom prst="rect">
+            <a:avLst/>
+          </a:prstGeom>
+          <a:noFill/>
+          <a:ln w="9525">
+            <a:noFill/>
+            <a:miter lim="800000"/>
+            <a:headEnd/>
+            <a:tailEnd/>
+          </a:ln>
+          <a:effectLst/>
+        </p:spPr>
+        <p:txBody>
+          <a:bodyPr vert="horz" wrap="none" lIns="91440" tIns="45720" rIns="91440" bIns="45720" numCol="1" anchor="ctr" anchorCtr="0" compatLnSpc="1">
+            <a:prstTxWarp prst="textNoShape">
+              <a:avLst/>
+            </a:prstTxWarp>
+          </a:bodyPr>
+          <a:lstStyle>
+            <a:lvl1pPr algn="r">
+              <a:defRPr kumimoji="0" sz="2000">
+                <a:solidFill>
+                  <a:schemeClr val="tx1">
+                    <a:lumMod val="75000"/>
+                    <a:lumOff val="25000"/>
+                  </a:schemeClr>
+                </a:solidFill>
+                <a:latin typeface="+mn-lt"/>
+              </a:defRPr>
+            </a:lvl1pPr>
+          </a:lstStyle>
+          <a:p>
+            <a:fld id="{D2D8002D-B5B0-4BAC-B1F6-782DDCCE6D9C}" type="slidenum">
+              <a:rPr kumimoji="1" lang="ja-JP" altLang="en-US" smtClean="0"/>
+              <a:t>‹#›</a:t>
+            </a:fld>
+            <a:endParaRPr kumimoji="1" lang="ja-JP" altLang="en-US"/>
+          </a:p>
+        </p:txBody>
+      </p:sp>
+    </p:spTree>
+    <p:extLst>
+      <p:ext uri="{BB962C8B-B14F-4D97-AF65-F5344CB8AC3E}">
+        <p14:creationId xmlns:p14="http://schemas.microsoft.com/office/powerpoint/2010/main" val="3912365290"/>
+      </p:ext>
+    </p:extLst>
+  </p:cSld>
+  <p:clrMapOvr>
+    <a:masterClrMapping/>
+  </p:clrMapOvr>
+  <mc:AlternateContent xmlns:mc="http://schemas.openxmlformats.org/markup-compatibility/2006" xmlns:p14="http://schemas.microsoft.com/office/powerpoint/2010/main">
+    <mc:Choice Requires="p14">
+      <p:transition p14:dur="10"/>
+    </mc:Choice>
+    <mc:Fallback xmlns="">
+      <p:transition/>
+    </mc:Fallback>
+  </mc:AlternateContent>
+  <p:hf hdr="0" ftr="0" dt="0"/>
+</p:sldLayout>
+</file>
+
+<file path=ppt/slideLayouts/slideLayout5.xml><?xml version="1.0" encoding="utf-8"?>
+<p:sldLayout xmlns:a="http://schemas.openxmlformats.org/drawingml/2006/main" xmlns:r="http://schemas.openxmlformats.org/officeDocument/2006/relationships" xmlns:p="http://schemas.openxmlformats.org/presentationml/2006/main" showMasterSp="0" type="blank" preserve="1">
+  <p:cSld name="白紙">
+    <p:spTree>
+      <p:nvGrpSpPr>
+        <p:cNvPr id="1" name=""/>
+        <p:cNvGrpSpPr/>
+        <p:nvPr/>
+      </p:nvGrpSpPr>
+      <p:grpSpPr>
+        <a:xfrm>
+          <a:off x="0" y="0"/>
+          <a:ext cx="0" cy="0"/>
+          <a:chOff x="0" y="0"/>
+          <a:chExt cx="0" cy="0"/>
+        </a:xfrm>
+      </p:grpSpPr>
+      <p:sp>
+        <p:nvSpPr>
+          <p:cNvPr id="2" name="スライド番号プレースホルダ 1"/>
+          <p:cNvSpPr>
+            <a:spLocks noGrp="1"/>
+          </p:cNvSpPr>
+          <p:nvPr>
+            <p:ph type="sldNum" sz="quarter" idx="10"/>
+          </p:nvPr>
+        </p:nvSpPr>
+        <p:spPr/>
+        <p:txBody>
+          <a:bodyPr/>
+          <a:lstStyle>
+            <a:lvl1pPr>
+              <a:defRPr>
+                <a:solidFill>
+                  <a:schemeClr val="tx1">
+                    <a:lumMod val="75000"/>
+                    <a:lumOff val="25000"/>
+                  </a:schemeClr>
+                </a:solidFill>
+              </a:defRPr>
+            </a:lvl1pPr>
+          </a:lstStyle>
+          <a:p>
+            <a:fld id="{D2D8002D-B5B0-4BAC-B1F6-782DDCCE6D9C}" type="slidenum">
+              <a:rPr kumimoji="1" lang="ja-JP" altLang="en-US" smtClean="0"/>
+              <a:t>‹#›</a:t>
+            </a:fld>
+            <a:endParaRPr kumimoji="1" lang="ja-JP" altLang="en-US"/>
+          </a:p>
+        </p:txBody>
+      </p:sp>
+    </p:spTree>
+    <p:extLst>
+      <p:ext uri="{BB962C8B-B14F-4D97-AF65-F5344CB8AC3E}">
+        <p14:creationId xmlns:p14="http://schemas.microsoft.com/office/powerpoint/2010/main" val="3558703884"/>
+      </p:ext>
+    </p:extLst>
+  </p:cSld>
+  <p:clrMapOvr>
+    <a:masterClrMapping/>
+  </p:clrMapOvr>
+  <p:hf hdr="0" ftr="0" dt="0"/>
+</p:sldLayout>
+</file>
+
+<file path=ppt/slideLayouts/slideLayout6.xml><?xml version="1.0" encoding="utf-8"?>
+<p:sldLayout xmlns:a="http://schemas.openxmlformats.org/drawingml/2006/main" xmlns:r="http://schemas.openxmlformats.org/officeDocument/2006/relationships" xmlns:p="http://schemas.openxmlformats.org/presentationml/2006/main">
+  <p:cSld name="上">
+    <p:spTree>
+      <p:nvGrpSpPr>
+        <p:cNvPr id="1" name=""/>
+        <p:cNvGrpSpPr/>
+        <p:nvPr/>
+      </p:nvGrpSpPr>
+      <p:grpSpPr>
+        <a:xfrm>
+          <a:off x="0" y="0"/>
+          <a:ext cx="0" cy="0"/>
+          <a:chOff x="0" y="0"/>
+          <a:chExt cx="0" cy="0"/>
+        </a:xfrm>
+      </p:grpSpPr>
+      <p:sp>
+        <p:nvSpPr>
+          <p:cNvPr id="2" name="タイトル 1"/>
+          <p:cNvSpPr>
+            <a:spLocks noGrp="1"/>
+          </p:cNvSpPr>
+          <p:nvPr>
+            <p:ph type="title"/>
+          </p:nvPr>
+        </p:nvSpPr>
+        <p:spPr/>
+        <p:txBody>
+          <a:bodyPr/>
+          <a:lstStyle/>
+          <a:p>
+            <a:r>
+              <a:rPr kumimoji="1" lang="ja-JP" altLang="en-US"/>
+              <a:t>マスター タイトルの書式設定</a:t>
+            </a:r>
+          </a:p>
+        </p:txBody>
+      </p:sp>
+      <p:sp>
+        <p:nvSpPr>
+          <p:cNvPr id="4" name="フッター プレースホルダー 3"/>
+          <p:cNvSpPr>
+            <a:spLocks noGrp="1"/>
+          </p:cNvSpPr>
+          <p:nvPr>
+            <p:ph type="ftr" sz="quarter" idx="11"/>
+          </p:nvPr>
+        </p:nvSpPr>
+        <p:spPr>
+          <a:xfrm>
+            <a:off x="8976384" y="2"/>
+            <a:ext cx="3215616" cy="278579"/>
+          </a:xfrm>
+          <a:prstGeom prst="rect">
+            <a:avLst/>
+          </a:prstGeom>
+        </p:spPr>
+        <p:txBody>
+          <a:bodyPr/>
+          <a:lstStyle/>
+          <a:p>
+            <a:r>
+              <a:rPr lang="ja-JP" altLang="en-US"/>
+              <a:t>ディジタル回路</a:t>
+            </a:r>
+            <a:endParaRPr lang="ja-JP" altLang="ja-JP"/>
+          </a:p>
+        </p:txBody>
+      </p:sp>
+      <p:sp>
+        <p:nvSpPr>
+          <p:cNvPr id="5" name="スライド番号プレースホルダー 4"/>
+          <p:cNvSpPr>
+            <a:spLocks noGrp="1"/>
+          </p:cNvSpPr>
+          <p:nvPr>
+            <p:ph type="sldNum" sz="quarter" idx="12"/>
+          </p:nvPr>
+        </p:nvSpPr>
+        <p:spPr>
+          <a:xfrm>
+            <a:off x="11711936" y="6482651"/>
+            <a:ext cx="480064" cy="360048"/>
+          </a:xfrm>
+          <a:prstGeom prst="rect">
+            <a:avLst/>
+          </a:prstGeom>
+        </p:spPr>
+        <p:txBody>
+          <a:bodyPr/>
+          <a:lstStyle/>
+          <a:p>
+            <a:fld id="{D2D8002D-B5B0-4BAC-B1F6-782DDCCE6D9C}" type="slidenum">
+              <a:rPr kumimoji="1" lang="ja-JP" altLang="en-US" smtClean="0"/>
+              <a:t>‹#›</a:t>
+            </a:fld>
+            <a:endParaRPr kumimoji="1" lang="ja-JP" altLang="en-US"/>
+          </a:p>
+        </p:txBody>
+      </p:sp>
+      <p:sp>
+        <p:nvSpPr>
+          <p:cNvPr id="8" name="コンテンツ プレースホルダー 7"/>
+          <p:cNvSpPr>
+            <a:spLocks noGrp="1"/>
+          </p:cNvSpPr>
+          <p:nvPr>
+            <p:ph sz="quarter" idx="13"/>
+          </p:nvPr>
+        </p:nvSpPr>
+        <p:spPr>
+          <a:xfrm>
+            <a:off x="335232" y="1268712"/>
+            <a:ext cx="11521536" cy="2160288"/>
+          </a:xfrm>
+        </p:spPr>
+        <p:txBody>
+          <a:bodyPr anchor="t" anchorCtr="0"/>
+          <a:lstStyle/>
+          <a:p>
+            <a:pPr lvl="0"/>
+            <a:r>
+              <a:rPr kumimoji="1" lang="ja-JP" altLang="en-US"/>
+              <a:t>マスター テキストの書式設定</a:t>
+            </a:r>
+          </a:p>
+          <a:p>
+            <a:pPr lvl="1"/>
+            <a:r>
+              <a:rPr kumimoji="1" lang="ja-JP" altLang="en-US"/>
+              <a:t>第 </a:t>
+            </a:r>
+            <a:r>
+              <a:rPr kumimoji="1" lang="en-US" altLang="ja-JP"/>
+              <a:t>2 </a:t>
+            </a:r>
+            <a:r>
+              <a:rPr kumimoji="1" lang="ja-JP" altLang="en-US"/>
+              <a:t>レベル</a:t>
+            </a:r>
+          </a:p>
+          <a:p>
+            <a:pPr lvl="2"/>
+            <a:r>
+              <a:rPr kumimoji="1" lang="ja-JP" altLang="en-US"/>
+              <a:t>第 </a:t>
+            </a:r>
+            <a:r>
+              <a:rPr kumimoji="1" lang="en-US" altLang="ja-JP"/>
+              <a:t>3 </a:t>
+            </a:r>
+            <a:r>
+              <a:rPr kumimoji="1" lang="ja-JP" altLang="en-US"/>
+              <a:t>レベル</a:t>
+            </a:r>
+          </a:p>
+          <a:p>
+            <a:pPr lvl="3"/>
+            <a:r>
+              <a:rPr kumimoji="1" lang="ja-JP" altLang="en-US"/>
+              <a:t>第 </a:t>
+            </a:r>
+            <a:r>
+              <a:rPr kumimoji="1" lang="en-US" altLang="ja-JP"/>
+              <a:t>4 </a:t>
+            </a:r>
+            <a:r>
+              <a:rPr kumimoji="1" lang="ja-JP" altLang="en-US"/>
+              <a:t>レベル</a:t>
+            </a:r>
+          </a:p>
+          <a:p>
+            <a:pPr lvl="4"/>
+            <a:r>
+              <a:rPr kumimoji="1" lang="ja-JP" altLang="en-US"/>
+              <a:t>第 </a:t>
+            </a:r>
+            <a:r>
+              <a:rPr kumimoji="1" lang="en-US" altLang="ja-JP"/>
+              <a:t>5 </a:t>
+            </a:r>
+            <a:r>
+              <a:rPr kumimoji="1" lang="ja-JP" altLang="en-US"/>
+              <a:t>レベル</a:t>
+            </a:r>
+            <a:endParaRPr kumimoji="1" lang="ja-JP" altLang="en-US" dirty="0"/>
+          </a:p>
+        </p:txBody>
+      </p:sp>
+    </p:spTree>
+    <p:extLst>
+      <p:ext uri="{BB962C8B-B14F-4D97-AF65-F5344CB8AC3E}">
+        <p14:creationId xmlns:p14="http://schemas.microsoft.com/office/powerpoint/2010/main" val="2370258821"/>
+      </p:ext>
+    </p:extLst>
+  </p:cSld>
+  <p:clrMapOvr>
+    <a:masterClrMapping/>
+  </p:clrMapOvr>
+  <mc:AlternateContent xmlns:mc="http://schemas.openxmlformats.org/markup-compatibility/2006" xmlns:p14="http://schemas.microsoft.com/office/powerpoint/2010/main">
+    <mc:Choice Requires="p14">
+      <p:transition spd="slow">
+        <p14:pan dir="u"/>
+      </p:transition>
+    </mc:Choice>
+    <mc:Fallback xmlns="">
+      <p:transition spd="slow">
+        <p:fade/>
+      </p:transition>
+    </mc:Fallback>
+  </mc:AlternateContent>
+  <p:hf hdr="0" ftr="0" dt="0"/>
+</p:sldLayout>
+</file>
+
+<file path=ppt/slideLayouts/slideLayout7.xml><?xml version="1.0" encoding="utf-8"?>
+<p:sldLayout xmlns:a="http://schemas.openxmlformats.org/drawingml/2006/main" xmlns:r="http://schemas.openxmlformats.org/officeDocument/2006/relationships" xmlns:p="http://schemas.openxmlformats.org/presentationml/2006/main" showMasterSp="0">
+  <p:cSld name="タイトルのみ">
+    <p:spTree>
+      <p:nvGrpSpPr>
+        <p:cNvPr id="1" name=""/>
+        <p:cNvGrpSpPr/>
+        <p:nvPr/>
+      </p:nvGrpSpPr>
+      <p:grpSpPr>
+        <a:xfrm>
+          <a:off x="0" y="0"/>
+          <a:ext cx="0" cy="0"/>
+          <a:chOff x="0" y="0"/>
+          <a:chExt cx="0" cy="0"/>
+        </a:xfrm>
+      </p:grpSpPr>
+      <p:sp>
+        <p:nvSpPr>
+          <p:cNvPr id="3" name="スライド番号プレースホルダ 2"/>
+          <p:cNvSpPr>
+            <a:spLocks noGrp="1"/>
+          </p:cNvSpPr>
+          <p:nvPr>
+            <p:ph type="sldNum" sz="quarter" idx="10"/>
+          </p:nvPr>
+        </p:nvSpPr>
+        <p:spPr/>
+        <p:txBody>
+          <a:bodyPr/>
+          <a:lstStyle>
+            <a:lvl1pPr>
+              <a:defRPr>
+                <a:solidFill>
+                  <a:srgbClr val="686D6D"/>
+                </a:solidFill>
+              </a:defRPr>
+            </a:lvl1pPr>
+          </a:lstStyle>
+          <a:p>
+            <a:fld id="{D2D8002D-B5B0-4BAC-B1F6-782DDCCE6D9C}" type="slidenum">
+              <a:rPr kumimoji="1" lang="ja-JP" altLang="en-US" smtClean="0"/>
+              <a:t>‹#›</a:t>
+            </a:fld>
+            <a:endParaRPr kumimoji="1" lang="ja-JP" altLang="en-US"/>
+          </a:p>
+        </p:txBody>
+      </p:sp>
+      <p:sp>
+        <p:nvSpPr>
+          <p:cNvPr id="5" name="タイトル 4"/>
+          <p:cNvSpPr>
+            <a:spLocks noGrp="1"/>
+          </p:cNvSpPr>
+          <p:nvPr>
+            <p:ph type="title"/>
+          </p:nvPr>
+        </p:nvSpPr>
+        <p:spPr/>
+        <p:txBody>
+          <a:bodyPr/>
+          <a:lstStyle>
+            <a:lvl1pPr>
+              <a:defRPr>
+                <a:solidFill>
+                  <a:schemeClr val="accent4"/>
+                </a:solidFill>
+              </a:defRPr>
+            </a:lvl1pPr>
+          </a:lstStyle>
+          <a:p>
+            <a:r>
+              <a:rPr kumimoji="1" lang="ja-JP" altLang="en-US"/>
+              <a:t>マスター タイトルの書式設定</a:t>
+            </a:r>
+            <a:endParaRPr kumimoji="1" lang="ja-JP" altLang="en-US" dirty="0"/>
+          </a:p>
+        </p:txBody>
+      </p:sp>
+      <p:sp>
+        <p:nvSpPr>
+          <p:cNvPr id="4" name="コンテンツ プレースホルダー 3">
+            <a:extLst>
+              <a:ext uri="{FF2B5EF4-FFF2-40B4-BE49-F238E27FC236}">
+                <a16:creationId xmlns:a16="http://schemas.microsoft.com/office/drawing/2014/main" id="{3B411819-7407-177D-333B-1437DD14AF43}"/>
+              </a:ext>
+            </a:extLst>
+          </p:cNvPr>
+          <p:cNvSpPr>
+            <a:spLocks noGrp="1"/>
+          </p:cNvSpPr>
+          <p:nvPr>
+            <p:ph sz="quarter" idx="11"/>
+          </p:nvPr>
+        </p:nvSpPr>
+        <p:spPr>
+          <a:xfrm>
+            <a:off x="815941" y="1088974"/>
+            <a:ext cx="11040123" cy="5220058"/>
+          </a:xfrm>
+        </p:spPr>
+        <p:txBody>
+          <a:bodyPr/>
+          <a:lstStyle/>
+          <a:p>
+            <a:pPr lvl="0"/>
+            <a:r>
+              <a:rPr kumimoji="1" lang="ja-JP" altLang="en-US"/>
+              <a:t>マスター テキストの書式設定</a:t>
+            </a:r>
+          </a:p>
+          <a:p>
+            <a:pPr lvl="1"/>
+            <a:r>
+              <a:rPr kumimoji="1" lang="ja-JP" altLang="en-US"/>
+              <a:t>第 </a:t>
+            </a:r>
+            <a:r>
+              <a:rPr kumimoji="1" lang="en-US" altLang="ja-JP"/>
+              <a:t>2 </a:t>
+            </a:r>
+            <a:r>
+              <a:rPr kumimoji="1" lang="ja-JP" altLang="en-US"/>
+              <a:t>レベル</a:t>
+            </a:r>
+          </a:p>
+          <a:p>
+            <a:pPr lvl="2"/>
+            <a:r>
+              <a:rPr kumimoji="1" lang="ja-JP" altLang="en-US"/>
+              <a:t>第 </a:t>
+            </a:r>
+            <a:r>
+              <a:rPr kumimoji="1" lang="en-US" altLang="ja-JP"/>
+              <a:t>3 </a:t>
+            </a:r>
+            <a:r>
+              <a:rPr kumimoji="1" lang="ja-JP" altLang="en-US"/>
+              <a:t>レベル</a:t>
+            </a:r>
+          </a:p>
+          <a:p>
+            <a:pPr lvl="3"/>
+            <a:r>
+              <a:rPr kumimoji="1" lang="ja-JP" altLang="en-US"/>
+              <a:t>第 </a:t>
+            </a:r>
+            <a:r>
+              <a:rPr kumimoji="1" lang="en-US" altLang="ja-JP"/>
+              <a:t>4 </a:t>
+            </a:r>
+            <a:r>
+              <a:rPr kumimoji="1" lang="ja-JP" altLang="en-US"/>
+              <a:t>レベル</a:t>
+            </a:r>
+          </a:p>
+          <a:p>
+            <a:pPr lvl="4"/>
+            <a:r>
+              <a:rPr kumimoji="1" lang="ja-JP" altLang="en-US"/>
+              <a:t>第 </a:t>
+            </a:r>
+            <a:r>
+              <a:rPr kumimoji="1" lang="en-US" altLang="ja-JP"/>
+              <a:t>5 </a:t>
+            </a:r>
+            <a:r>
+              <a:rPr kumimoji="1" lang="ja-JP" altLang="en-US"/>
+              <a:t>レベル</a:t>
+            </a:r>
+            <a:endParaRPr kumimoji="1" lang="en-US"/>
+          </a:p>
+        </p:txBody>
+      </p:sp>
+    </p:spTree>
+    <p:extLst>
+      <p:ext uri="{BB962C8B-B14F-4D97-AF65-F5344CB8AC3E}">
+        <p14:creationId xmlns:p14="http://schemas.microsoft.com/office/powerpoint/2010/main" val="212247565"/>
+      </p:ext>
+    </p:extLst>
+  </p:cSld>
+  <p:clrMapOvr>
+    <a:masterClrMapping/>
+  </p:clrMapOvr>
+  <p:hf hdr="0" ftr="0" dt="0"/>
+</p:sldLayout>
+</file>
+
+<file path=ppt/slideLayouts/slideLayout8.xml><?xml version="1.0" encoding="utf-8"?>
+<p:sldLayout xmlns:a="http://schemas.openxmlformats.org/drawingml/2006/main" xmlns:r="http://schemas.openxmlformats.org/officeDocument/2006/relationships" xmlns:p="http://schemas.openxmlformats.org/presentationml/2006/main" preserve="1" userDrawn="1">
+  <p:cSld name="2_タイトルとコンテンツ">
+    <p:spTree>
+      <p:nvGrpSpPr>
+        <p:cNvPr id="1" name=""/>
+        <p:cNvGrpSpPr/>
+        <p:nvPr/>
+      </p:nvGrpSpPr>
+      <p:grpSpPr>
+        <a:xfrm>
+          <a:off x="0" y="0"/>
+          <a:ext cx="0" cy="0"/>
+          <a:chOff x="0" y="0"/>
+          <a:chExt cx="0" cy="0"/>
+        </a:xfrm>
+      </p:grpSpPr>
+      <p:sp>
+        <p:nvSpPr>
+          <p:cNvPr id="5" name="Rectangle 2"/>
+          <p:cNvSpPr>
+            <a:spLocks noGrp="1" noChangeArrowheads="1"/>
+          </p:cNvSpPr>
+          <p:nvPr>
+            <p:ph type="title"/>
+          </p:nvPr>
+        </p:nvSpPr>
+        <p:spPr bwMode="auto">
+          <a:xfrm>
+            <a:off x="815941" y="0"/>
+            <a:ext cx="11376059" cy="908972"/>
           </a:xfrm>
           <a:prstGeom prst="rect">
             <a:avLst/>
@@ -1261,18 +2101,16 @@
       </p:sp>
       <p:sp>
         <p:nvSpPr>
-          <p:cNvPr id="7" name="Rectangle 20"/>
-          <p:cNvSpPr>
-            <a:spLocks noGrp="1" noChangeArrowheads="1"/>
+          <p:cNvPr id="8" name="Rectangle 20"/>
+          <p:cNvSpPr txBox="1">
+            <a:spLocks noChangeArrowheads="1"/>
           </p:cNvSpPr>
-          <p:nvPr>
-            <p:ph type="sldNum" sz="quarter" idx="4"/>
-          </p:nvPr>
+          <p:nvPr/>
         </p:nvSpPr>
         <p:spPr bwMode="auto">
           <a:xfrm>
-            <a:off x="8532044" y="6309032"/>
-            <a:ext cx="611956" cy="548968"/>
+            <a:off x="10896053" y="6309033"/>
+            <a:ext cx="960011" cy="548971"/>
           </a:xfrm>
           <a:prstGeom prst="rect">
             <a:avLst/>
@@ -1287,14 +2125,17 @@
           <a:effectLst/>
         </p:spPr>
         <p:txBody>
-          <a:bodyPr vert="horz" wrap="none" lIns="91440" tIns="45720" rIns="91440" bIns="45720" numCol="1" anchor="ctr" anchorCtr="0" compatLnSpc="1">
+          <a:bodyPr vert="horz" wrap="none" lIns="68580" tIns="34290" rIns="68580" bIns="34290" numCol="1" anchor="ctr" anchorCtr="0" compatLnSpc="1">
             <a:prstTxWarp prst="textNoShape">
               <a:avLst/>
             </a:prstTxWarp>
           </a:bodyPr>
           <a:lstStyle>
-            <a:lvl1pPr algn="r">
-              <a:defRPr kumimoji="0" sz="1500">
+            <a:defPPr>
+              <a:defRPr lang="ja-JP"/>
+            </a:defPPr>
+            <a:lvl1pPr marL="0" algn="r" defTabSz="914400" rtl="0" eaLnBrk="1" latinLnBrk="0" hangingPunct="1">
+              <a:defRPr kumimoji="0" sz="2000" kern="1200">
                 <a:solidFill>
                   <a:schemeClr val="tx1">
                     <a:lumMod val="75000"/>
@@ -1302,22 +2143,200 @@
                   </a:schemeClr>
                 </a:solidFill>
                 <a:latin typeface="+mn-lt"/>
+                <a:ea typeface="+mn-ea"/>
+                <a:cs typeface="+mn-cs"/>
               </a:defRPr>
             </a:lvl1pPr>
+            <a:lvl2pPr marL="457200" algn="l" defTabSz="914400" rtl="0" eaLnBrk="1" latinLnBrk="0" hangingPunct="1">
+              <a:defRPr kumimoji="1" sz="1800" kern="1200">
+                <a:solidFill>
+                  <a:schemeClr val="tx1"/>
+                </a:solidFill>
+                <a:latin typeface="+mn-lt"/>
+                <a:ea typeface="+mn-ea"/>
+                <a:cs typeface="+mn-cs"/>
+              </a:defRPr>
+            </a:lvl2pPr>
+            <a:lvl3pPr marL="914400" algn="l" defTabSz="914400" rtl="0" eaLnBrk="1" latinLnBrk="0" hangingPunct="1">
+              <a:defRPr kumimoji="1" sz="1800" kern="1200">
+                <a:solidFill>
+                  <a:schemeClr val="tx1"/>
+                </a:solidFill>
+                <a:latin typeface="+mn-lt"/>
+                <a:ea typeface="+mn-ea"/>
+                <a:cs typeface="+mn-cs"/>
+              </a:defRPr>
+            </a:lvl3pPr>
+            <a:lvl4pPr marL="1371600" algn="l" defTabSz="914400" rtl="0" eaLnBrk="1" latinLnBrk="0" hangingPunct="1">
+              <a:defRPr kumimoji="1" sz="1800" kern="1200">
+                <a:solidFill>
+                  <a:schemeClr val="tx1"/>
+                </a:solidFill>
+                <a:latin typeface="+mn-lt"/>
+                <a:ea typeface="+mn-ea"/>
+                <a:cs typeface="+mn-cs"/>
+              </a:defRPr>
+            </a:lvl4pPr>
+            <a:lvl5pPr marL="1828800" algn="l" defTabSz="914400" rtl="0" eaLnBrk="1" latinLnBrk="0" hangingPunct="1">
+              <a:defRPr kumimoji="1" sz="1800" kern="1200">
+                <a:solidFill>
+                  <a:schemeClr val="tx1"/>
+                </a:solidFill>
+                <a:latin typeface="+mn-lt"/>
+                <a:ea typeface="+mn-ea"/>
+                <a:cs typeface="+mn-cs"/>
+              </a:defRPr>
+            </a:lvl5pPr>
+            <a:lvl6pPr marL="2286000" algn="l" defTabSz="914400" rtl="0" eaLnBrk="1" latinLnBrk="0" hangingPunct="1">
+              <a:defRPr kumimoji="1" sz="1800" kern="1200">
+                <a:solidFill>
+                  <a:schemeClr val="tx1"/>
+                </a:solidFill>
+                <a:latin typeface="+mn-lt"/>
+                <a:ea typeface="+mn-ea"/>
+                <a:cs typeface="+mn-cs"/>
+              </a:defRPr>
+            </a:lvl6pPr>
+            <a:lvl7pPr marL="2743200" algn="l" defTabSz="914400" rtl="0" eaLnBrk="1" latinLnBrk="0" hangingPunct="1">
+              <a:defRPr kumimoji="1" sz="1800" kern="1200">
+                <a:solidFill>
+                  <a:schemeClr val="tx1"/>
+                </a:solidFill>
+                <a:latin typeface="+mn-lt"/>
+                <a:ea typeface="+mn-ea"/>
+                <a:cs typeface="+mn-cs"/>
+              </a:defRPr>
+            </a:lvl7pPr>
+            <a:lvl8pPr marL="3200400" algn="l" defTabSz="914400" rtl="0" eaLnBrk="1" latinLnBrk="0" hangingPunct="1">
+              <a:defRPr kumimoji="1" sz="1800" kern="1200">
+                <a:solidFill>
+                  <a:schemeClr val="tx1"/>
+                </a:solidFill>
+                <a:latin typeface="+mn-lt"/>
+                <a:ea typeface="+mn-ea"/>
+                <a:cs typeface="+mn-cs"/>
+              </a:defRPr>
+            </a:lvl8pPr>
+            <a:lvl9pPr marL="3657600" algn="l" defTabSz="914400" rtl="0" eaLnBrk="1" latinLnBrk="0" hangingPunct="1">
+              <a:defRPr kumimoji="1" sz="1800" kern="1200">
+                <a:solidFill>
+                  <a:schemeClr val="tx1"/>
+                </a:solidFill>
+                <a:latin typeface="+mn-lt"/>
+                <a:ea typeface="+mn-ea"/>
+                <a:cs typeface="+mn-cs"/>
+              </a:defRPr>
+            </a:lvl9pPr>
           </a:lstStyle>
           <a:p>
             <a:fld id="{D2D8002D-B5B0-4BAC-B1F6-782DDCCE6D9C}" type="slidenum">
-              <a:rPr kumimoji="1" lang="ja-JP" altLang="en-US" smtClean="0"/>
+              <a:rPr kumimoji="1" lang="ja-JP" altLang="en-US" sz="1500" smtClean="0"/>
+              <a:pPr/>
               <a:t>‹#›</a:t>
             </a:fld>
-            <a:endParaRPr kumimoji="1" lang="ja-JP" altLang="en-US"/>
+            <a:endParaRPr kumimoji="1" lang="ja-JP" altLang="en-US" sz="1500" dirty="0"/>
+          </a:p>
+        </p:txBody>
+      </p:sp>
+      <p:sp>
+        <p:nvSpPr>
+          <p:cNvPr id="3" name="コンテンツ プレースホルダー 2">
+            <a:extLst>
+              <a:ext uri="{FF2B5EF4-FFF2-40B4-BE49-F238E27FC236}">
+                <a16:creationId xmlns:a16="http://schemas.microsoft.com/office/drawing/2014/main" id="{ED3F4CC4-3DF1-E96F-EED4-9F7C4C9F5FFE}"/>
+              </a:ext>
+            </a:extLst>
+          </p:cNvPr>
+          <p:cNvSpPr>
+            <a:spLocks noGrp="1"/>
+          </p:cNvSpPr>
+          <p:nvPr>
+            <p:ph sz="quarter" idx="10"/>
+          </p:nvPr>
+        </p:nvSpPr>
+        <p:spPr>
+          <a:xfrm>
+            <a:off x="815941" y="1088974"/>
+            <a:ext cx="11040123" cy="5220058"/>
+          </a:xfrm>
+        </p:spPr>
+        <p:txBody>
+          <a:bodyPr/>
+          <a:lstStyle/>
+          <a:p>
+            <a:pPr lvl="0"/>
+            <a:r>
+              <a:rPr kumimoji="1" lang="ja-JP" altLang="en-US"/>
+              <a:t>マスター テキストの書式設定</a:t>
+            </a:r>
+          </a:p>
+          <a:p>
+            <a:pPr lvl="1"/>
+            <a:r>
+              <a:rPr kumimoji="1" lang="ja-JP" altLang="en-US"/>
+              <a:t>第 </a:t>
+            </a:r>
+            <a:r>
+              <a:rPr kumimoji="1" lang="en-US" altLang="ja-JP"/>
+              <a:t>2 </a:t>
+            </a:r>
+            <a:r>
+              <a:rPr kumimoji="1" lang="ja-JP" altLang="en-US"/>
+              <a:t>レベル</a:t>
+            </a:r>
+          </a:p>
+          <a:p>
+            <a:pPr lvl="2"/>
+            <a:r>
+              <a:rPr kumimoji="1" lang="ja-JP" altLang="en-US"/>
+              <a:t>第 </a:t>
+            </a:r>
+            <a:r>
+              <a:rPr kumimoji="1" lang="en-US" altLang="ja-JP"/>
+              <a:t>3 </a:t>
+            </a:r>
+            <a:r>
+              <a:rPr kumimoji="1" lang="ja-JP" altLang="en-US"/>
+              <a:t>レベル</a:t>
+            </a:r>
+          </a:p>
+          <a:p>
+            <a:pPr lvl="3"/>
+            <a:r>
+              <a:rPr kumimoji="1" lang="ja-JP" altLang="en-US"/>
+              <a:t>第 </a:t>
+            </a:r>
+            <a:r>
+              <a:rPr kumimoji="1" lang="en-US" altLang="ja-JP"/>
+              <a:t>4 </a:t>
+            </a:r>
+            <a:r>
+              <a:rPr kumimoji="1" lang="ja-JP" altLang="en-US"/>
+              <a:t>レベル</a:t>
+            </a:r>
+          </a:p>
+          <a:p>
+            <a:pPr lvl="4"/>
+            <a:r>
+              <a:rPr kumimoji="1" lang="ja-JP" altLang="en-US"/>
+              <a:t>第 </a:t>
+            </a:r>
+            <a:r>
+              <a:rPr kumimoji="1" lang="en-US" altLang="ja-JP"/>
+              <a:t>5 </a:t>
+            </a:r>
+            <a:r>
+              <a:rPr kumimoji="1" lang="ja-JP" altLang="en-US"/>
+              <a:t>レベル</a:t>
+            </a:r>
+            <a:endParaRPr kumimoji="1" lang="en-US"/>
           </a:p>
         </p:txBody>
       </p:sp>
     </p:spTree>
     <p:extLst>
       <p:ext uri="{BB962C8B-B14F-4D97-AF65-F5344CB8AC3E}">
-        <p14:creationId xmlns:p14="http://schemas.microsoft.com/office/powerpoint/2010/main" val="2428276314"/>
+        <p14:creationId xmlns:p14="http://schemas.microsoft.com/office/powerpoint/2010/main" val="3452607853"/>
       </p:ext>
     </p:extLst>
   </p:cSld>
@@ -1373,8 +2392,8 @@
         </p:nvSpPr>
         <p:spPr bwMode="auto">
           <a:xfrm>
-            <a:off x="611956" y="1088974"/>
-            <a:ext cx="8280092" cy="5220058"/>
+            <a:off x="1775953" y="1178975"/>
+            <a:ext cx="8640096" cy="5220057"/>
           </a:xfrm>
           <a:prstGeom prst="rect">
             <a:avLst/>
@@ -1473,203 +2492,7 @@
         <p:spPr bwMode="auto">
           <a:xfrm>
             <a:off x="0" y="0"/>
-            <a:ext cx="9144000" cy="908972"/>
-          </a:xfrm>
-          <a:prstGeom prst="rect">
-            <a:avLst/>
-          </a:prstGeom>
-          <a:solidFill>
-            <a:schemeClr val="accent5"/>
-          </a:solidFill>
-          <a:ln>
-            <a:noFill/>
-            <a:headEnd/>
-            <a:tailEnd type="triangle" w="sm" len="med"/>
-          </a:ln>
-        </p:spPr>
-        <p:style>
-          <a:lnRef idx="2">
-            <a:schemeClr val="dk1"/>
-          </a:lnRef>
-          <a:fillRef idx="1">
-            <a:schemeClr val="lt1"/>
-          </a:fillRef>
-          <a:effectRef idx="0">
-            <a:schemeClr val="dk1"/>
-          </a:effectRef>
-          <a:fontRef idx="minor">
-            <a:schemeClr val="dk1"/>
-          </a:fontRef>
-        </p:style>
-        <p:txBody>
-          <a:bodyPr rtlCol="0" anchor="ctr"/>
-          <a:lstStyle/>
-          <a:p>
-            <a:pPr algn="ctr"/>
-            <a:endParaRPr kumimoji="1" lang="ja-JP" altLang="en-US" sz="1350"/>
-          </a:p>
-        </p:txBody>
-      </p:sp>
-      <p:sp>
-        <p:nvSpPr>
-          <p:cNvPr id="22" name="Rectangle 2"/>
-          <p:cNvSpPr>
-            <a:spLocks noGrp="1" noChangeArrowheads="1"/>
-          </p:cNvSpPr>
-          <p:nvPr>
-            <p:ph type="title"/>
-          </p:nvPr>
-        </p:nvSpPr>
-        <p:spPr bwMode="auto">
-          <a:xfrm>
-            <a:off x="431955" y="0"/>
-            <a:ext cx="8712046" cy="908972"/>
-          </a:xfrm>
-          <a:prstGeom prst="rect">
-            <a:avLst/>
-          </a:prstGeom>
-          <a:noFill/>
-          <a:ln w="9525">
-            <a:noFill/>
-            <a:miter lim="800000"/>
-            <a:headEnd/>
-            <a:tailEnd/>
-          </a:ln>
-          <a:effectLst/>
-        </p:spPr>
-        <p:txBody>
-          <a:bodyPr vert="horz" wrap="square" lIns="91440" tIns="0" rIns="91440" bIns="0" numCol="1" anchor="ctr" anchorCtr="0" compatLnSpc="1">
-            <a:prstTxWarp prst="textNoShape">
-              <a:avLst/>
-            </a:prstTxWarp>
-          </a:bodyPr>
-          <a:lstStyle/>
-          <a:p>
-            <a:pPr lvl="0"/>
-            <a:r>
-              <a:rPr lang="ja-JP" altLang="en-US"/>
-              <a:t>マスタ タイトルの書式設定</a:t>
-            </a:r>
-          </a:p>
-        </p:txBody>
-      </p:sp>
-      <p:sp>
-        <p:nvSpPr>
-          <p:cNvPr id="6164" name="Rectangle 20"/>
-          <p:cNvSpPr>
-            <a:spLocks noGrp="1" noChangeArrowheads="1"/>
-          </p:cNvSpPr>
-          <p:nvPr>
-            <p:ph type="sldNum" sz="quarter" idx="4"/>
-          </p:nvPr>
-        </p:nvSpPr>
-        <p:spPr bwMode="auto">
-          <a:xfrm>
-            <a:off x="8172041" y="6309033"/>
-            <a:ext cx="720008" cy="548968"/>
-          </a:xfrm>
-          <a:prstGeom prst="rect">
-            <a:avLst/>
-          </a:prstGeom>
-          <a:noFill/>
-          <a:ln w="9525">
-            <a:noFill/>
-            <a:miter lim="800000"/>
-            <a:headEnd/>
-            <a:tailEnd/>
-          </a:ln>
-          <a:effectLst/>
-        </p:spPr>
-        <p:txBody>
-          <a:bodyPr vert="horz" wrap="none" lIns="91440" tIns="45720" rIns="91440" bIns="45720" numCol="1" anchor="ctr" anchorCtr="0" compatLnSpc="1">
-            <a:prstTxWarp prst="textNoShape">
-              <a:avLst/>
-            </a:prstTxWarp>
-          </a:bodyPr>
-          <a:lstStyle>
-            <a:lvl1pPr algn="r">
-              <a:defRPr kumimoji="0" sz="1500">
-                <a:solidFill>
-                  <a:schemeClr val="tx1">
-                    <a:lumMod val="75000"/>
-                    <a:lumOff val="25000"/>
-                  </a:schemeClr>
-                </a:solidFill>
-                <a:latin typeface="+mn-lt"/>
-              </a:defRPr>
-            </a:lvl1pPr>
-          </a:lstStyle>
-          <a:p>
-            <a:fld id="{D2D8002D-B5B0-4BAC-B1F6-782DDCCE6D9C}" type="slidenum">
-              <a:rPr kumimoji="1" lang="ja-JP" altLang="en-US" smtClean="0"/>
-              <a:t>‹#›</a:t>
-            </a:fld>
-            <a:endParaRPr kumimoji="1" lang="ja-JP" altLang="en-US"/>
-          </a:p>
-        </p:txBody>
-      </p:sp>
-      <p:sp>
-        <p:nvSpPr>
-          <p:cNvPr id="6" name="正方形/長方形 5"/>
-          <p:cNvSpPr/>
-          <p:nvPr/>
-        </p:nvSpPr>
-        <p:spPr bwMode="auto">
-          <a:xfrm>
-            <a:off x="0" y="0"/>
-            <a:ext cx="9144000" cy="908972"/>
-          </a:xfrm>
-          <a:prstGeom prst="rect">
-            <a:avLst/>
-          </a:prstGeom>
-          <a:solidFill>
-            <a:srgbClr val="505B80"/>
-          </a:solidFill>
-          <a:ln>
-            <a:noFill/>
-            <a:headEnd/>
-            <a:tailEnd type="triangle" w="sm" len="med"/>
-          </a:ln>
-        </p:spPr>
-        <p:style>
-          <a:lnRef idx="2">
-            <a:schemeClr val="dk1"/>
-          </a:lnRef>
-          <a:fillRef idx="1">
-            <a:schemeClr val="lt1"/>
-          </a:fillRef>
-          <a:effectRef idx="0">
-            <a:schemeClr val="dk1"/>
-          </a:effectRef>
-          <a:fontRef idx="minor">
-            <a:schemeClr val="dk1"/>
-          </a:fontRef>
-        </p:style>
-        <p:txBody>
-          <a:bodyPr rtlCol="0" anchor="ctr"/>
-          <a:lstStyle/>
-          <a:p>
-            <a:pPr algn="ctr"/>
-            <a:endParaRPr kumimoji="1" lang="ja-JP" altLang="en-US" sz="1350"/>
-          </a:p>
-        </p:txBody>
-      </p:sp>
-      <p:sp>
-        <p:nvSpPr>
-          <p:cNvPr id="3" name="正方形/長方形 2">
-            <a:extLst>
-              <a:ext uri="{FF2B5EF4-FFF2-40B4-BE49-F238E27FC236}">
-                <a16:creationId xmlns:a16="http://schemas.microsoft.com/office/drawing/2014/main" id="{2AF63CA2-9471-8B7B-FC2C-3C5E975D06B8}"/>
-              </a:ext>
-            </a:extLst>
-          </p:cNvPr>
-          <p:cNvSpPr/>
-          <p:nvPr userDrawn="1"/>
-        </p:nvSpPr>
-        <p:spPr bwMode="auto">
-          <a:xfrm>
-            <a:off x="0" y="0"/>
-            <a:ext cx="9144000" cy="908972"/>
+            <a:ext cx="12192000" cy="908972"/>
           </a:xfrm>
           <a:prstGeom prst="rect">
             <a:avLst/>
@@ -1702,22 +2525,181 @@
           <a:lstStyle/>
           <a:p>
             <a:pPr algn="ctr"/>
+            <a:endParaRPr kumimoji="1" lang="ja-JP" altLang="en-US" sz="2000">
+              <a:solidFill>
+                <a:schemeClr val="accent4"/>
+              </a:solidFill>
+            </a:endParaRPr>
+          </a:p>
+        </p:txBody>
+      </p:sp>
+      <p:sp>
+        <p:nvSpPr>
+          <p:cNvPr id="22" name="Rectangle 2"/>
+          <p:cNvSpPr>
+            <a:spLocks noGrp="1" noChangeArrowheads="1"/>
+          </p:cNvSpPr>
+          <p:nvPr>
+            <p:ph type="title"/>
+          </p:nvPr>
+        </p:nvSpPr>
+        <p:spPr bwMode="auto">
+          <a:xfrm>
+            <a:off x="1415948" y="0"/>
+            <a:ext cx="10776052" cy="908972"/>
+          </a:xfrm>
+          <a:prstGeom prst="rect">
+            <a:avLst/>
+          </a:prstGeom>
+          <a:noFill/>
+          <a:ln w="9525">
+            <a:noFill/>
+            <a:miter lim="800000"/>
+            <a:headEnd/>
+            <a:tailEnd/>
+          </a:ln>
+          <a:effectLst/>
+        </p:spPr>
+        <p:txBody>
+          <a:bodyPr vert="horz" wrap="square" lIns="91440" tIns="0" rIns="91440" bIns="0" numCol="1" anchor="ctr" anchorCtr="0" compatLnSpc="1">
+            <a:prstTxWarp prst="textNoShape">
+              <a:avLst/>
+            </a:prstTxWarp>
+          </a:bodyPr>
+          <a:lstStyle/>
+          <a:p>
+            <a:pPr lvl="0"/>
+            <a:r>
+              <a:rPr lang="ja-JP" altLang="en-US" dirty="0"/>
+              <a:t>マスタ タイトルの書式設定</a:t>
+            </a:r>
+          </a:p>
+        </p:txBody>
+      </p:sp>
+      <p:sp>
+        <p:nvSpPr>
+          <p:cNvPr id="6164" name="Rectangle 20"/>
+          <p:cNvSpPr>
+            <a:spLocks noGrp="1" noChangeArrowheads="1"/>
+          </p:cNvSpPr>
+          <p:nvPr>
+            <p:ph type="sldNum" sz="quarter" idx="4"/>
+          </p:nvPr>
+        </p:nvSpPr>
+        <p:spPr bwMode="auto">
+          <a:xfrm>
+            <a:off x="11136056" y="6309032"/>
+            <a:ext cx="815941" cy="548969"/>
+          </a:xfrm>
+          <a:prstGeom prst="rect">
+            <a:avLst/>
+          </a:prstGeom>
+          <a:noFill/>
+          <a:ln w="9525">
+            <a:noFill/>
+            <a:miter lim="800000"/>
+            <a:headEnd/>
+            <a:tailEnd/>
+          </a:ln>
+          <a:effectLst/>
+        </p:spPr>
+        <p:txBody>
+          <a:bodyPr vert="horz" wrap="none" lIns="91440" tIns="45720" rIns="91440" bIns="45720" numCol="1" anchor="ctr" anchorCtr="0" compatLnSpc="1">
+            <a:prstTxWarp prst="textNoShape">
+              <a:avLst/>
+            </a:prstTxWarp>
+          </a:bodyPr>
+          <a:lstStyle>
+            <a:lvl1pPr algn="r">
+              <a:defRPr kumimoji="0" sz="2000">
+                <a:solidFill>
+                  <a:schemeClr val="tx1">
+                    <a:lumMod val="75000"/>
+                    <a:lumOff val="25000"/>
+                  </a:schemeClr>
+                </a:solidFill>
+                <a:latin typeface="+mn-lt"/>
+              </a:defRPr>
+            </a:lvl1pPr>
+          </a:lstStyle>
+          <a:p>
+            <a:fld id="{D2D8002D-B5B0-4BAC-B1F6-782DDCCE6D9C}" type="slidenum">
+              <a:rPr kumimoji="1" lang="ja-JP" altLang="en-US" smtClean="0"/>
+              <a:t>‹#›</a:t>
+            </a:fld>
             <a:endParaRPr kumimoji="1" lang="ja-JP" altLang="en-US"/>
+          </a:p>
+        </p:txBody>
+      </p:sp>
+      <p:sp>
+        <p:nvSpPr>
+          <p:cNvPr id="3" name="正方形/長方形 2">
+            <a:extLst>
+              <a:ext uri="{FF2B5EF4-FFF2-40B4-BE49-F238E27FC236}">
+                <a16:creationId xmlns:a16="http://schemas.microsoft.com/office/drawing/2014/main" id="{40EE7D87-7FE3-C55B-F9ED-04053E84B2A8}"/>
+              </a:ext>
+            </a:extLst>
+          </p:cNvPr>
+          <p:cNvSpPr/>
+          <p:nvPr userDrawn="1"/>
+        </p:nvSpPr>
+        <p:spPr bwMode="auto">
+          <a:xfrm>
+            <a:off x="0" y="0"/>
+            <a:ext cx="12192000" cy="908972"/>
+          </a:xfrm>
+          <a:prstGeom prst="rect">
+            <a:avLst/>
+          </a:prstGeom>
+          <a:solidFill>
+            <a:schemeClr val="accent4"/>
+          </a:solidFill>
+          <a:ln>
+            <a:noFill/>
+            <a:headEnd/>
+            <a:tailEnd type="triangle" w="sm" len="med"/>
+          </a:ln>
+        </p:spPr>
+        <p:style>
+          <a:lnRef idx="2">
+            <a:schemeClr val="dk1"/>
+          </a:lnRef>
+          <a:fillRef idx="1">
+            <a:schemeClr val="lt1"/>
+          </a:fillRef>
+          <a:effectRef idx="0">
+            <a:schemeClr val="dk1"/>
+          </a:effectRef>
+          <a:fontRef idx="minor">
+            <a:schemeClr val="dk1"/>
+          </a:fontRef>
+        </p:style>
+        <p:txBody>
+          <a:bodyPr rtlCol="0" anchor="ctr"/>
+          <a:lstStyle/>
+          <a:p>
+            <a:pPr algn="ctr"/>
+            <a:endParaRPr kumimoji="1" lang="ja-JP" altLang="en-US" sz="1800"/>
           </a:p>
         </p:txBody>
       </p:sp>
     </p:spTree>
     <p:extLst>
       <p:ext uri="{BB962C8B-B14F-4D97-AF65-F5344CB8AC3E}">
-        <p14:creationId xmlns:p14="http://schemas.microsoft.com/office/powerpoint/2010/main" val="2180630630"/>
+        <p14:creationId xmlns:p14="http://schemas.microsoft.com/office/powerpoint/2010/main" val="215893579"/>
       </p:ext>
     </p:extLst>
   </p:cSld>
   <p:clrMap bg1="lt1" tx1="dk1" bg2="lt2" tx2="dk2" accent1="accent1" accent2="accent2" accent3="accent3" accent4="accent4" accent5="accent5" accent6="accent6" hlink="hlink" folHlink="folHlink"/>
   <p:sldLayoutIdLst>
-    <p:sldLayoutId id="2147483665" r:id="rId1"/>
-    <p:sldLayoutId id="2147483666" r:id="rId2"/>
-    <p:sldLayoutId id="2147483667" r:id="rId3"/>
+    <p:sldLayoutId id="2147483669" r:id="rId1"/>
+    <p:sldLayoutId id="2147483670" r:id="rId2"/>
+    <p:sldLayoutId id="2147483671" r:id="rId3"/>
+    <p:sldLayoutId id="2147483672" r:id="rId4"/>
+    <p:sldLayoutId id="2147483673" r:id="rId5"/>
+    <p:sldLayoutId id="2147483674" r:id="rId6"/>
+    <p:sldLayoutId id="2147483675" r:id="rId7"/>
+    <p:sldLayoutId id="2147483666" r:id="rId8"/>
   </p:sldLayoutIdLst>
   <p:hf hdr="0" ftr="0" dt="0"/>
   <p:txStyles>
@@ -1729,7 +2711,7 @@
         <a:spcAft>
           <a:spcPct val="0"/>
         </a:spcAft>
-        <a:defRPr kumimoji="1" sz="2100" b="1">
+        <a:defRPr kumimoji="1" sz="3200" b="1">
           <a:solidFill>
             <a:schemeClr val="bg1"/>
           </a:solidFill>
@@ -1745,7 +2727,7 @@
         <a:spcAft>
           <a:spcPct val="0"/>
         </a:spcAft>
-        <a:defRPr kumimoji="1" sz="2100">
+        <a:defRPr kumimoji="1" sz="2800">
           <a:solidFill>
             <a:schemeClr val="tx2"/>
           </a:solidFill>
@@ -1760,7 +2742,7 @@
         <a:spcAft>
           <a:spcPct val="0"/>
         </a:spcAft>
-        <a:defRPr kumimoji="1" sz="2100">
+        <a:defRPr kumimoji="1" sz="2800">
           <a:solidFill>
             <a:schemeClr val="tx2"/>
           </a:solidFill>
@@ -1775,7 +2757,7 @@
         <a:spcAft>
           <a:spcPct val="0"/>
         </a:spcAft>
-        <a:defRPr kumimoji="1" sz="2100">
+        <a:defRPr kumimoji="1" sz="2800">
           <a:solidFill>
             <a:schemeClr val="tx2"/>
           </a:solidFill>
@@ -1790,7 +2772,7 @@
         <a:spcAft>
           <a:spcPct val="0"/>
         </a:spcAft>
-        <a:defRPr kumimoji="1" sz="2100">
+        <a:defRPr kumimoji="1" sz="2800">
           <a:solidFill>
             <a:schemeClr val="tx2"/>
           </a:solidFill>
@@ -1798,14 +2780,14 @@
           <a:ea typeface="HG丸ｺﾞｼｯｸM-PRO" pitchFamily="50" charset="-128"/>
         </a:defRPr>
       </a:lvl5pPr>
-      <a:lvl6pPr marL="342900" algn="l" rtl="0" eaLnBrk="1" fontAlgn="base" hangingPunct="1">
+      <a:lvl6pPr marL="457200" algn="l" rtl="0" eaLnBrk="1" fontAlgn="base" hangingPunct="1">
         <a:spcBef>
           <a:spcPct val="0"/>
         </a:spcBef>
         <a:spcAft>
           <a:spcPct val="0"/>
         </a:spcAft>
-        <a:defRPr kumimoji="1" sz="2100">
+        <a:defRPr kumimoji="1" sz="2800">
           <a:solidFill>
             <a:schemeClr val="tx2"/>
           </a:solidFill>
@@ -1813,14 +2795,14 @@
           <a:ea typeface="HG丸ｺﾞｼｯｸM-PRO" pitchFamily="50" charset="-128"/>
         </a:defRPr>
       </a:lvl6pPr>
-      <a:lvl7pPr marL="685800" algn="l" rtl="0" eaLnBrk="1" fontAlgn="base" hangingPunct="1">
+      <a:lvl7pPr marL="914400" algn="l" rtl="0" eaLnBrk="1" fontAlgn="base" hangingPunct="1">
         <a:spcBef>
           <a:spcPct val="0"/>
         </a:spcBef>
         <a:spcAft>
           <a:spcPct val="0"/>
         </a:spcAft>
-        <a:defRPr kumimoji="1" sz="2100">
+        <a:defRPr kumimoji="1" sz="2800">
           <a:solidFill>
             <a:schemeClr val="tx2"/>
           </a:solidFill>
@@ -1828,14 +2810,14 @@
           <a:ea typeface="HG丸ｺﾞｼｯｸM-PRO" pitchFamily="50" charset="-128"/>
         </a:defRPr>
       </a:lvl7pPr>
-      <a:lvl8pPr marL="1028700" algn="l" rtl="0" eaLnBrk="1" fontAlgn="base" hangingPunct="1">
+      <a:lvl8pPr marL="1371600" algn="l" rtl="0" eaLnBrk="1" fontAlgn="base" hangingPunct="1">
         <a:spcBef>
           <a:spcPct val="0"/>
         </a:spcBef>
         <a:spcAft>
           <a:spcPct val="0"/>
         </a:spcAft>
-        <a:defRPr kumimoji="1" sz="2100">
+        <a:defRPr kumimoji="1" sz="2800">
           <a:solidFill>
             <a:schemeClr val="tx2"/>
           </a:solidFill>
@@ -1843,14 +2825,14 @@
           <a:ea typeface="HG丸ｺﾞｼｯｸM-PRO" pitchFamily="50" charset="-128"/>
         </a:defRPr>
       </a:lvl8pPr>
-      <a:lvl9pPr marL="1371600" algn="l" rtl="0" eaLnBrk="1" fontAlgn="base" hangingPunct="1">
+      <a:lvl9pPr marL="1828800" algn="l" rtl="0" eaLnBrk="1" fontAlgn="base" hangingPunct="1">
         <a:spcBef>
           <a:spcPct val="0"/>
         </a:spcBef>
         <a:spcAft>
           <a:spcPct val="0"/>
         </a:spcAft>
-        <a:defRPr kumimoji="1" sz="2100">
+        <a:defRPr kumimoji="1" sz="2800">
           <a:solidFill>
             <a:schemeClr val="tx2"/>
           </a:solidFill>
@@ -1876,7 +2858,7 @@
         <a:buFont typeface="Wingdings" panose="05000000000000000000" pitchFamily="2" charset="2"/>
         <a:buChar char="n"/>
         <a:tabLst>
-          <a:tab pos="1543050" algn="l"/>
+          <a:tab pos="2057400" algn="l"/>
         </a:tabLst>
         <a:defRPr kumimoji="1" sz="2000">
           <a:solidFill>
@@ -1901,16 +2883,13 @@
           <a:spcPts val="300"/>
         </a:spcAft>
         <a:buClr>
-          <a:schemeClr val="accent4">
-            <a:lumMod val="60000"/>
-            <a:lumOff val="40000"/>
-          </a:schemeClr>
+          <a:srgbClr val="909ECC"/>
         </a:buClr>
-        <a:buSzPct val="90000"/>
+        <a:buSzPct val="100000"/>
         <a:buFont typeface="Wingdings" panose="05000000000000000000" pitchFamily="2" charset="2"/>
         <a:buChar char="l"/>
         <a:tabLst>
-          <a:tab pos="1543050" algn="l"/>
+          <a:tab pos="2057400" algn="l"/>
         </a:tabLst>
         <a:defRPr kumimoji="1" sz="2000">
           <a:solidFill>
@@ -1935,16 +2914,13 @@
           <a:spcPts val="100"/>
         </a:spcAft>
         <a:buClr>
-          <a:schemeClr val="accent4">
-            <a:lumMod val="60000"/>
-            <a:lumOff val="40000"/>
-          </a:schemeClr>
+          <a:schemeClr val="accent4"/>
         </a:buClr>
         <a:buSzPct val="70000"/>
         <a:buFont typeface="メイリオ" panose="020B0604030504040204" pitchFamily="50" charset="-128"/>
         <a:buChar char="○"/>
         <a:tabLst>
-          <a:tab pos="1543050" algn="l"/>
+          <a:tab pos="2057400" algn="l"/>
         </a:tabLst>
         <a:defRPr kumimoji="1" sz="2000">
           <a:solidFill>
@@ -1960,7 +2936,7 @@
       </a:lvl3pPr>
       <a:lvl4pPr marL="1440000" indent="-360000" algn="l" rtl="0" eaLnBrk="1" fontAlgn="base" hangingPunct="1">
         <a:lnSpc>
-          <a:spcPct val="100000"/>
+          <a:spcPct val="110000"/>
         </a:lnSpc>
         <a:spcBef>
           <a:spcPts val="300"/>
@@ -1969,16 +2945,13 @@
           <a:spcPts val="100"/>
         </a:spcAft>
         <a:buClr>
-          <a:schemeClr val="accent4">
-            <a:lumMod val="60000"/>
-            <a:lumOff val="40000"/>
-          </a:schemeClr>
+          <a:schemeClr val="accent4"/>
         </a:buClr>
-        <a:buSzPct val="60000"/>
+        <a:buSzPct val="70000"/>
         <a:buFont typeface="メイリオ" panose="020B0604030504040204" pitchFamily="50" charset="-128"/>
         <a:buChar char="◇"/>
         <a:tabLst>
-          <a:tab pos="1543050" algn="l"/>
+          <a:tab pos="2057400" algn="l"/>
         </a:tabLst>
         <a:defRPr kumimoji="1" sz="2000">
           <a:solidFill>
@@ -2003,16 +2976,13 @@
           <a:spcPts val="100"/>
         </a:spcAft>
         <a:buClr>
-          <a:schemeClr val="accent4">
-            <a:lumMod val="60000"/>
-            <a:lumOff val="40000"/>
-          </a:schemeClr>
+          <a:schemeClr val="accent4"/>
         </a:buClr>
         <a:buSzPct val="80000"/>
-        <a:buFont typeface="メイリオ" panose="020B0604030504040204" pitchFamily="50" charset="-128"/>
+        <a:buFont typeface="MeiryoKe_PGothic" panose="020B0604030504040204" pitchFamily="50" charset="-128"/>
         <a:buChar char="＋"/>
         <a:tabLst>
-          <a:tab pos="1543050" algn="l"/>
+          <a:tab pos="2057400" algn="l"/>
         </a:tabLst>
         <a:defRPr kumimoji="1" sz="2000">
           <a:solidFill>
@@ -2026,7 +2996,7 @@
           <a:cs typeface="メイリオ" pitchFamily="50" charset="-128"/>
         </a:defRPr>
       </a:lvl5pPr>
-      <a:lvl6pPr marL="1885950" indent="-195263" algn="l" rtl="0" eaLnBrk="1" fontAlgn="base" hangingPunct="1">
+      <a:lvl6pPr marL="2514600" indent="-260350" algn="l" rtl="0" eaLnBrk="1" fontAlgn="base" hangingPunct="1">
         <a:spcBef>
           <a:spcPct val="20000"/>
         </a:spcBef>
@@ -2038,9 +3008,9 @@
         </a:buClr>
         <a:buChar char="•"/>
         <a:tabLst>
-          <a:tab pos="1543050" algn="l"/>
+          <a:tab pos="2057400" algn="l"/>
         </a:tabLst>
-        <a:defRPr kumimoji="1" sz="1500">
+        <a:defRPr kumimoji="1" sz="2000">
           <a:solidFill>
             <a:schemeClr val="tx1"/>
           </a:solidFill>
@@ -2048,7 +3018,7 @@
           <a:ea typeface="+mn-ea"/>
         </a:defRPr>
       </a:lvl6pPr>
-      <a:lvl7pPr marL="2228850" indent="-195263" algn="l" rtl="0" eaLnBrk="1" fontAlgn="base" hangingPunct="1">
+      <a:lvl7pPr marL="2971800" indent="-260350" algn="l" rtl="0" eaLnBrk="1" fontAlgn="base" hangingPunct="1">
         <a:spcBef>
           <a:spcPct val="20000"/>
         </a:spcBef>
@@ -2060,9 +3030,9 @@
         </a:buClr>
         <a:buChar char="•"/>
         <a:tabLst>
-          <a:tab pos="1543050" algn="l"/>
+          <a:tab pos="2057400" algn="l"/>
         </a:tabLst>
-        <a:defRPr kumimoji="1" sz="1500">
+        <a:defRPr kumimoji="1" sz="2000">
           <a:solidFill>
             <a:schemeClr val="tx1"/>
           </a:solidFill>
@@ -2070,7 +3040,7 @@
           <a:ea typeface="+mn-ea"/>
         </a:defRPr>
       </a:lvl7pPr>
-      <a:lvl8pPr marL="2571750" indent="-195263" algn="l" rtl="0" eaLnBrk="1" fontAlgn="base" hangingPunct="1">
+      <a:lvl8pPr marL="3429000" indent="-260350" algn="l" rtl="0" eaLnBrk="1" fontAlgn="base" hangingPunct="1">
         <a:spcBef>
           <a:spcPct val="20000"/>
         </a:spcBef>
@@ -2082,9 +3052,9 @@
         </a:buClr>
         <a:buChar char="•"/>
         <a:tabLst>
-          <a:tab pos="1543050" algn="l"/>
+          <a:tab pos="2057400" algn="l"/>
         </a:tabLst>
-        <a:defRPr kumimoji="1" sz="1500">
+        <a:defRPr kumimoji="1" sz="2000">
           <a:solidFill>
             <a:schemeClr val="tx1"/>
           </a:solidFill>
@@ -2092,7 +3062,7 @@
           <a:ea typeface="+mn-ea"/>
         </a:defRPr>
       </a:lvl8pPr>
-      <a:lvl9pPr marL="2914650" indent="-195263" algn="l" rtl="0" eaLnBrk="1" fontAlgn="base" hangingPunct="1">
+      <a:lvl9pPr marL="3886200" indent="-260350" algn="l" rtl="0" eaLnBrk="1" fontAlgn="base" hangingPunct="1">
         <a:spcBef>
           <a:spcPct val="20000"/>
         </a:spcBef>
@@ -2104,9 +3074,9 @@
         </a:buClr>
         <a:buChar char="•"/>
         <a:tabLst>
-          <a:tab pos="1543050" algn="l"/>
+          <a:tab pos="2057400" algn="l"/>
         </a:tabLst>
-        <a:defRPr kumimoji="1" sz="1500">
+        <a:defRPr kumimoji="1" sz="2000">
           <a:solidFill>
             <a:schemeClr val="tx1"/>
           </a:solidFill>
@@ -2119,8 +3089,8 @@
       <a:defPPr>
         <a:defRPr lang="ja-JP"/>
       </a:defPPr>
-      <a:lvl1pPr marL="0" algn="l" defTabSz="685800" rtl="0" eaLnBrk="1" latinLnBrk="0" hangingPunct="1">
-        <a:defRPr kumimoji="1" sz="1350" kern="1200">
+      <a:lvl1pPr marL="0" algn="l" defTabSz="914400" rtl="0" eaLnBrk="1" latinLnBrk="0" hangingPunct="1">
+        <a:defRPr kumimoji="1" sz="1800" kern="1200">
           <a:solidFill>
             <a:schemeClr val="tx1"/>
           </a:solidFill>
@@ -2129,8 +3099,8 @@
           <a:cs typeface="+mn-cs"/>
         </a:defRPr>
       </a:lvl1pPr>
-      <a:lvl2pPr marL="342900" algn="l" defTabSz="685800" rtl="0" eaLnBrk="1" latinLnBrk="0" hangingPunct="1">
-        <a:defRPr kumimoji="1" sz="1350" kern="1200">
+      <a:lvl2pPr marL="457200" algn="l" defTabSz="914400" rtl="0" eaLnBrk="1" latinLnBrk="0" hangingPunct="1">
+        <a:defRPr kumimoji="1" sz="1800" kern="1200">
           <a:solidFill>
             <a:schemeClr val="tx1"/>
           </a:solidFill>
@@ -2139,8 +3109,8 @@
           <a:cs typeface="+mn-cs"/>
         </a:defRPr>
       </a:lvl2pPr>
-      <a:lvl3pPr marL="685800" algn="l" defTabSz="685800" rtl="0" eaLnBrk="1" latinLnBrk="0" hangingPunct="1">
-        <a:defRPr kumimoji="1" sz="1350" kern="1200">
+      <a:lvl3pPr marL="914400" algn="l" defTabSz="914400" rtl="0" eaLnBrk="1" latinLnBrk="0" hangingPunct="1">
+        <a:defRPr kumimoji="1" sz="1800" kern="1200">
           <a:solidFill>
             <a:schemeClr val="tx1"/>
           </a:solidFill>
@@ -2149,8 +3119,8 @@
           <a:cs typeface="+mn-cs"/>
         </a:defRPr>
       </a:lvl3pPr>
-      <a:lvl4pPr marL="1028700" algn="l" defTabSz="685800" rtl="0" eaLnBrk="1" latinLnBrk="0" hangingPunct="1">
-        <a:defRPr kumimoji="1" sz="1350" kern="1200">
+      <a:lvl4pPr marL="1371600" algn="l" defTabSz="914400" rtl="0" eaLnBrk="1" latinLnBrk="0" hangingPunct="1">
+        <a:defRPr kumimoji="1" sz="1800" kern="1200">
           <a:solidFill>
             <a:schemeClr val="tx1"/>
           </a:solidFill>
@@ -2159,8 +3129,8 @@
           <a:cs typeface="+mn-cs"/>
         </a:defRPr>
       </a:lvl4pPr>
-      <a:lvl5pPr marL="1371600" algn="l" defTabSz="685800" rtl="0" eaLnBrk="1" latinLnBrk="0" hangingPunct="1">
-        <a:defRPr kumimoji="1" sz="1350" kern="1200">
+      <a:lvl5pPr marL="1828800" algn="l" defTabSz="914400" rtl="0" eaLnBrk="1" latinLnBrk="0" hangingPunct="1">
+        <a:defRPr kumimoji="1" sz="1800" kern="1200">
           <a:solidFill>
             <a:schemeClr val="tx1"/>
           </a:solidFill>
@@ -2169,8 +3139,8 @@
           <a:cs typeface="+mn-cs"/>
         </a:defRPr>
       </a:lvl5pPr>
-      <a:lvl6pPr marL="1714500" algn="l" defTabSz="685800" rtl="0" eaLnBrk="1" latinLnBrk="0" hangingPunct="1">
-        <a:defRPr kumimoji="1" sz="1350" kern="1200">
+      <a:lvl6pPr marL="2286000" algn="l" defTabSz="914400" rtl="0" eaLnBrk="1" latinLnBrk="0" hangingPunct="1">
+        <a:defRPr kumimoji="1" sz="1800" kern="1200">
           <a:solidFill>
             <a:schemeClr val="tx1"/>
           </a:solidFill>
@@ -2179,8 +3149,8 @@
           <a:cs typeface="+mn-cs"/>
         </a:defRPr>
       </a:lvl6pPr>
-      <a:lvl7pPr marL="2057400" algn="l" defTabSz="685800" rtl="0" eaLnBrk="1" latinLnBrk="0" hangingPunct="1">
-        <a:defRPr kumimoji="1" sz="1350" kern="1200">
+      <a:lvl7pPr marL="2743200" algn="l" defTabSz="914400" rtl="0" eaLnBrk="1" latinLnBrk="0" hangingPunct="1">
+        <a:defRPr kumimoji="1" sz="1800" kern="1200">
           <a:solidFill>
             <a:schemeClr val="tx1"/>
           </a:solidFill>
@@ -2189,8 +3159,8 @@
           <a:cs typeface="+mn-cs"/>
         </a:defRPr>
       </a:lvl7pPr>
-      <a:lvl8pPr marL="2400300" algn="l" defTabSz="685800" rtl="0" eaLnBrk="1" latinLnBrk="0" hangingPunct="1">
-        <a:defRPr kumimoji="1" sz="1350" kern="1200">
+      <a:lvl8pPr marL="3200400" algn="l" defTabSz="914400" rtl="0" eaLnBrk="1" latinLnBrk="0" hangingPunct="1">
+        <a:defRPr kumimoji="1" sz="1800" kern="1200">
           <a:solidFill>
             <a:schemeClr val="tx1"/>
           </a:solidFill>
@@ -2199,8 +3169,8 @@
           <a:cs typeface="+mn-cs"/>
         </a:defRPr>
       </a:lvl8pPr>
-      <a:lvl9pPr marL="2743200" algn="l" defTabSz="685800" rtl="0" eaLnBrk="1" latinLnBrk="0" hangingPunct="1">
-        <a:defRPr kumimoji="1" sz="1350" kern="1200">
+      <a:lvl9pPr marL="3657600" algn="l" defTabSz="914400" rtl="0" eaLnBrk="1" latinLnBrk="0" hangingPunct="1">
+        <a:defRPr kumimoji="1" sz="1800" kern="1200">
           <a:solidFill>
             <a:schemeClr val="tx1"/>
           </a:solidFill>
@@ -2243,7 +3213,7 @@
         </p:nvSpPr>
         <p:spPr>
           <a:xfrm>
-            <a:off x="611956" y="3969006"/>
+            <a:off x="2135956" y="3969007"/>
             <a:ext cx="7920088" cy="810153"/>
           </a:xfrm>
         </p:spPr>
@@ -2273,7 +3243,7 @@
               <a:rPr lang="ja-JP" altLang="en-US" sz="1800" b="0" dirty="0"/>
               <a:t>東京大学大学院情報理工学系研究科 創造情報学専攻</a:t>
             </a:r>
-            <a:endParaRPr kumimoji="1" lang="ja-JP" altLang="en-US" sz="3200" b="0" dirty="0"/>
+            <a:endParaRPr lang="ja-JP" altLang="en-US" sz="3200" b="0" dirty="0"/>
           </a:p>
         </p:txBody>
       </p:sp>
@@ -2289,7 +3259,7 @@
         </p:nvSpPr>
         <p:spPr>
           <a:xfrm>
-            <a:off x="8172450" y="6489700"/>
+            <a:off x="11220450" y="6489700"/>
             <a:ext cx="971550" cy="368300"/>
           </a:xfrm>
         </p:spPr>
@@ -2321,7 +3291,7 @@
         </p:nvSpPr>
         <p:spPr bwMode="auto">
           <a:xfrm>
-            <a:off x="791958" y="2528990"/>
+            <a:off x="2315958" y="2528990"/>
             <a:ext cx="7772400" cy="540006"/>
           </a:xfrm>
           <a:prstGeom prst="rect">
@@ -2578,7 +3548,7 @@
             <a:spLocks noGrp="1"/>
           </p:cNvSpPr>
           <p:nvPr>
-            <p:ph sz="quarter" idx="10"/>
+            <p:ph type="body" sz="quarter" idx="10"/>
           </p:nvPr>
         </p:nvSpPr>
         <p:spPr/>
@@ -2610,22 +3580,22 @@
               <a:rPr kumimoji="1" lang="en-US" altLang="ja-JP" dirty="0"/>
             </a:br>
             <a:r>
-              <a:rPr kumimoji="1" lang="en-US" altLang="ja-JP" sz="1800" dirty="0"/>
+              <a:rPr lang="en-US" altLang="ja-JP" sz="1800" dirty="0"/>
               <a:t> </a:t>
             </a:r>
             <a:r>
-              <a:rPr kumimoji="1" lang="ja-JP" altLang="en-US" sz="1800" dirty="0"/>
+              <a:rPr lang="ja-JP" altLang="en-US" sz="1800" dirty="0"/>
               <a:t>「コンピュータシステムの理論と実装 </a:t>
             </a:r>
             <a:r>
-              <a:rPr kumimoji="1" lang="en-US" altLang="ja-JP" sz="1800" dirty="0"/>
+              <a:rPr lang="en-US" altLang="ja-JP" sz="1800" dirty="0"/>
               <a:t>―</a:t>
             </a:r>
             <a:r>
-              <a:rPr kumimoji="1" lang="ja-JP" altLang="en-US" sz="1800" dirty="0"/>
+              <a:rPr lang="ja-JP" altLang="en-US" sz="1800" dirty="0"/>
               <a:t>モダンなコンピュータの作り方」</a:t>
             </a:r>
-            <a:endParaRPr kumimoji="1" lang="en-US" altLang="ja-JP" sz="1800" dirty="0"/>
+            <a:endParaRPr lang="en-US" altLang="ja-JP" sz="1800" dirty="0"/>
           </a:p>
           <a:p>
             <a:pPr lvl="1"/>
@@ -2773,7 +3743,7 @@
             <a:spLocks noGrp="1"/>
           </p:cNvSpPr>
           <p:nvPr>
-            <p:ph sz="quarter" idx="10"/>
+            <p:ph type="body" sz="quarter" idx="10"/>
           </p:nvPr>
         </p:nvSpPr>
         <p:spPr/>
@@ -2890,7 +3860,7 @@
             <a:spLocks noGrp="1"/>
           </p:cNvSpPr>
           <p:nvPr>
-            <p:ph sz="quarter" idx="10"/>
+            <p:ph type="body" sz="quarter" idx="10"/>
           </p:nvPr>
         </p:nvSpPr>
         <p:spPr/>
@@ -2899,35 +3869,58 @@
           <a:lstStyle/>
           <a:p>
             <a:r>
+              <a:rPr lang="ja-JP" altLang="en-US" dirty="0"/>
+              <a:t>これらの基本がある程度わかっている事を期待します：</a:t>
+            </a:r>
+            <a:endParaRPr lang="en-US" altLang="ja-JP" dirty="0"/>
+          </a:p>
+          <a:p>
+            <a:pPr lvl="1"/>
+            <a:r>
+              <a:rPr lang="en-US" altLang="ja-JP" dirty="0"/>
+              <a:t>C </a:t>
+            </a:r>
+            <a:r>
+              <a:rPr lang="ja-JP" altLang="en-US" dirty="0"/>
+              <a:t>言語（あるいは </a:t>
+            </a:r>
+            <a:r>
+              <a:rPr lang="en-US" altLang="ja-JP" dirty="0"/>
+              <a:t>Python</a:t>
+            </a:r>
+            <a:r>
+              <a:rPr lang="ja-JP" altLang="en-US" dirty="0"/>
+              <a:t>）のプログラミング</a:t>
+            </a:r>
+            <a:endParaRPr lang="en-US" altLang="ja-JP" dirty="0"/>
+          </a:p>
+          <a:p>
+            <a:pPr lvl="1"/>
+            <a:r>
+              <a:rPr lang="ja-JP" altLang="en-US" dirty="0"/>
+              <a:t>論理回路</a:t>
+            </a:r>
+            <a:endParaRPr kumimoji="1" lang="en-US" altLang="ja-JP" dirty="0"/>
+          </a:p>
+          <a:p>
+            <a:r>
               <a:rPr kumimoji="1" lang="ja-JP" altLang="en-US" dirty="0"/>
-              <a:t>以下の内容は必修で１年生の時にやっていると聞いているので，</a:t>
-            </a:r>
-            <a:br>
-              <a:rPr kumimoji="1" lang="en-US" altLang="ja-JP" dirty="0"/>
-            </a:br>
+              <a:t>理学部の学生さんは，上記の内容を必修で１年生の時に学んでいると聞いています</a:t>
+            </a:r>
+            <a:endParaRPr kumimoji="1" lang="en-US" altLang="ja-JP" dirty="0"/>
+          </a:p>
+          <a:p>
+            <a:r>
+              <a:rPr lang="ja-JP" altLang="en-US" dirty="0"/>
+              <a:t>共創工学部の学生さんは，関係する講義を受けた後に受講することをおすすめします</a:t>
+            </a:r>
+            <a:endParaRPr lang="en-US" altLang="ja-JP" dirty="0"/>
+          </a:p>
+          <a:p>
+            <a:pPr lvl="1"/>
             <a:r>
               <a:rPr kumimoji="1" lang="ja-JP" altLang="en-US" dirty="0"/>
-              <a:t>これらの基本がわかっている前提で進めます</a:t>
-            </a:r>
-            <a:endParaRPr kumimoji="1" lang="en-US" altLang="ja-JP" dirty="0"/>
-          </a:p>
-          <a:p>
-            <a:pPr lvl="1"/>
-            <a:r>
-              <a:rPr kumimoji="1" lang="en-US" altLang="ja-JP" dirty="0"/>
-              <a:t>C </a:t>
-            </a:r>
-            <a:r>
-              <a:rPr kumimoji="1" lang="ja-JP" altLang="en-US" dirty="0"/>
-              <a:t>言語のプログラミング</a:t>
-            </a:r>
-            <a:endParaRPr kumimoji="1" lang="en-US" altLang="ja-JP" dirty="0"/>
-          </a:p>
-          <a:p>
-            <a:pPr lvl="1"/>
-            <a:r>
-              <a:rPr kumimoji="1" lang="ja-JP" altLang="en-US" dirty="0"/>
-              <a:t>論理回路</a:t>
+              <a:t>コンピュータシステム序論等で論理回路を学ぶことができると聞いています</a:t>
             </a:r>
             <a:endParaRPr kumimoji="1" lang="en-US" dirty="0"/>
           </a:p>
@@ -3013,7 +4006,7 @@
             <a:spLocks noGrp="1"/>
           </p:cNvSpPr>
           <p:nvPr>
-            <p:ph sz="quarter" idx="10"/>
+            <p:ph type="body" sz="quarter" idx="10"/>
           </p:nvPr>
         </p:nvSpPr>
         <p:spPr/>
@@ -3051,14 +4044,7 @@
             <a:pPr lvl="2"/>
             <a:r>
               <a:rPr kumimoji="1" lang="ja-JP" altLang="en-US" dirty="0"/>
-              <a:t>第１回目は課題がありませんが，</a:t>
-            </a:r>
-            <a:br>
-              <a:rPr kumimoji="1" lang="en-US" altLang="ja-JP" dirty="0"/>
-            </a:br>
-            <a:r>
-              <a:rPr kumimoji="1" lang="ja-JP" altLang="en-US" dirty="0"/>
-              <a:t>次回以降は課題を出す予定です</a:t>
+              <a:t>第１回目は課題がありませんが，次回以降は課題を出す予定です</a:t>
             </a:r>
             <a:endParaRPr kumimoji="1" lang="en-US" altLang="ja-JP" dirty="0"/>
           </a:p>
@@ -3144,10 +4130,15 @@
             <a:spLocks noGrp="1"/>
           </p:cNvSpPr>
           <p:nvPr>
-            <p:ph sz="quarter" idx="10"/>
+            <p:ph type="body" sz="quarter" idx="10"/>
           </p:nvPr>
         </p:nvSpPr>
-        <p:spPr/>
+        <p:spPr>
+          <a:xfrm>
+            <a:off x="1775951" y="1088974"/>
+            <a:ext cx="9630107" cy="5490061"/>
+          </a:xfrm>
+        </p:spPr>
         <p:txBody>
           <a:bodyPr/>
           <a:lstStyle/>
@@ -3163,6 +4154,53 @@
             <a:r>
               <a:rPr kumimoji="1" lang="ja-JP" altLang="en-US" dirty="0"/>
               <a:t>普段の課題も成績に入れる予定です</a:t>
+            </a:r>
+            <a:endParaRPr kumimoji="1" lang="en-US" altLang="ja-JP" dirty="0"/>
+          </a:p>
+          <a:p>
+            <a:r>
+              <a:rPr lang="ja-JP" altLang="en-US" dirty="0"/>
+              <a:t>注意：</a:t>
+            </a:r>
+            <a:endParaRPr lang="en-US" altLang="ja-JP" dirty="0"/>
+          </a:p>
+          <a:p>
+            <a:pPr lvl="1"/>
+            <a:r>
+              <a:rPr kumimoji="1" lang="ja-JP" altLang="en-US" dirty="0"/>
+              <a:t>感想や課題の提出の，成績への寄与は非常に大きいです</a:t>
+            </a:r>
+            <a:endParaRPr kumimoji="1" lang="en-US" altLang="ja-JP" dirty="0"/>
+          </a:p>
+          <a:p>
+            <a:pPr lvl="1"/>
+            <a:r>
+              <a:rPr lang="ja-JP" altLang="en-US" dirty="0"/>
+              <a:t>課題の提出回数と試験の点数には極めて強い相関がみられます</a:t>
+            </a:r>
+            <a:endParaRPr lang="en-US" altLang="ja-JP" dirty="0"/>
+          </a:p>
+          <a:p>
+            <a:pPr lvl="2"/>
+            <a:r>
+              <a:rPr kumimoji="1" lang="ja-JP" altLang="en-US" dirty="0"/>
+              <a:t>試験で頑張ればよい，を実現できた人はほとんど全くいません</a:t>
+            </a:r>
+            <a:endParaRPr kumimoji="1" lang="en-US" altLang="ja-JP" dirty="0"/>
+          </a:p>
+          <a:p>
+            <a:pPr lvl="1"/>
+            <a:r>
+              <a:rPr lang="ja-JP" altLang="en-US" dirty="0"/>
+              <a:t>過去の実績的には，３回以上の提出のサボりは強い赤信号です</a:t>
+            </a:r>
+            <a:endParaRPr lang="en-US" altLang="ja-JP" dirty="0"/>
+          </a:p>
+          <a:p>
+            <a:pPr lvl="2"/>
+            <a:r>
+              <a:rPr kumimoji="1" lang="ja-JP" altLang="en-US" dirty="0"/>
+              <a:t>大半の人はほぼ全ての課題を提出しています</a:t>
             </a:r>
             <a:endParaRPr kumimoji="1" lang="en-US" altLang="ja-JP" dirty="0"/>
           </a:p>
@@ -3224,7 +4262,7 @@
         </p:nvSpPr>
         <p:spPr>
           <a:xfrm>
-            <a:off x="701957" y="2528990"/>
+            <a:off x="2225957" y="2528990"/>
             <a:ext cx="7920088" cy="540006"/>
           </a:xfrm>
         </p:spPr>
@@ -3337,7 +4375,7 @@
             <a:spLocks noGrp="1"/>
           </p:cNvSpPr>
           <p:nvPr>
-            <p:ph sz="quarter" idx="10"/>
+            <p:ph type="body" sz="quarter" idx="10"/>
           </p:nvPr>
         </p:nvSpPr>
         <p:spPr/>
@@ -3727,7 +4765,7 @@
             <a:spLocks noGrp="1"/>
           </p:cNvSpPr>
           <p:nvPr>
-            <p:ph sz="quarter" idx="10"/>
+            <p:ph type="body" sz="quarter" idx="10"/>
           </p:nvPr>
         </p:nvSpPr>
         <p:spPr/>
@@ -4033,7 +5071,7 @@
         </p:nvSpPr>
         <p:spPr bwMode="auto">
           <a:xfrm>
-            <a:off x="161951" y="2258987"/>
+            <a:off x="1685951" y="2258987"/>
             <a:ext cx="8460094" cy="3420038"/>
           </a:xfrm>
           <a:prstGeom prst="roundRect">
@@ -4071,7 +5109,7 @@
           <a:lstStyle/>
           <a:p>
             <a:pPr algn="ctr"/>
-            <a:endParaRPr kumimoji="1" lang="en-US" dirty="0">
+            <a:endParaRPr lang="en-US" dirty="0">
               <a:solidFill>
                 <a:schemeClr val="tx1">
                   <a:lumMod val="75000"/>
@@ -4121,7 +5159,7 @@
         </p:nvSpPr>
         <p:spPr bwMode="auto">
           <a:xfrm>
-            <a:off x="3221661" y="2348988"/>
+            <a:off x="4745661" y="2348988"/>
             <a:ext cx="5220058" cy="990010"/>
           </a:xfrm>
           <a:prstGeom prst="roundRect">
@@ -4159,14 +5197,14 @@
           <a:p>
             <a:pPr algn="ctr"/>
             <a:r>
-              <a:rPr kumimoji="1" lang="ja-JP" altLang="en-US" sz="1600" b="1" dirty="0">
+              <a:rPr lang="ja-JP" altLang="en-US" sz="1600" b="1" dirty="0">
                 <a:solidFill>
                   <a:schemeClr val="bg1"/>
                 </a:solidFill>
               </a:rPr>
               <a:t>システム・ソフトウェア</a:t>
             </a:r>
-            <a:endParaRPr kumimoji="1" lang="en-US" altLang="ja-JP" sz="1600" b="1" dirty="0">
+            <a:endParaRPr lang="en-US" altLang="ja-JP" sz="1600" b="1" dirty="0">
               <a:solidFill>
                 <a:schemeClr val="bg1"/>
               </a:solidFill>
@@ -4175,7 +5213,7 @@
           <a:p>
             <a:pPr algn="ctr"/>
             <a:r>
-              <a:rPr kumimoji="1" lang="en-US" altLang="ja-JP" sz="1600" b="1" dirty="0">
+              <a:rPr lang="en-US" altLang="ja-JP" sz="1600" b="1" dirty="0">
                 <a:solidFill>
                   <a:schemeClr val="bg1"/>
                 </a:solidFill>
@@ -4183,7 +5221,7 @@
               <a:t>OS / </a:t>
             </a:r>
             <a:r>
-              <a:rPr kumimoji="1" lang="ja-JP" altLang="en-US" sz="1600" b="1" dirty="0">
+              <a:rPr lang="ja-JP" altLang="en-US" sz="1600" b="1" dirty="0">
                 <a:solidFill>
                   <a:schemeClr val="bg1"/>
                 </a:solidFill>
@@ -4191,7 +5229,7 @@
               <a:t>コンパイラ </a:t>
             </a:r>
             <a:r>
-              <a:rPr kumimoji="1" lang="en-US" altLang="ja-JP" sz="1600" b="1" dirty="0">
+              <a:rPr lang="en-US" altLang="ja-JP" sz="1600" b="1" dirty="0">
                 <a:solidFill>
                   <a:schemeClr val="bg1"/>
                 </a:solidFill>
@@ -4199,7 +5237,7 @@
               <a:t>/ </a:t>
             </a:r>
             <a:r>
-              <a:rPr kumimoji="1" lang="ja-JP" altLang="en-US" sz="1600" b="1" dirty="0">
+              <a:rPr lang="ja-JP" altLang="en-US" sz="1600" b="1" dirty="0">
                 <a:solidFill>
                   <a:schemeClr val="bg1"/>
                 </a:solidFill>
@@ -4217,7 +5255,7 @@
         </p:nvSpPr>
         <p:spPr bwMode="auto">
           <a:xfrm>
-            <a:off x="3221985" y="3519000"/>
+            <a:off x="4745985" y="3519001"/>
             <a:ext cx="5220058" cy="990011"/>
           </a:xfrm>
           <a:prstGeom prst="roundRect">
@@ -4260,15 +5298,7 @@
                   <a:schemeClr val="bg1"/>
                 </a:solidFill>
               </a:rPr>
-              <a:t>（狭義の）コンピュータ</a:t>
-            </a:r>
-            <a:r>
-              <a:rPr kumimoji="1" lang="ja-JP" altLang="en-US" sz="2000" b="1" dirty="0">
-                <a:solidFill>
-                  <a:schemeClr val="bg1"/>
-                </a:solidFill>
-              </a:rPr>
-              <a:t>・アーキテクチャ</a:t>
+              <a:t>（狭義の）コンピュータ・アーキテクチャ</a:t>
             </a:r>
           </a:p>
         </p:txBody>
@@ -4281,7 +5311,7 @@
         </p:nvSpPr>
         <p:spPr bwMode="auto">
           <a:xfrm>
-            <a:off x="3221985" y="1178974"/>
+            <a:off x="4745985" y="1178975"/>
             <a:ext cx="5220058" cy="990011"/>
           </a:xfrm>
           <a:prstGeom prst="roundRect">
@@ -4319,76 +5349,12 @@
           <a:p>
             <a:pPr algn="ctr"/>
             <a:r>
-              <a:rPr kumimoji="1" lang="ja-JP" altLang="en-US" sz="1600" dirty="0">
+              <a:rPr lang="ja-JP" altLang="en-US" sz="1600" dirty="0">
                 <a:solidFill>
                   <a:schemeClr val="bg1"/>
                 </a:solidFill>
               </a:rPr>
               <a:t>アプリケーション・ソフトウェア</a:t>
-            </a:r>
-            <a:endParaRPr kumimoji="1" lang="en-US" altLang="ja-JP" sz="1600" dirty="0">
-              <a:solidFill>
-                <a:schemeClr val="bg1"/>
-              </a:solidFill>
-            </a:endParaRPr>
-          </a:p>
-          <a:p>
-            <a:pPr algn="ctr"/>
-            <a:r>
-              <a:rPr lang="ja-JP" altLang="en-US" sz="1600" dirty="0">
-                <a:solidFill>
-                  <a:schemeClr val="bg1"/>
-                </a:solidFill>
-              </a:rPr>
-              <a:t>画像処理 </a:t>
-            </a:r>
-            <a:r>
-              <a:rPr lang="en-US" altLang="ja-JP" sz="1600" dirty="0">
-                <a:solidFill>
-                  <a:schemeClr val="bg1"/>
-                </a:solidFill>
-              </a:rPr>
-              <a:t>/ </a:t>
-            </a:r>
-            <a:r>
-              <a:rPr lang="ja-JP" altLang="en-US" sz="1600" dirty="0">
-                <a:solidFill>
-                  <a:schemeClr val="bg1"/>
-                </a:solidFill>
-              </a:rPr>
-              <a:t>音声認識 </a:t>
-            </a:r>
-            <a:r>
-              <a:rPr lang="en-US" altLang="ja-JP" sz="1600" dirty="0">
-                <a:solidFill>
-                  <a:schemeClr val="bg1"/>
-                </a:solidFill>
-              </a:rPr>
-              <a:t>/ </a:t>
-            </a:r>
-            <a:r>
-              <a:rPr lang="ja-JP" altLang="en-US" sz="1600" dirty="0">
-                <a:solidFill>
-                  <a:schemeClr val="bg1"/>
-                </a:solidFill>
-              </a:rPr>
-              <a:t>言語処理 </a:t>
-            </a:r>
-            <a:r>
-              <a:rPr lang="en-US" altLang="ja-JP" sz="1600" dirty="0">
-                <a:solidFill>
-                  <a:schemeClr val="bg1"/>
-                </a:solidFill>
-              </a:rPr>
-              <a:t>/ </a:t>
-            </a:r>
-            <a:r>
-              <a:rPr lang="ja-JP" altLang="en-US" sz="1600" dirty="0">
-                <a:solidFill>
-                  <a:schemeClr val="bg1"/>
-                </a:solidFill>
-              </a:rPr>
-              <a:t>機械制御 </a:t>
             </a:r>
             <a:endParaRPr lang="en-US" altLang="ja-JP" sz="1600" dirty="0">
               <a:solidFill>
@@ -4404,7 +5370,7 @@
                   <a:schemeClr val="bg1"/>
                 </a:solidFill>
               </a:rPr>
-              <a:t>機械学習 </a:t>
+              <a:t>画像処理 </a:t>
             </a:r>
             <a:r>
               <a:rPr lang="en-US" altLang="ja-JP" sz="1600" dirty="0">
@@ -4412,7 +5378,7 @@
                   <a:schemeClr val="bg1"/>
                 </a:solidFill>
               </a:rPr>
-              <a:t>/ AI / WEB </a:t>
+              <a:t>/ </a:t>
             </a:r>
             <a:r>
               <a:rPr lang="ja-JP" altLang="en-US" sz="1600" dirty="0">
@@ -4420,7 +5386,7 @@
                   <a:schemeClr val="bg1"/>
                 </a:solidFill>
               </a:rPr>
-              <a:t>サービス </a:t>
+              <a:t>音声認識 </a:t>
             </a:r>
             <a:r>
               <a:rPr lang="en-US" altLang="ja-JP" sz="1600" dirty="0">
@@ -4436,7 +5402,7 @@
                   <a:schemeClr val="bg1"/>
                 </a:solidFill>
               </a:rPr>
-              <a:t>暗号　</a:t>
+              <a:t>言語処理 </a:t>
             </a:r>
             <a:r>
               <a:rPr lang="en-US" altLang="ja-JP" sz="1600" dirty="0">
@@ -4444,13 +5410,72 @@
                   <a:schemeClr val="bg1"/>
                 </a:solidFill>
               </a:rPr>
-              <a:t>…</a:t>
-            </a:r>
-            <a:endParaRPr kumimoji="1" lang="en-US" altLang="ja-JP" sz="1600" dirty="0">
+              <a:t>/ </a:t>
+            </a:r>
+            <a:r>
+              <a:rPr lang="ja-JP" altLang="en-US" sz="1600" dirty="0">
+                <a:solidFill>
+                  <a:schemeClr val="bg1"/>
+                </a:solidFill>
+              </a:rPr>
+              <a:t>機械制御 </a:t>
+            </a:r>
+            <a:endParaRPr lang="en-US" altLang="ja-JP" sz="1600" dirty="0">
               <a:solidFill>
                 <a:schemeClr val="bg1"/>
               </a:solidFill>
             </a:endParaRPr>
+          </a:p>
+          <a:p>
+            <a:pPr algn="ctr"/>
+            <a:r>
+              <a:rPr lang="ja-JP" altLang="en-US" sz="1600" dirty="0">
+                <a:solidFill>
+                  <a:schemeClr val="bg1"/>
+                </a:solidFill>
+              </a:rPr>
+              <a:t>機械学習 </a:t>
+            </a:r>
+            <a:r>
+              <a:rPr lang="en-US" altLang="ja-JP" sz="1600" dirty="0">
+                <a:solidFill>
+                  <a:schemeClr val="bg1"/>
+                </a:solidFill>
+              </a:rPr>
+              <a:t>/ AI / WEB </a:t>
+            </a:r>
+            <a:r>
+              <a:rPr lang="ja-JP" altLang="en-US" sz="1600" dirty="0">
+                <a:solidFill>
+                  <a:schemeClr val="bg1"/>
+                </a:solidFill>
+              </a:rPr>
+              <a:t>サービス </a:t>
+            </a:r>
+            <a:r>
+              <a:rPr lang="en-US" altLang="ja-JP" sz="1600" dirty="0">
+                <a:solidFill>
+                  <a:schemeClr val="bg1"/>
+                </a:solidFill>
+              </a:rPr>
+              <a:t>/ </a:t>
+            </a:r>
+            <a:r>
+              <a:rPr lang="ja-JP" altLang="en-US" sz="1600" dirty="0">
+                <a:solidFill>
+                  <a:schemeClr val="bg1"/>
+                </a:solidFill>
+              </a:rPr>
+              <a:t>暗号　</a:t>
+            </a:r>
+            <a:r>
+              <a:rPr lang="en-US" altLang="ja-JP" sz="1600" dirty="0">
+                <a:solidFill>
+                  <a:schemeClr val="bg1"/>
+                </a:solidFill>
+              </a:rPr>
+              <a:t>…</a:t>
+            </a:r>
           </a:p>
         </p:txBody>
       </p:sp>
@@ -4462,7 +5487,7 @@
         </p:nvSpPr>
         <p:spPr bwMode="auto">
           <a:xfrm>
-            <a:off x="3221985" y="4689013"/>
+            <a:off x="4745985" y="4689013"/>
             <a:ext cx="5220058" cy="900010"/>
           </a:xfrm>
           <a:prstGeom prst="roundRect">
@@ -4500,7 +5525,7 @@
           <a:p>
             <a:pPr algn="ctr"/>
             <a:r>
-              <a:rPr kumimoji="1" lang="ja-JP" altLang="en-US" b="1" dirty="0">
+              <a:rPr lang="ja-JP" altLang="en-US" b="1" dirty="0">
                 <a:solidFill>
                   <a:schemeClr val="bg1"/>
                 </a:solidFill>
@@ -4518,7 +5543,7 @@
         </p:nvSpPr>
         <p:spPr bwMode="auto">
           <a:xfrm>
-            <a:off x="3221985" y="5769025"/>
+            <a:off x="4745985" y="5769025"/>
             <a:ext cx="5220058" cy="900010"/>
           </a:xfrm>
           <a:prstGeom prst="roundRect">
@@ -4556,7 +5581,7 @@
           <a:p>
             <a:pPr algn="ctr"/>
             <a:r>
-              <a:rPr kumimoji="1" lang="ja-JP" altLang="en-US" dirty="0">
+              <a:rPr lang="ja-JP" altLang="en-US" dirty="0">
                 <a:solidFill>
                   <a:schemeClr val="bg1"/>
                 </a:solidFill>
@@ -4564,7 +5589,7 @@
               <a:t>集積回路 </a:t>
             </a:r>
             <a:r>
-              <a:rPr kumimoji="1" lang="en-US" altLang="ja-JP" dirty="0">
+              <a:rPr lang="en-US" altLang="ja-JP" dirty="0">
                 <a:solidFill>
                   <a:schemeClr val="bg1"/>
                 </a:solidFill>
@@ -4572,7 +5597,7 @@
               <a:t>/ </a:t>
             </a:r>
             <a:r>
-              <a:rPr kumimoji="1" lang="ja-JP" altLang="en-US" dirty="0">
+              <a:rPr lang="ja-JP" altLang="en-US" dirty="0">
                 <a:solidFill>
                   <a:schemeClr val="bg1"/>
                 </a:solidFill>
@@ -4596,7 +5621,7 @@
         </p:nvSpPr>
         <p:spPr>
           <a:xfrm>
-            <a:off x="341629" y="3158997"/>
+            <a:off x="1865629" y="3158997"/>
             <a:ext cx="1620018" cy="369332"/>
           </a:xfrm>
           <a:prstGeom prst="rect">
@@ -4611,7 +5636,7 @@
           <a:lstStyle/>
           <a:p>
             <a:r>
-              <a:rPr kumimoji="1" lang="ja-JP" altLang="en-US" sz="2000" b="1" dirty="0">
+              <a:rPr lang="ja-JP" altLang="en-US" sz="2000" b="1" dirty="0">
                 <a:solidFill>
                   <a:schemeClr val="tx1">
                     <a:lumMod val="75000"/>
@@ -4622,7 +5647,7 @@
               <a:t>（広義の）</a:t>
             </a:r>
             <a:br>
-              <a:rPr kumimoji="1" lang="en-US" altLang="ja-JP" sz="2000" b="1" dirty="0">
+              <a:rPr lang="en-US" altLang="ja-JP" sz="2000" b="1" dirty="0">
                 <a:solidFill>
                   <a:schemeClr val="tx1">
                     <a:lumMod val="75000"/>
@@ -4632,7 +5657,7 @@
               </a:rPr>
             </a:br>
             <a:r>
-              <a:rPr kumimoji="1" lang="ja-JP" altLang="en-US" sz="2000" b="1" dirty="0">
+              <a:rPr lang="ja-JP" altLang="en-US" sz="2000" b="1" dirty="0">
                 <a:solidFill>
                   <a:schemeClr val="tx1">
                     <a:lumMod val="75000"/>
@@ -4642,7 +5667,7 @@
               </a:rPr>
               <a:t>コンピュータ</a:t>
             </a:r>
-            <a:endParaRPr kumimoji="1" lang="en-US" altLang="ja-JP" sz="2000" b="1" dirty="0">
+            <a:endParaRPr lang="en-US" altLang="ja-JP" sz="2000" b="1" dirty="0">
               <a:solidFill>
                 <a:schemeClr val="tx1">
                   <a:lumMod val="75000"/>
@@ -4653,7 +5678,7 @@
           </a:p>
           <a:p>
             <a:r>
-              <a:rPr kumimoji="1" lang="ja-JP" altLang="en-US" sz="2000" b="1" dirty="0">
+              <a:rPr lang="ja-JP" altLang="en-US" sz="2000" b="1" dirty="0">
                 <a:solidFill>
                   <a:schemeClr val="tx1">
                     <a:lumMod val="75000"/>
@@ -4718,7 +5743,7 @@
         </p:nvSpPr>
         <p:spPr bwMode="auto">
           <a:xfrm>
-            <a:off x="0" y="3158997"/>
+            <a:off x="1524000" y="3158997"/>
             <a:ext cx="9144000" cy="2520028"/>
           </a:xfrm>
           <a:prstGeom prst="rect">
@@ -4775,7 +5800,7 @@
           <a:lstStyle/>
           <a:p>
             <a:pPr algn="ctr"/>
-            <a:endParaRPr kumimoji="1" lang="en-US" dirty="0">
+            <a:endParaRPr lang="en-US" dirty="0">
               <a:solidFill>
                 <a:schemeClr val="tx1">
                   <a:lumMod val="75000"/>
@@ -4803,22 +5828,22 @@
           <a:lstStyle/>
           <a:p>
             <a:r>
-              <a:rPr kumimoji="1" lang="ja-JP" altLang="en-US" dirty="0"/>
+              <a:rPr kumimoji="1" lang="ja-JP" altLang="en-US" sz="2800" dirty="0"/>
               <a:t>コンピュータ・アーキテクチャ</a:t>
             </a:r>
             <a:r>
-              <a:rPr kumimoji="1" lang="en-US" altLang="ja-JP" dirty="0"/>
+              <a:rPr kumimoji="1" lang="en-US" altLang="ja-JP" sz="2800" dirty="0"/>
               <a:t>Ⅰ</a:t>
             </a:r>
             <a:r>
-              <a:rPr kumimoji="1" lang="ja-JP" altLang="en-US" dirty="0"/>
+              <a:rPr kumimoji="1" lang="ja-JP" altLang="en-US" sz="2800" dirty="0"/>
               <a:t>では</a:t>
             </a:r>
             <a:br>
-              <a:rPr kumimoji="1" lang="en-US" altLang="ja-JP" dirty="0"/>
+              <a:rPr kumimoji="1" lang="en-US" altLang="ja-JP" sz="2800" dirty="0"/>
             </a:br>
             <a:r>
-              <a:rPr kumimoji="1" lang="ja-JP" altLang="en-US" dirty="0"/>
+              <a:rPr kumimoji="1" lang="ja-JP" altLang="en-US" sz="2800" dirty="0"/>
               <a:t>ハードウェア面からみた話題を中心に</a:t>
             </a:r>
           </a:p>
@@ -4838,7 +5863,7 @@
         </p:nvSpPr>
         <p:spPr bwMode="auto">
           <a:xfrm>
-            <a:off x="3221661" y="2348988"/>
+            <a:off x="4745661" y="2348988"/>
             <a:ext cx="5220058" cy="990010"/>
           </a:xfrm>
           <a:prstGeom prst="roundRect">
@@ -4876,14 +5901,14 @@
           <a:p>
             <a:pPr algn="ctr"/>
             <a:r>
-              <a:rPr kumimoji="1" lang="ja-JP" altLang="en-US" sz="1600" dirty="0">
+              <a:rPr lang="ja-JP" altLang="en-US" sz="1600" dirty="0">
                 <a:solidFill>
                   <a:schemeClr val="bg1"/>
                 </a:solidFill>
               </a:rPr>
               <a:t>システム・ソフトウェア</a:t>
             </a:r>
-            <a:endParaRPr kumimoji="1" lang="en-US" altLang="ja-JP" sz="1600" dirty="0">
+            <a:endParaRPr lang="en-US" altLang="ja-JP" sz="1600" dirty="0">
               <a:solidFill>
                 <a:schemeClr val="bg1"/>
               </a:solidFill>
@@ -4892,7 +5917,7 @@
           <a:p>
             <a:pPr algn="ctr"/>
             <a:r>
-              <a:rPr kumimoji="1" lang="en-US" altLang="ja-JP" sz="1600" dirty="0">
+              <a:rPr lang="en-US" altLang="ja-JP" sz="1600" dirty="0">
                 <a:solidFill>
                   <a:schemeClr val="bg1"/>
                 </a:solidFill>
@@ -4900,7 +5925,7 @@
               <a:t>OS / </a:t>
             </a:r>
             <a:r>
-              <a:rPr kumimoji="1" lang="ja-JP" altLang="en-US" sz="1600" dirty="0">
+              <a:rPr lang="ja-JP" altLang="en-US" sz="1600" dirty="0">
                 <a:solidFill>
                   <a:schemeClr val="bg1"/>
                 </a:solidFill>
@@ -4908,7 +5933,7 @@
               <a:t>コンパイラ </a:t>
             </a:r>
             <a:r>
-              <a:rPr kumimoji="1" lang="en-US" altLang="ja-JP" sz="1600" dirty="0">
+              <a:rPr lang="en-US" altLang="ja-JP" sz="1600" dirty="0">
                 <a:solidFill>
                   <a:schemeClr val="bg1"/>
                 </a:solidFill>
@@ -4916,7 +5941,7 @@
               <a:t>/ </a:t>
             </a:r>
             <a:r>
-              <a:rPr kumimoji="1" lang="ja-JP" altLang="en-US" sz="1600" dirty="0">
+              <a:rPr lang="ja-JP" altLang="en-US" sz="1600" dirty="0">
                 <a:solidFill>
                   <a:schemeClr val="bg1"/>
                 </a:solidFill>
@@ -4940,7 +5965,7 @@
         </p:nvSpPr>
         <p:spPr bwMode="auto">
           <a:xfrm>
-            <a:off x="3221985" y="3519000"/>
+            <a:off x="4745985" y="3519001"/>
             <a:ext cx="5220058" cy="990011"/>
           </a:xfrm>
           <a:prstGeom prst="roundRect">
@@ -4983,15 +6008,7 @@
                   <a:schemeClr val="bg1"/>
                 </a:solidFill>
               </a:rPr>
-              <a:t>（狭義の）コンピュータ</a:t>
-            </a:r>
-            <a:r>
-              <a:rPr kumimoji="1" lang="ja-JP" altLang="en-US" sz="2000" dirty="0">
-                <a:solidFill>
-                  <a:schemeClr val="bg1"/>
-                </a:solidFill>
-              </a:rPr>
-              <a:t>・アーキテクチャ</a:t>
+              <a:t>（狭義の）コンピュータ・アーキテクチャ</a:t>
             </a:r>
           </a:p>
         </p:txBody>
@@ -5010,7 +6027,7 @@
         </p:nvSpPr>
         <p:spPr bwMode="auto">
           <a:xfrm>
-            <a:off x="3221985" y="1178974"/>
+            <a:off x="4745985" y="1178975"/>
             <a:ext cx="5220058" cy="990011"/>
           </a:xfrm>
           <a:prstGeom prst="roundRect">
@@ -5048,76 +6065,12 @@
           <a:p>
             <a:pPr algn="ctr"/>
             <a:r>
-              <a:rPr kumimoji="1" lang="ja-JP" altLang="en-US" sz="1600" dirty="0">
+              <a:rPr lang="ja-JP" altLang="en-US" sz="1600" dirty="0">
                 <a:solidFill>
                   <a:schemeClr val="bg1"/>
                 </a:solidFill>
               </a:rPr>
               <a:t>アプリケーション・ソフトウェア</a:t>
-            </a:r>
-            <a:endParaRPr kumimoji="1" lang="en-US" altLang="ja-JP" sz="1600" dirty="0">
-              <a:solidFill>
-                <a:schemeClr val="bg1"/>
-              </a:solidFill>
-            </a:endParaRPr>
-          </a:p>
-          <a:p>
-            <a:pPr algn="ctr"/>
-            <a:r>
-              <a:rPr lang="ja-JP" altLang="en-US" sz="1600" dirty="0">
-                <a:solidFill>
-                  <a:schemeClr val="bg1"/>
-                </a:solidFill>
-              </a:rPr>
-              <a:t>画像処理 </a:t>
-            </a:r>
-            <a:r>
-              <a:rPr lang="en-US" altLang="ja-JP" sz="1600" dirty="0">
-                <a:solidFill>
-                  <a:schemeClr val="bg1"/>
-                </a:solidFill>
-              </a:rPr>
-              <a:t>/ </a:t>
-            </a:r>
-            <a:r>
-              <a:rPr lang="ja-JP" altLang="en-US" sz="1600" dirty="0">
-                <a:solidFill>
-                  <a:schemeClr val="bg1"/>
-                </a:solidFill>
-              </a:rPr>
-              <a:t>音声認識 </a:t>
-            </a:r>
-            <a:r>
-              <a:rPr lang="en-US" altLang="ja-JP" sz="1600" dirty="0">
-                <a:solidFill>
-                  <a:schemeClr val="bg1"/>
-                </a:solidFill>
-              </a:rPr>
-              <a:t>/ </a:t>
-            </a:r>
-            <a:r>
-              <a:rPr lang="ja-JP" altLang="en-US" sz="1600" dirty="0">
-                <a:solidFill>
-                  <a:schemeClr val="bg1"/>
-                </a:solidFill>
-              </a:rPr>
-              <a:t>言語処理 </a:t>
-            </a:r>
-            <a:r>
-              <a:rPr lang="en-US" altLang="ja-JP" sz="1600" dirty="0">
-                <a:solidFill>
-                  <a:schemeClr val="bg1"/>
-                </a:solidFill>
-              </a:rPr>
-              <a:t>/ </a:t>
-            </a:r>
-            <a:r>
-              <a:rPr lang="ja-JP" altLang="en-US" sz="1600" dirty="0">
-                <a:solidFill>
-                  <a:schemeClr val="bg1"/>
-                </a:solidFill>
-              </a:rPr>
-              <a:t>機械制御 </a:t>
             </a:r>
             <a:endParaRPr lang="en-US" altLang="ja-JP" sz="1600" dirty="0">
               <a:solidFill>
@@ -5133,7 +6086,7 @@
                   <a:schemeClr val="bg1"/>
                 </a:solidFill>
               </a:rPr>
-              <a:t>機械学習 </a:t>
+              <a:t>画像処理 </a:t>
             </a:r>
             <a:r>
               <a:rPr lang="en-US" altLang="ja-JP" sz="1600" dirty="0">
@@ -5141,7 +6094,7 @@
                   <a:schemeClr val="bg1"/>
                 </a:solidFill>
               </a:rPr>
-              <a:t>/ AI / WEB </a:t>
+              <a:t>/ </a:t>
             </a:r>
             <a:r>
               <a:rPr lang="ja-JP" altLang="en-US" sz="1600" dirty="0">
@@ -5149,7 +6102,7 @@
                   <a:schemeClr val="bg1"/>
                 </a:solidFill>
               </a:rPr>
-              <a:t>サービス </a:t>
+              <a:t>音声認識 </a:t>
             </a:r>
             <a:r>
               <a:rPr lang="en-US" altLang="ja-JP" sz="1600" dirty="0">
@@ -5165,7 +6118,7 @@
                   <a:schemeClr val="bg1"/>
                 </a:solidFill>
               </a:rPr>
-              <a:t>暗号　</a:t>
+              <a:t>言語処理 </a:t>
             </a:r>
             <a:r>
               <a:rPr lang="en-US" altLang="ja-JP" sz="1600" dirty="0">
@@ -5173,13 +6126,72 @@
                   <a:schemeClr val="bg1"/>
                 </a:solidFill>
               </a:rPr>
-              <a:t>…</a:t>
-            </a:r>
-            <a:endParaRPr kumimoji="1" lang="en-US" altLang="ja-JP" sz="1600" dirty="0">
+              <a:t>/ </a:t>
+            </a:r>
+            <a:r>
+              <a:rPr lang="ja-JP" altLang="en-US" sz="1600" dirty="0">
+                <a:solidFill>
+                  <a:schemeClr val="bg1"/>
+                </a:solidFill>
+              </a:rPr>
+              <a:t>機械制御 </a:t>
+            </a:r>
+            <a:endParaRPr lang="en-US" altLang="ja-JP" sz="1600" dirty="0">
               <a:solidFill>
                 <a:schemeClr val="bg1"/>
               </a:solidFill>
             </a:endParaRPr>
+          </a:p>
+          <a:p>
+            <a:pPr algn="ctr"/>
+            <a:r>
+              <a:rPr lang="ja-JP" altLang="en-US" sz="1600" dirty="0">
+                <a:solidFill>
+                  <a:schemeClr val="bg1"/>
+                </a:solidFill>
+              </a:rPr>
+              <a:t>機械学習 </a:t>
+            </a:r>
+            <a:r>
+              <a:rPr lang="en-US" altLang="ja-JP" sz="1600" dirty="0">
+                <a:solidFill>
+                  <a:schemeClr val="bg1"/>
+                </a:solidFill>
+              </a:rPr>
+              <a:t>/ AI / WEB </a:t>
+            </a:r>
+            <a:r>
+              <a:rPr lang="ja-JP" altLang="en-US" sz="1600" dirty="0">
+                <a:solidFill>
+                  <a:schemeClr val="bg1"/>
+                </a:solidFill>
+              </a:rPr>
+              <a:t>サービス </a:t>
+            </a:r>
+            <a:r>
+              <a:rPr lang="en-US" altLang="ja-JP" sz="1600" dirty="0">
+                <a:solidFill>
+                  <a:schemeClr val="bg1"/>
+                </a:solidFill>
+              </a:rPr>
+              <a:t>/ </a:t>
+            </a:r>
+            <a:r>
+              <a:rPr lang="ja-JP" altLang="en-US" sz="1600" dirty="0">
+                <a:solidFill>
+                  <a:schemeClr val="bg1"/>
+                </a:solidFill>
+              </a:rPr>
+              <a:t>暗号　</a:t>
+            </a:r>
+            <a:r>
+              <a:rPr lang="en-US" altLang="ja-JP" sz="1600" dirty="0">
+                <a:solidFill>
+                  <a:schemeClr val="bg1"/>
+                </a:solidFill>
+              </a:rPr>
+              <a:t>…</a:t>
+            </a:r>
           </a:p>
         </p:txBody>
       </p:sp>
@@ -5197,7 +6209,7 @@
         </p:nvSpPr>
         <p:spPr bwMode="auto">
           <a:xfrm>
-            <a:off x="3221985" y="4689013"/>
+            <a:off x="4745985" y="4689013"/>
             <a:ext cx="5220058" cy="900010"/>
           </a:xfrm>
           <a:prstGeom prst="roundRect">
@@ -5235,7 +6247,7 @@
           <a:p>
             <a:pPr algn="ctr"/>
             <a:r>
-              <a:rPr kumimoji="1" lang="ja-JP" altLang="en-US" dirty="0">
+              <a:rPr lang="ja-JP" altLang="en-US" dirty="0">
                 <a:solidFill>
                   <a:schemeClr val="bg1"/>
                 </a:solidFill>
@@ -5259,7 +6271,7 @@
         </p:nvSpPr>
         <p:spPr bwMode="auto">
           <a:xfrm>
-            <a:off x="3221985" y="5769025"/>
+            <a:off x="4745985" y="5769025"/>
             <a:ext cx="5220058" cy="900010"/>
           </a:xfrm>
           <a:prstGeom prst="roundRect">
@@ -5297,7 +6309,7 @@
           <a:p>
             <a:pPr algn="ctr"/>
             <a:r>
-              <a:rPr kumimoji="1" lang="ja-JP" altLang="en-US" dirty="0">
+              <a:rPr lang="ja-JP" altLang="en-US" dirty="0">
                 <a:solidFill>
                   <a:schemeClr val="bg1"/>
                 </a:solidFill>
@@ -5305,7 +6317,7 @@
               <a:t>集積回路 </a:t>
             </a:r>
             <a:r>
-              <a:rPr kumimoji="1" lang="en-US" altLang="ja-JP" dirty="0">
+              <a:rPr lang="en-US" altLang="ja-JP" dirty="0">
                 <a:solidFill>
                   <a:schemeClr val="bg1"/>
                 </a:solidFill>
@@ -5313,7 +6325,7 @@
               <a:t>/ </a:t>
             </a:r>
             <a:r>
-              <a:rPr kumimoji="1" lang="ja-JP" altLang="en-US" dirty="0">
+              <a:rPr lang="ja-JP" altLang="en-US" dirty="0">
                 <a:solidFill>
                   <a:schemeClr val="bg1"/>
                 </a:solidFill>
@@ -5337,7 +6349,7 @@
         </p:nvSpPr>
         <p:spPr bwMode="auto">
           <a:xfrm rot="10800000">
-            <a:off x="2321972" y="2528989"/>
+            <a:off x="3845973" y="2528990"/>
             <a:ext cx="630007" cy="2700031"/>
           </a:xfrm>
           <a:prstGeom prst="downArrow">
@@ -5373,7 +6385,7 @@
           <a:lstStyle/>
           <a:p>
             <a:pPr algn="ctr"/>
-            <a:endParaRPr kumimoji="1" lang="en-US" dirty="0">
+            <a:endParaRPr lang="en-US" dirty="0">
               <a:solidFill>
                 <a:schemeClr val="tx1">
                   <a:lumMod val="75000"/>
@@ -5399,7 +6411,7 @@
         </p:nvSpPr>
         <p:spPr>
           <a:xfrm>
-            <a:off x="431954" y="3519001"/>
+            <a:off x="1955954" y="3519001"/>
             <a:ext cx="1620018" cy="369332"/>
           </a:xfrm>
           <a:prstGeom prst="rect">
@@ -5414,7 +6426,7 @@
           <a:lstStyle/>
           <a:p>
             <a:r>
-              <a:rPr kumimoji="1" lang="ja-JP" altLang="en-US" sz="2000" b="1" dirty="0">
+              <a:rPr lang="ja-JP" altLang="en-US" sz="2000" b="1" dirty="0">
                 <a:solidFill>
                   <a:schemeClr val="tx1">
                     <a:lumMod val="75000"/>
@@ -5425,7 +6437,7 @@
               <a:t>この講義では</a:t>
             </a:r>
             <a:br>
-              <a:rPr kumimoji="1" lang="en-US" altLang="ja-JP" sz="2000" b="1" dirty="0">
+              <a:rPr lang="en-US" altLang="ja-JP" sz="2000" b="1" dirty="0">
                 <a:solidFill>
                   <a:schemeClr val="tx1">
                     <a:lumMod val="75000"/>
@@ -5435,7 +6447,7 @@
               </a:rPr>
             </a:br>
             <a:r>
-              <a:rPr kumimoji="1" lang="ja-JP" altLang="en-US" sz="2000" b="1" dirty="0">
+              <a:rPr lang="ja-JP" altLang="en-US" sz="2000" b="1" dirty="0">
                 <a:solidFill>
                   <a:schemeClr val="tx1">
                     <a:lumMod val="75000"/>
@@ -5446,7 +6458,7 @@
               <a:t>下側から見て</a:t>
             </a:r>
             <a:br>
-              <a:rPr kumimoji="1" lang="en-US" altLang="ja-JP" sz="2000" b="1" dirty="0">
+              <a:rPr lang="en-US" altLang="ja-JP" sz="2000" b="1" dirty="0">
                 <a:solidFill>
                   <a:schemeClr val="tx1">
                     <a:lumMod val="75000"/>
@@ -5456,7 +6468,7 @@
               </a:rPr>
             </a:br>
             <a:r>
-              <a:rPr kumimoji="1" lang="ja-JP" altLang="en-US" sz="2000" b="1" dirty="0">
+              <a:rPr lang="ja-JP" altLang="en-US" sz="2000" b="1" dirty="0">
                 <a:solidFill>
                   <a:schemeClr val="tx1">
                     <a:lumMod val="75000"/>
@@ -5466,7 +6478,7 @@
               </a:rPr>
               <a:t>説明</a:t>
             </a:r>
-            <a:endParaRPr kumimoji="1" lang="en-US" altLang="ja-JP" sz="2000" b="1" dirty="0">
+            <a:endParaRPr lang="en-US" altLang="ja-JP" sz="2000" b="1" dirty="0">
               <a:solidFill>
                 <a:schemeClr val="tx1">
                   <a:lumMod val="75000"/>
@@ -5529,7 +6541,7 @@
         </p:nvSpPr>
         <p:spPr bwMode="auto">
           <a:xfrm flipV="1">
-            <a:off x="0" y="2258986"/>
+            <a:off x="1524000" y="2258986"/>
             <a:ext cx="9144000" cy="2340026"/>
           </a:xfrm>
           <a:prstGeom prst="rect">
@@ -5586,7 +6598,7 @@
           <a:lstStyle/>
           <a:p>
             <a:pPr algn="ctr"/>
-            <a:endParaRPr kumimoji="1" lang="en-US" dirty="0">
+            <a:endParaRPr lang="en-US" dirty="0">
               <a:solidFill>
                 <a:schemeClr val="tx1">
                   <a:lumMod val="75000"/>
@@ -5614,22 +6626,22 @@
           <a:lstStyle/>
           <a:p>
             <a:r>
-              <a:rPr kumimoji="1" lang="ja-JP" altLang="en-US" dirty="0"/>
+              <a:rPr kumimoji="1" lang="ja-JP" altLang="en-US" sz="2800" dirty="0"/>
               <a:t>コンピュータ・アーキテクチャ</a:t>
             </a:r>
             <a:r>
-              <a:rPr kumimoji="1" lang="en-US" altLang="ja-JP" dirty="0"/>
+              <a:rPr kumimoji="1" lang="en-US" altLang="ja-JP" sz="2800" dirty="0"/>
               <a:t>Ⅱ</a:t>
             </a:r>
             <a:r>
-              <a:rPr kumimoji="1" lang="ja-JP" altLang="en-US" dirty="0"/>
+              <a:rPr kumimoji="1" lang="ja-JP" altLang="en-US" sz="2800" dirty="0"/>
               <a:t>では</a:t>
             </a:r>
             <a:br>
-              <a:rPr kumimoji="1" lang="en-US" altLang="ja-JP" dirty="0"/>
+              <a:rPr kumimoji="1" lang="en-US" altLang="ja-JP" sz="2800" dirty="0"/>
             </a:br>
             <a:r>
-              <a:rPr kumimoji="1" lang="ja-JP" altLang="en-US" dirty="0"/>
+              <a:rPr kumimoji="1" lang="ja-JP" altLang="en-US" sz="2800" dirty="0"/>
               <a:t>ソフトウェア面からみた話題を中心に</a:t>
             </a:r>
           </a:p>
@@ -5649,7 +6661,7 @@
         </p:nvSpPr>
         <p:spPr bwMode="auto">
           <a:xfrm>
-            <a:off x="3221661" y="2348988"/>
+            <a:off x="4745661" y="2348988"/>
             <a:ext cx="5220058" cy="990010"/>
           </a:xfrm>
           <a:prstGeom prst="roundRect">
@@ -5687,14 +6699,14 @@
           <a:p>
             <a:pPr algn="ctr"/>
             <a:r>
-              <a:rPr kumimoji="1" lang="ja-JP" altLang="en-US" sz="1600" dirty="0">
+              <a:rPr lang="ja-JP" altLang="en-US" sz="1600" dirty="0">
                 <a:solidFill>
                   <a:schemeClr val="bg1"/>
                 </a:solidFill>
               </a:rPr>
               <a:t>システム・ソフトウェア</a:t>
             </a:r>
-            <a:endParaRPr kumimoji="1" lang="en-US" altLang="ja-JP" sz="1600" dirty="0">
+            <a:endParaRPr lang="en-US" altLang="ja-JP" sz="1600" dirty="0">
               <a:solidFill>
                 <a:schemeClr val="bg1"/>
               </a:solidFill>
@@ -5703,7 +6715,7 @@
           <a:p>
             <a:pPr algn="ctr"/>
             <a:r>
-              <a:rPr kumimoji="1" lang="en-US" altLang="ja-JP" sz="1600" dirty="0">
+              <a:rPr lang="en-US" altLang="ja-JP" sz="1600" dirty="0">
                 <a:solidFill>
                   <a:schemeClr val="bg1"/>
                 </a:solidFill>
@@ -5711,7 +6723,7 @@
               <a:t>OS / </a:t>
             </a:r>
             <a:r>
-              <a:rPr kumimoji="1" lang="ja-JP" altLang="en-US" sz="1600" dirty="0">
+              <a:rPr lang="ja-JP" altLang="en-US" sz="1600" dirty="0">
                 <a:solidFill>
                   <a:schemeClr val="bg1"/>
                 </a:solidFill>
@@ -5719,7 +6731,7 @@
               <a:t>コンパイラ </a:t>
             </a:r>
             <a:r>
-              <a:rPr kumimoji="1" lang="en-US" altLang="ja-JP" sz="1600" dirty="0">
+              <a:rPr lang="en-US" altLang="ja-JP" sz="1600" dirty="0">
                 <a:solidFill>
                   <a:schemeClr val="bg1"/>
                 </a:solidFill>
@@ -5727,7 +6739,7 @@
               <a:t>/ </a:t>
             </a:r>
             <a:r>
-              <a:rPr kumimoji="1" lang="ja-JP" altLang="en-US" sz="1600" dirty="0">
+              <a:rPr lang="ja-JP" altLang="en-US" sz="1600" dirty="0">
                 <a:solidFill>
                   <a:schemeClr val="bg1"/>
                 </a:solidFill>
@@ -5751,7 +6763,7 @@
         </p:nvSpPr>
         <p:spPr bwMode="auto">
           <a:xfrm>
-            <a:off x="3221985" y="3519000"/>
+            <a:off x="4745985" y="3519001"/>
             <a:ext cx="5220058" cy="990011"/>
           </a:xfrm>
           <a:prstGeom prst="roundRect">
@@ -5794,15 +6806,7 @@
                   <a:schemeClr val="bg1"/>
                 </a:solidFill>
               </a:rPr>
-              <a:t>（狭義の）コンピュータ</a:t>
-            </a:r>
-            <a:r>
-              <a:rPr kumimoji="1" lang="ja-JP" altLang="en-US" sz="2000" dirty="0">
-                <a:solidFill>
-                  <a:schemeClr val="bg1"/>
-                </a:solidFill>
-              </a:rPr>
-              <a:t>・アーキテクチャ</a:t>
+              <a:t>（狭義の）コンピュータ・アーキテクチャ</a:t>
             </a:r>
           </a:p>
         </p:txBody>
@@ -5821,7 +6825,7 @@
         </p:nvSpPr>
         <p:spPr bwMode="auto">
           <a:xfrm>
-            <a:off x="3221985" y="1178974"/>
+            <a:off x="4745985" y="1178975"/>
             <a:ext cx="5220058" cy="990011"/>
           </a:xfrm>
           <a:prstGeom prst="roundRect">
@@ -5859,76 +6863,12 @@
           <a:p>
             <a:pPr algn="ctr"/>
             <a:r>
-              <a:rPr kumimoji="1" lang="ja-JP" altLang="en-US" sz="1600" dirty="0">
+              <a:rPr lang="ja-JP" altLang="en-US" sz="1600" dirty="0">
                 <a:solidFill>
                   <a:schemeClr val="bg1"/>
                 </a:solidFill>
               </a:rPr>
               <a:t>アプリケーション・ソフトウェア</a:t>
-            </a:r>
-            <a:endParaRPr kumimoji="1" lang="en-US" altLang="ja-JP" sz="1600" dirty="0">
-              <a:solidFill>
-                <a:schemeClr val="bg1"/>
-              </a:solidFill>
-            </a:endParaRPr>
-          </a:p>
-          <a:p>
-            <a:pPr algn="ctr"/>
-            <a:r>
-              <a:rPr lang="ja-JP" altLang="en-US" sz="1600" dirty="0">
-                <a:solidFill>
-                  <a:schemeClr val="bg1"/>
-                </a:solidFill>
-              </a:rPr>
-              <a:t>画像処理 </a:t>
-            </a:r>
-            <a:r>
-              <a:rPr lang="en-US" altLang="ja-JP" sz="1600" dirty="0">
-                <a:solidFill>
-                  <a:schemeClr val="bg1"/>
-                </a:solidFill>
-              </a:rPr>
-              <a:t>/ </a:t>
-            </a:r>
-            <a:r>
-              <a:rPr lang="ja-JP" altLang="en-US" sz="1600" dirty="0">
-                <a:solidFill>
-                  <a:schemeClr val="bg1"/>
-                </a:solidFill>
-              </a:rPr>
-              <a:t>音声認識 </a:t>
-            </a:r>
-            <a:r>
-              <a:rPr lang="en-US" altLang="ja-JP" sz="1600" dirty="0">
-                <a:solidFill>
-                  <a:schemeClr val="bg1"/>
-                </a:solidFill>
-              </a:rPr>
-              <a:t>/ </a:t>
-            </a:r>
-            <a:r>
-              <a:rPr lang="ja-JP" altLang="en-US" sz="1600" dirty="0">
-                <a:solidFill>
-                  <a:schemeClr val="bg1"/>
-                </a:solidFill>
-              </a:rPr>
-              <a:t>言語処理 </a:t>
-            </a:r>
-            <a:r>
-              <a:rPr lang="en-US" altLang="ja-JP" sz="1600" dirty="0">
-                <a:solidFill>
-                  <a:schemeClr val="bg1"/>
-                </a:solidFill>
-              </a:rPr>
-              <a:t>/ </a:t>
-            </a:r>
-            <a:r>
-              <a:rPr lang="ja-JP" altLang="en-US" sz="1600" dirty="0">
-                <a:solidFill>
-                  <a:schemeClr val="bg1"/>
-                </a:solidFill>
-              </a:rPr>
-              <a:t>機械制御 </a:t>
             </a:r>
             <a:endParaRPr lang="en-US" altLang="ja-JP" sz="1600" dirty="0">
               <a:solidFill>
@@ -5944,7 +6884,7 @@
                   <a:schemeClr val="bg1"/>
                 </a:solidFill>
               </a:rPr>
-              <a:t>機械学習 </a:t>
+              <a:t>画像処理 </a:t>
             </a:r>
             <a:r>
               <a:rPr lang="en-US" altLang="ja-JP" sz="1600" dirty="0">
@@ -5952,7 +6892,7 @@
                   <a:schemeClr val="bg1"/>
                 </a:solidFill>
               </a:rPr>
-              <a:t>/ AI / WEB </a:t>
+              <a:t>/ </a:t>
             </a:r>
             <a:r>
               <a:rPr lang="ja-JP" altLang="en-US" sz="1600" dirty="0">
@@ -5960,7 +6900,7 @@
                   <a:schemeClr val="bg1"/>
                 </a:solidFill>
               </a:rPr>
-              <a:t>サービス </a:t>
+              <a:t>音声認識 </a:t>
             </a:r>
             <a:r>
               <a:rPr lang="en-US" altLang="ja-JP" sz="1600" dirty="0">
@@ -5976,7 +6916,7 @@
                   <a:schemeClr val="bg1"/>
                 </a:solidFill>
               </a:rPr>
-              <a:t>暗号　</a:t>
+              <a:t>言語処理 </a:t>
             </a:r>
             <a:r>
               <a:rPr lang="en-US" altLang="ja-JP" sz="1600" dirty="0">
@@ -5984,13 +6924,72 @@
                   <a:schemeClr val="bg1"/>
                 </a:solidFill>
               </a:rPr>
-              <a:t>…</a:t>
-            </a:r>
-            <a:endParaRPr kumimoji="1" lang="en-US" altLang="ja-JP" sz="1600" dirty="0">
+              <a:t>/ </a:t>
+            </a:r>
+            <a:r>
+              <a:rPr lang="ja-JP" altLang="en-US" sz="1600" dirty="0">
+                <a:solidFill>
+                  <a:schemeClr val="bg1"/>
+                </a:solidFill>
+              </a:rPr>
+              <a:t>機械制御 </a:t>
+            </a:r>
+            <a:endParaRPr lang="en-US" altLang="ja-JP" sz="1600" dirty="0">
               <a:solidFill>
                 <a:schemeClr val="bg1"/>
               </a:solidFill>
             </a:endParaRPr>
+          </a:p>
+          <a:p>
+            <a:pPr algn="ctr"/>
+            <a:r>
+              <a:rPr lang="ja-JP" altLang="en-US" sz="1600" dirty="0">
+                <a:solidFill>
+                  <a:schemeClr val="bg1"/>
+                </a:solidFill>
+              </a:rPr>
+              <a:t>機械学習 </a:t>
+            </a:r>
+            <a:r>
+              <a:rPr lang="en-US" altLang="ja-JP" sz="1600" dirty="0">
+                <a:solidFill>
+                  <a:schemeClr val="bg1"/>
+                </a:solidFill>
+              </a:rPr>
+              <a:t>/ AI / WEB </a:t>
+            </a:r>
+            <a:r>
+              <a:rPr lang="ja-JP" altLang="en-US" sz="1600" dirty="0">
+                <a:solidFill>
+                  <a:schemeClr val="bg1"/>
+                </a:solidFill>
+              </a:rPr>
+              <a:t>サービス </a:t>
+            </a:r>
+            <a:r>
+              <a:rPr lang="en-US" altLang="ja-JP" sz="1600" dirty="0">
+                <a:solidFill>
+                  <a:schemeClr val="bg1"/>
+                </a:solidFill>
+              </a:rPr>
+              <a:t>/ </a:t>
+            </a:r>
+            <a:r>
+              <a:rPr lang="ja-JP" altLang="en-US" sz="1600" dirty="0">
+                <a:solidFill>
+                  <a:schemeClr val="bg1"/>
+                </a:solidFill>
+              </a:rPr>
+              <a:t>暗号　</a:t>
+            </a:r>
+            <a:r>
+              <a:rPr lang="en-US" altLang="ja-JP" sz="1600" dirty="0">
+                <a:solidFill>
+                  <a:schemeClr val="bg1"/>
+                </a:solidFill>
+              </a:rPr>
+              <a:t>…</a:t>
+            </a:r>
           </a:p>
         </p:txBody>
       </p:sp>
@@ -6008,7 +7007,7 @@
         </p:nvSpPr>
         <p:spPr bwMode="auto">
           <a:xfrm>
-            <a:off x="3221985" y="4689013"/>
+            <a:off x="4745985" y="4689013"/>
             <a:ext cx="5220058" cy="900010"/>
           </a:xfrm>
           <a:prstGeom prst="roundRect">
@@ -6046,7 +7045,7 @@
           <a:p>
             <a:pPr algn="ctr"/>
             <a:r>
-              <a:rPr kumimoji="1" lang="ja-JP" altLang="en-US" dirty="0">
+              <a:rPr lang="ja-JP" altLang="en-US" dirty="0">
                 <a:solidFill>
                   <a:schemeClr val="bg1"/>
                 </a:solidFill>
@@ -6070,7 +7069,7 @@
         </p:nvSpPr>
         <p:spPr bwMode="auto">
           <a:xfrm>
-            <a:off x="3221985" y="5769025"/>
+            <a:off x="4745985" y="5769025"/>
             <a:ext cx="5220058" cy="900010"/>
           </a:xfrm>
           <a:prstGeom prst="roundRect">
@@ -6108,7 +7107,7 @@
           <a:p>
             <a:pPr algn="ctr"/>
             <a:r>
-              <a:rPr kumimoji="1" lang="ja-JP" altLang="en-US" dirty="0">
+              <a:rPr lang="ja-JP" altLang="en-US" dirty="0">
                 <a:solidFill>
                   <a:schemeClr val="bg1"/>
                 </a:solidFill>
@@ -6116,7 +7115,7 @@
               <a:t>集積回路 </a:t>
             </a:r>
             <a:r>
-              <a:rPr kumimoji="1" lang="en-US" altLang="ja-JP" dirty="0">
+              <a:rPr lang="en-US" altLang="ja-JP" dirty="0">
                 <a:solidFill>
                   <a:schemeClr val="bg1"/>
                 </a:solidFill>
@@ -6124,7 +7123,7 @@
               <a:t>/ </a:t>
             </a:r>
             <a:r>
-              <a:rPr kumimoji="1" lang="ja-JP" altLang="en-US" dirty="0">
+              <a:rPr lang="ja-JP" altLang="en-US" dirty="0">
                 <a:solidFill>
                   <a:schemeClr val="bg1"/>
                 </a:solidFill>
@@ -6148,7 +7147,7 @@
         </p:nvSpPr>
         <p:spPr bwMode="auto">
           <a:xfrm>
-            <a:off x="2501977" y="2708992"/>
+            <a:off x="4025978" y="2708993"/>
             <a:ext cx="630007" cy="2610029"/>
           </a:xfrm>
           <a:prstGeom prst="downArrow">
@@ -6184,7 +7183,7 @@
           <a:lstStyle/>
           <a:p>
             <a:pPr algn="ctr"/>
-            <a:endParaRPr kumimoji="1" lang="en-US" dirty="0">
+            <a:endParaRPr lang="en-US" dirty="0">
               <a:solidFill>
                 <a:schemeClr val="tx1">
                   <a:lumMod val="75000"/>
@@ -6210,7 +7209,7 @@
         </p:nvSpPr>
         <p:spPr>
           <a:xfrm>
-            <a:off x="341953" y="2708992"/>
+            <a:off x="1865953" y="2708992"/>
             <a:ext cx="1620018" cy="369332"/>
           </a:xfrm>
           <a:prstGeom prst="rect">
@@ -6225,7 +7224,7 @@
           <a:lstStyle/>
           <a:p>
             <a:r>
-              <a:rPr kumimoji="1" lang="ja-JP" altLang="en-US" sz="2000" b="1" dirty="0">
+              <a:rPr lang="ja-JP" altLang="en-US" sz="2000" b="1" dirty="0">
                 <a:solidFill>
                   <a:schemeClr val="tx1">
                     <a:lumMod val="75000"/>
@@ -6235,7 +7234,7 @@
               </a:rPr>
               <a:t>来学期の</a:t>
             </a:r>
-            <a:endParaRPr kumimoji="1" lang="en-US" altLang="ja-JP" sz="2000" b="1" dirty="0">
+            <a:endParaRPr lang="en-US" altLang="ja-JP" sz="2000" b="1" dirty="0">
               <a:solidFill>
                 <a:schemeClr val="tx1">
                   <a:lumMod val="75000"/>
@@ -6246,7 +7245,7 @@
           </a:p>
           <a:p>
             <a:r>
-              <a:rPr kumimoji="1" lang="ja-JP" altLang="en-US" sz="2000" b="1" dirty="0">
+              <a:rPr lang="ja-JP" altLang="en-US" sz="2000" b="1" dirty="0">
                 <a:solidFill>
                   <a:schemeClr val="tx1">
                     <a:lumMod val="75000"/>
@@ -6256,7 +7255,7 @@
               </a:rPr>
               <a:t>コンピュータ</a:t>
             </a:r>
-            <a:endParaRPr kumimoji="1" lang="en-US" altLang="ja-JP" sz="2000" b="1" dirty="0">
+            <a:endParaRPr lang="en-US" altLang="ja-JP" sz="2000" b="1" dirty="0">
               <a:solidFill>
                 <a:schemeClr val="tx1">
                   <a:lumMod val="75000"/>
@@ -6267,7 +7266,7 @@
           </a:p>
           <a:p>
             <a:r>
-              <a:rPr kumimoji="1" lang="ja-JP" altLang="en-US" sz="2000" b="1" dirty="0">
+              <a:rPr lang="ja-JP" altLang="en-US" sz="2000" b="1" dirty="0">
                 <a:solidFill>
                   <a:schemeClr val="tx1">
                     <a:lumMod val="75000"/>
@@ -6278,7 +7277,7 @@
               <a:t>アーキテクチャ</a:t>
             </a:r>
             <a:r>
-              <a:rPr kumimoji="1" lang="en-US" altLang="ja-JP" sz="2000" b="1" dirty="0">
+              <a:rPr lang="en-US" altLang="ja-JP" sz="2000" b="1" dirty="0">
                 <a:solidFill>
                   <a:schemeClr val="tx1">
                     <a:lumMod val="75000"/>
@@ -6291,7 +7290,7 @@
           </a:p>
           <a:p>
             <a:r>
-              <a:rPr kumimoji="1" lang="ja-JP" altLang="en-US" sz="2000" b="1" dirty="0">
+              <a:rPr lang="ja-JP" altLang="en-US" sz="2000" b="1" dirty="0">
                 <a:solidFill>
                   <a:schemeClr val="tx1">
                     <a:lumMod val="75000"/>
@@ -6302,7 +7301,7 @@
               <a:t>では上側から見て</a:t>
             </a:r>
             <a:br>
-              <a:rPr kumimoji="1" lang="en-US" altLang="ja-JP" sz="2000" b="1" dirty="0">
+              <a:rPr lang="en-US" altLang="ja-JP" sz="2000" b="1" dirty="0">
                 <a:solidFill>
                   <a:schemeClr val="tx1">
                     <a:lumMod val="75000"/>
@@ -6312,7 +7311,7 @@
               </a:rPr>
             </a:br>
             <a:r>
-              <a:rPr kumimoji="1" lang="ja-JP" altLang="en-US" sz="2000" b="1" dirty="0">
+              <a:rPr lang="ja-JP" altLang="en-US" sz="2000" b="1" dirty="0">
                 <a:solidFill>
                   <a:schemeClr val="tx1">
                     <a:lumMod val="75000"/>
@@ -6322,7 +7321,7 @@
               </a:rPr>
               <a:t>説明</a:t>
             </a:r>
-            <a:endParaRPr kumimoji="1" lang="en-US" altLang="ja-JP" sz="2000" b="1" dirty="0">
+            <a:endParaRPr lang="en-US" altLang="ja-JP" sz="2000" b="1" dirty="0">
               <a:solidFill>
                 <a:schemeClr val="tx1">
                   <a:lumMod val="75000"/>
@@ -6413,12 +7412,12 @@
             <a:spLocks noGrp="1"/>
           </p:cNvSpPr>
           <p:nvPr>
-            <p:ph sz="quarter" idx="10"/>
+            <p:ph type="body" sz="quarter" idx="10"/>
           </p:nvPr>
         </p:nvSpPr>
         <p:spPr>
           <a:xfrm>
-            <a:off x="431954" y="1088974"/>
+            <a:off x="1955954" y="1088974"/>
             <a:ext cx="8280092" cy="5220058"/>
           </a:xfrm>
         </p:spPr>
@@ -6554,7 +7553,7 @@
         </p:nvSpPr>
         <p:spPr bwMode="auto">
           <a:xfrm>
-            <a:off x="4391998" y="3789004"/>
+            <a:off x="5915999" y="3789004"/>
             <a:ext cx="4410049" cy="990010"/>
           </a:xfrm>
           <a:prstGeom prst="roundRect">
@@ -6592,14 +7591,14 @@
           <a:p>
             <a:pPr algn="ctr"/>
             <a:r>
-              <a:rPr kumimoji="1" lang="ja-JP" altLang="en-US" sz="1600" dirty="0">
+              <a:rPr lang="ja-JP" altLang="en-US" sz="1600" dirty="0">
                 <a:solidFill>
                   <a:schemeClr val="bg1"/>
                 </a:solidFill>
               </a:rPr>
               <a:t>システム・ソフトウェア</a:t>
             </a:r>
-            <a:endParaRPr kumimoji="1" lang="en-US" altLang="ja-JP" sz="1600" dirty="0">
+            <a:endParaRPr lang="en-US" altLang="ja-JP" sz="1600" dirty="0">
               <a:solidFill>
                 <a:schemeClr val="bg1"/>
               </a:solidFill>
@@ -6608,7 +7607,7 @@
           <a:p>
             <a:pPr algn="ctr"/>
             <a:r>
-              <a:rPr kumimoji="1" lang="en-US" altLang="ja-JP" sz="1600" dirty="0">
+              <a:rPr lang="en-US" altLang="ja-JP" sz="1600" dirty="0">
                 <a:solidFill>
                   <a:schemeClr val="bg1"/>
                 </a:solidFill>
@@ -6616,7 +7615,7 @@
               <a:t>OS / </a:t>
             </a:r>
             <a:r>
-              <a:rPr kumimoji="1" lang="ja-JP" altLang="en-US" sz="1600" dirty="0">
+              <a:rPr lang="ja-JP" altLang="en-US" sz="1600" dirty="0">
                 <a:solidFill>
                   <a:schemeClr val="bg1"/>
                 </a:solidFill>
@@ -6624,7 +7623,7 @@
               <a:t>コンパイラ </a:t>
             </a:r>
             <a:r>
-              <a:rPr kumimoji="1" lang="en-US" altLang="ja-JP" sz="1600" dirty="0">
+              <a:rPr lang="en-US" altLang="ja-JP" sz="1600" dirty="0">
                 <a:solidFill>
                   <a:schemeClr val="bg1"/>
                 </a:solidFill>
@@ -6632,7 +7631,7 @@
               <a:t>/ </a:t>
             </a:r>
             <a:r>
-              <a:rPr kumimoji="1" lang="ja-JP" altLang="en-US" sz="1600" dirty="0">
+              <a:rPr lang="ja-JP" altLang="en-US" sz="1600" dirty="0">
                 <a:solidFill>
                   <a:schemeClr val="bg1"/>
                 </a:solidFill>
@@ -6656,7 +7655,7 @@
         </p:nvSpPr>
         <p:spPr bwMode="auto">
           <a:xfrm>
-            <a:off x="4392322" y="4959016"/>
+            <a:off x="5916323" y="4959017"/>
             <a:ext cx="4410049" cy="990011"/>
           </a:xfrm>
           <a:prstGeom prst="roundRect">
@@ -6715,15 +7714,7 @@
                   <a:schemeClr val="bg1"/>
                 </a:solidFill>
               </a:rPr>
-              <a:t>コンピュータ</a:t>
-            </a:r>
-            <a:r>
-              <a:rPr kumimoji="1" lang="ja-JP" altLang="en-US" sz="2000" dirty="0">
-                <a:solidFill>
-                  <a:schemeClr val="bg1"/>
-                </a:solidFill>
-              </a:rPr>
-              <a:t>・アーキテクチャ</a:t>
+              <a:t>コンピュータ・アーキテクチャ</a:t>
             </a:r>
           </a:p>
         </p:txBody>
@@ -6742,7 +7733,7 @@
         </p:nvSpPr>
         <p:spPr bwMode="auto">
           <a:xfrm>
-            <a:off x="4391998" y="1178975"/>
+            <a:off x="5915999" y="1178976"/>
             <a:ext cx="4410049" cy="990011"/>
           </a:xfrm>
           <a:prstGeom prst="roundRect">
@@ -6780,76 +7771,12 @@
           <a:p>
             <a:pPr algn="ctr"/>
             <a:r>
-              <a:rPr kumimoji="1" lang="ja-JP" altLang="en-US" sz="1600" dirty="0">
+              <a:rPr lang="ja-JP" altLang="en-US" sz="1600" dirty="0">
                 <a:solidFill>
                   <a:schemeClr val="bg1"/>
                 </a:solidFill>
               </a:rPr>
               <a:t>アプリケーション・ソフトウェア</a:t>
-            </a:r>
-            <a:endParaRPr kumimoji="1" lang="en-US" altLang="ja-JP" sz="1600" dirty="0">
-              <a:solidFill>
-                <a:schemeClr val="bg1"/>
-              </a:solidFill>
-            </a:endParaRPr>
-          </a:p>
-          <a:p>
-            <a:pPr algn="ctr"/>
-            <a:r>
-              <a:rPr lang="ja-JP" altLang="en-US" sz="1600" dirty="0">
-                <a:solidFill>
-                  <a:schemeClr val="bg1"/>
-                </a:solidFill>
-              </a:rPr>
-              <a:t>画像処理 </a:t>
-            </a:r>
-            <a:r>
-              <a:rPr lang="en-US" altLang="ja-JP" sz="1600" dirty="0">
-                <a:solidFill>
-                  <a:schemeClr val="bg1"/>
-                </a:solidFill>
-              </a:rPr>
-              <a:t>/ </a:t>
-            </a:r>
-            <a:r>
-              <a:rPr lang="ja-JP" altLang="en-US" sz="1600" dirty="0">
-                <a:solidFill>
-                  <a:schemeClr val="bg1"/>
-                </a:solidFill>
-              </a:rPr>
-              <a:t>音声認識 </a:t>
-            </a:r>
-            <a:r>
-              <a:rPr lang="en-US" altLang="ja-JP" sz="1600" dirty="0">
-                <a:solidFill>
-                  <a:schemeClr val="bg1"/>
-                </a:solidFill>
-              </a:rPr>
-              <a:t>/ </a:t>
-            </a:r>
-            <a:r>
-              <a:rPr lang="ja-JP" altLang="en-US" sz="1600" dirty="0">
-                <a:solidFill>
-                  <a:schemeClr val="bg1"/>
-                </a:solidFill>
-              </a:rPr>
-              <a:t>言語処理 </a:t>
-            </a:r>
-            <a:r>
-              <a:rPr lang="en-US" altLang="ja-JP" sz="1600" dirty="0">
-                <a:solidFill>
-                  <a:schemeClr val="bg1"/>
-                </a:solidFill>
-              </a:rPr>
-              <a:t>/ </a:t>
-            </a:r>
-            <a:r>
-              <a:rPr lang="ja-JP" altLang="en-US" sz="1600" dirty="0">
-                <a:solidFill>
-                  <a:schemeClr val="bg1"/>
-                </a:solidFill>
-              </a:rPr>
-              <a:t>機械制御 </a:t>
             </a:r>
             <a:endParaRPr lang="en-US" altLang="ja-JP" sz="1600" dirty="0">
               <a:solidFill>
@@ -6865,7 +7792,7 @@
                   <a:schemeClr val="bg1"/>
                 </a:solidFill>
               </a:rPr>
-              <a:t>機械学習 </a:t>
+              <a:t>画像処理 </a:t>
             </a:r>
             <a:r>
               <a:rPr lang="en-US" altLang="ja-JP" sz="1600" dirty="0">
@@ -6873,7 +7800,7 @@
                   <a:schemeClr val="bg1"/>
                 </a:solidFill>
               </a:rPr>
-              <a:t>/ AI / WEB </a:t>
+              <a:t>/ </a:t>
             </a:r>
             <a:r>
               <a:rPr lang="ja-JP" altLang="en-US" sz="1600" dirty="0">
@@ -6881,7 +7808,7 @@
                   <a:schemeClr val="bg1"/>
                 </a:solidFill>
               </a:rPr>
-              <a:t>サービス </a:t>
+              <a:t>音声認識 </a:t>
             </a:r>
             <a:r>
               <a:rPr lang="en-US" altLang="ja-JP" sz="1600" dirty="0">
@@ -6897,7 +7824,7 @@
                   <a:schemeClr val="bg1"/>
                 </a:solidFill>
               </a:rPr>
-              <a:t>暗号　</a:t>
+              <a:t>言語処理 </a:t>
             </a:r>
             <a:r>
               <a:rPr lang="en-US" altLang="ja-JP" sz="1600" dirty="0">
@@ -6905,13 +7832,72 @@
                   <a:schemeClr val="bg1"/>
                 </a:solidFill>
               </a:rPr>
-              <a:t>…</a:t>
-            </a:r>
-            <a:endParaRPr kumimoji="1" lang="en-US" altLang="ja-JP" sz="1600" dirty="0">
+              <a:t>/ </a:t>
+            </a:r>
+            <a:r>
+              <a:rPr lang="ja-JP" altLang="en-US" sz="1600" dirty="0">
+                <a:solidFill>
+                  <a:schemeClr val="bg1"/>
+                </a:solidFill>
+              </a:rPr>
+              <a:t>機械制御 </a:t>
+            </a:r>
+            <a:endParaRPr lang="en-US" altLang="ja-JP" sz="1600" dirty="0">
               <a:solidFill>
                 <a:schemeClr val="bg1"/>
               </a:solidFill>
             </a:endParaRPr>
+          </a:p>
+          <a:p>
+            <a:pPr algn="ctr"/>
+            <a:r>
+              <a:rPr lang="ja-JP" altLang="en-US" sz="1600" dirty="0">
+                <a:solidFill>
+                  <a:schemeClr val="bg1"/>
+                </a:solidFill>
+              </a:rPr>
+              <a:t>機械学習 </a:t>
+            </a:r>
+            <a:r>
+              <a:rPr lang="en-US" altLang="ja-JP" sz="1600" dirty="0">
+                <a:solidFill>
+                  <a:schemeClr val="bg1"/>
+                </a:solidFill>
+              </a:rPr>
+              <a:t>/ AI / WEB </a:t>
+            </a:r>
+            <a:r>
+              <a:rPr lang="ja-JP" altLang="en-US" sz="1600" dirty="0">
+                <a:solidFill>
+                  <a:schemeClr val="bg1"/>
+                </a:solidFill>
+              </a:rPr>
+              <a:t>サービス </a:t>
+            </a:r>
+            <a:r>
+              <a:rPr lang="en-US" altLang="ja-JP" sz="1600" dirty="0">
+                <a:solidFill>
+                  <a:schemeClr val="bg1"/>
+                </a:solidFill>
+              </a:rPr>
+              <a:t>/ </a:t>
+            </a:r>
+            <a:r>
+              <a:rPr lang="ja-JP" altLang="en-US" sz="1600" dirty="0">
+                <a:solidFill>
+                  <a:schemeClr val="bg1"/>
+                </a:solidFill>
+              </a:rPr>
+              <a:t>暗号　</a:t>
+            </a:r>
+            <a:r>
+              <a:rPr lang="en-US" altLang="ja-JP" sz="1600" dirty="0">
+                <a:solidFill>
+                  <a:schemeClr val="bg1"/>
+                </a:solidFill>
+              </a:rPr>
+              <a:t>…</a:t>
+            </a:r>
           </a:p>
         </p:txBody>
       </p:sp>
@@ -6975,17 +7961,17 @@
           <a:lstStyle/>
           <a:p>
             <a:r>
-              <a:rPr kumimoji="1" lang="ja-JP" altLang="en-US" dirty="0"/>
+              <a:rPr kumimoji="1" lang="ja-JP" altLang="en-US" sz="2800" dirty="0"/>
               <a:t>余談：応用系と基盤系</a:t>
             </a:r>
             <a:br>
-              <a:rPr kumimoji="1" lang="en-US" altLang="ja-JP" sz="2800" dirty="0"/>
+              <a:rPr lang="en-US" altLang="ja-JP" sz="2800" dirty="0"/>
             </a:br>
             <a:r>
-              <a:rPr kumimoji="1" lang="ja-JP" altLang="en-US" sz="2800" dirty="0"/>
+              <a:rPr lang="ja-JP" altLang="en-US" sz="2800" dirty="0"/>
               <a:t>処理の高速化を例とした場合の例</a:t>
             </a:r>
-            <a:endParaRPr kumimoji="1" lang="en-US" altLang="ja-JP" sz="2800" dirty="0"/>
+            <a:endParaRPr lang="en-US" altLang="ja-JP" sz="2800" dirty="0"/>
           </a:p>
         </p:txBody>
       </p:sp>
@@ -7002,12 +7988,12 @@
             <a:spLocks noGrp="1"/>
           </p:cNvSpPr>
           <p:nvPr>
-            <p:ph sz="quarter" idx="10"/>
+            <p:ph type="body" sz="quarter" idx="10"/>
           </p:nvPr>
         </p:nvSpPr>
         <p:spPr>
           <a:xfrm>
-            <a:off x="431955" y="1178976"/>
+            <a:off x="1955955" y="1178977"/>
             <a:ext cx="4770052" cy="6120067"/>
           </a:xfrm>
         </p:spPr>
@@ -7016,84 +8002,84 @@
           <a:lstStyle/>
           <a:p>
             <a:r>
-              <a:rPr kumimoji="1" lang="ja-JP" altLang="en-US" sz="1600" dirty="0"/>
+              <a:rPr lang="ja-JP" altLang="en-US" sz="1600" dirty="0"/>
               <a:t>応用系</a:t>
             </a:r>
-            <a:endParaRPr kumimoji="1" lang="en-US" altLang="ja-JP" sz="1600" dirty="0"/>
+            <a:endParaRPr lang="en-US" altLang="ja-JP" sz="1600" dirty="0"/>
           </a:p>
           <a:p>
             <a:pPr lvl="1"/>
             <a:r>
-              <a:rPr kumimoji="1" lang="ja-JP" altLang="en-US" sz="1600" dirty="0"/>
+              <a:rPr lang="ja-JP" altLang="en-US" sz="1600" dirty="0"/>
               <a:t>効果は特定アプリケーションのみだが，</a:t>
             </a:r>
             <a:br>
-              <a:rPr kumimoji="1" lang="en-US" altLang="ja-JP" sz="1600" dirty="0"/>
+              <a:rPr lang="en-US" altLang="ja-JP" sz="1600" dirty="0"/>
             </a:br>
             <a:r>
-              <a:rPr kumimoji="1" lang="ja-JP" altLang="en-US" sz="1600" dirty="0"/>
+              <a:rPr lang="ja-JP" altLang="en-US" sz="1600" dirty="0"/>
               <a:t>改善量が大きい</a:t>
             </a:r>
-            <a:endParaRPr kumimoji="1" lang="en-US" altLang="ja-JP" sz="1600" dirty="0"/>
+            <a:endParaRPr lang="en-US" altLang="ja-JP" sz="1600" dirty="0"/>
           </a:p>
           <a:p>
             <a:pPr lvl="1"/>
             <a:r>
-              <a:rPr kumimoji="1" lang="ja-JP" altLang="en-US" sz="1600" dirty="0"/>
+              <a:rPr lang="ja-JP" altLang="en-US" sz="1600" dirty="0"/>
               <a:t>たとえば，あるアプリケーションを</a:t>
             </a:r>
             <a:br>
-              <a:rPr kumimoji="1" lang="en-US" altLang="ja-JP" sz="1600" dirty="0"/>
+              <a:rPr lang="en-US" altLang="ja-JP" sz="1600" dirty="0"/>
             </a:br>
             <a:r>
-              <a:rPr kumimoji="1" lang="ja-JP" altLang="en-US" sz="1600" dirty="0"/>
+              <a:rPr lang="ja-JP" altLang="en-US" sz="1600" dirty="0"/>
               <a:t>数倍～１桁速く出来れば凄い</a:t>
             </a:r>
             <a:br>
-              <a:rPr kumimoji="1" lang="en-US" altLang="ja-JP" sz="1600" dirty="0"/>
+              <a:rPr lang="en-US" altLang="ja-JP" sz="1600" dirty="0"/>
             </a:br>
             <a:br>
-              <a:rPr kumimoji="1" lang="en-US" altLang="ja-JP" sz="1600" dirty="0"/>
+              <a:rPr lang="en-US" altLang="ja-JP" sz="1600" dirty="0"/>
             </a:br>
-            <a:endParaRPr kumimoji="1" lang="en-US" altLang="ja-JP" sz="1600" dirty="0"/>
-          </a:p>
-          <a:p>
-            <a:r>
-              <a:rPr kumimoji="1" lang="ja-JP" altLang="en-US" sz="1600" dirty="0"/>
+            <a:endParaRPr lang="en-US" altLang="ja-JP" sz="1600" dirty="0"/>
+          </a:p>
+          <a:p>
+            <a:r>
+              <a:rPr lang="ja-JP" altLang="en-US" sz="1600" dirty="0"/>
               <a:t>基盤系</a:t>
             </a:r>
-            <a:endParaRPr kumimoji="1" lang="en-US" altLang="ja-JP" sz="1600" dirty="0"/>
+            <a:endParaRPr lang="en-US" altLang="ja-JP" sz="1600" dirty="0"/>
           </a:p>
           <a:p>
             <a:pPr lvl="1"/>
             <a:r>
-              <a:rPr kumimoji="1" lang="ja-JP" altLang="en-US" sz="1600" dirty="0"/>
+              <a:rPr lang="ja-JP" altLang="en-US" sz="1600" dirty="0"/>
               <a:t>効果は広く薄くなりがち</a:t>
             </a:r>
-            <a:endParaRPr kumimoji="1" lang="en-US" altLang="ja-JP" sz="1600" dirty="0"/>
+            <a:endParaRPr lang="en-US" altLang="ja-JP" sz="1600" dirty="0"/>
           </a:p>
           <a:p>
             <a:pPr lvl="1"/>
             <a:r>
-              <a:rPr kumimoji="1" lang="ja-JP" altLang="en-US" sz="1600" dirty="0"/>
+              <a:rPr lang="ja-JP" altLang="en-US" sz="1600" dirty="0"/>
               <a:t>色々なアプリケーション一般で</a:t>
             </a:r>
             <a:br>
-              <a:rPr kumimoji="1" lang="en-US" altLang="ja-JP" sz="1600" dirty="0"/>
+              <a:rPr lang="en-US" altLang="ja-JP" sz="1600" dirty="0"/>
             </a:br>
             <a:r>
-              <a:rPr kumimoji="1" lang="ja-JP" altLang="en-US" sz="1600" dirty="0"/>
+              <a:rPr lang="ja-JP" altLang="en-US" sz="1600" dirty="0"/>
               <a:t>平均 </a:t>
             </a:r>
             <a:r>
-              <a:rPr kumimoji="1" lang="en-US" altLang="ja-JP" sz="1600" dirty="0"/>
+              <a:rPr lang="en-US" altLang="ja-JP" sz="1600" dirty="0"/>
               <a:t>5% </a:t>
             </a:r>
             <a:r>
-              <a:rPr kumimoji="1" lang="ja-JP" altLang="en-US" sz="1600" dirty="0"/>
+              <a:rPr lang="ja-JP" altLang="en-US" sz="1600" dirty="0"/>
               <a:t>高速化できれば偉大な成果</a:t>
             </a:r>
-            <a:endParaRPr kumimoji="1" lang="en-US" altLang="ja-JP" sz="1600" dirty="0"/>
+            <a:endParaRPr lang="en-US" altLang="ja-JP" sz="1600" dirty="0"/>
           </a:p>
         </p:txBody>
       </p:sp>
@@ -7111,7 +8097,7 @@
         </p:nvGrpSpPr>
         <p:grpSpPr>
           <a:xfrm>
-            <a:off x="5292008" y="3699004"/>
+            <a:off x="6816009" y="3699005"/>
             <a:ext cx="3510039" cy="2070023"/>
             <a:chOff x="4572000" y="1088974"/>
             <a:chExt cx="3510039" cy="2070023"/>
@@ -7169,7 +8155,7 @@
             <a:p>
               <a:pPr algn="ctr"/>
               <a:r>
-                <a:rPr kumimoji="1" lang="ja-JP" altLang="en-US" sz="1600" b="1" dirty="0">
+                <a:rPr lang="ja-JP" altLang="en-US" sz="1600" b="1" dirty="0">
                   <a:solidFill>
                     <a:schemeClr val="bg1"/>
                   </a:solidFill>
@@ -7177,7 +8163,7 @@
                 <a:t>基盤 </a:t>
               </a:r>
               <a:r>
-                <a:rPr kumimoji="1" lang="en-US" altLang="ja-JP" sz="1600" b="1" dirty="0">
+                <a:rPr lang="en-US" altLang="ja-JP" sz="1600" b="1" dirty="0">
                   <a:solidFill>
                     <a:schemeClr val="bg1"/>
                   </a:solidFill>
@@ -7185,7 +8171,7 @@
                 <a:t>1.05 </a:t>
               </a:r>
               <a:r>
-                <a:rPr kumimoji="1" lang="ja-JP" altLang="en-US" sz="1600" b="1" dirty="0">
+                <a:rPr lang="ja-JP" altLang="en-US" sz="1600" b="1" dirty="0">
                   <a:solidFill>
                     <a:schemeClr val="bg1"/>
                   </a:solidFill>
@@ -7247,14 +8233,14 @@
             <a:p>
               <a:pPr algn="ctr"/>
               <a:r>
-                <a:rPr kumimoji="1" lang="ja-JP" altLang="en-US" sz="1000" dirty="0">
+                <a:rPr lang="ja-JP" altLang="en-US" sz="1000" dirty="0">
                   <a:solidFill>
                     <a:schemeClr val="bg1"/>
                   </a:solidFill>
                 </a:rPr>
                 <a:t>アプリ</a:t>
               </a:r>
-              <a:endParaRPr kumimoji="1" lang="en-US" altLang="ja-JP" sz="1000" dirty="0">
+              <a:endParaRPr lang="en-US" altLang="ja-JP" sz="1000" dirty="0">
                 <a:solidFill>
                   <a:schemeClr val="bg1"/>
                 </a:solidFill>
@@ -7270,11 +8256,6 @@
                 </a:rPr>
                 <a:t>A</a:t>
               </a:r>
-              <a:endParaRPr kumimoji="1" lang="en-US" altLang="ja-JP" sz="1000" dirty="0">
-                <a:solidFill>
-                  <a:schemeClr val="bg1"/>
-                </a:solidFill>
-              </a:endParaRPr>
             </a:p>
             <a:p>
               <a:pPr algn="ctr"/>
@@ -7284,15 +8265,7 @@
                     <a:schemeClr val="bg1"/>
                   </a:solidFill>
                 </a:rPr>
-                <a:t>+</a:t>
-              </a:r>
-              <a:r>
-                <a:rPr kumimoji="1" lang="en-US" altLang="ja-JP" sz="1000" dirty="0">
-                  <a:solidFill>
-                    <a:schemeClr val="bg1"/>
-                  </a:solidFill>
-                </a:rPr>
-                <a:t>5%</a:t>
+                <a:t>+5%</a:t>
               </a:r>
             </a:p>
           </p:txBody>
@@ -7349,14 +8322,14 @@
             <a:p>
               <a:pPr algn="ctr"/>
               <a:r>
-                <a:rPr kumimoji="1" lang="ja-JP" altLang="en-US" sz="1000" dirty="0">
+                <a:rPr lang="ja-JP" altLang="en-US" sz="1000" dirty="0">
                   <a:solidFill>
                     <a:schemeClr val="bg1"/>
                   </a:solidFill>
                 </a:rPr>
                 <a:t>アプリ</a:t>
               </a:r>
-              <a:endParaRPr kumimoji="1" lang="en-US" altLang="ja-JP" sz="1000" dirty="0">
+              <a:endParaRPr lang="en-US" altLang="ja-JP" sz="1000" dirty="0">
                 <a:solidFill>
                   <a:schemeClr val="bg1"/>
                 </a:solidFill>
@@ -7365,7 +8338,7 @@
             <a:p>
               <a:pPr algn="ctr"/>
               <a:r>
-                <a:rPr kumimoji="1" lang="en-US" altLang="ja-JP" sz="1000" dirty="0">
+                <a:rPr lang="en-US" altLang="ja-JP" sz="1000" dirty="0">
                   <a:solidFill>
                     <a:schemeClr val="bg1"/>
                   </a:solidFill>
@@ -7381,15 +8354,7 @@
                     <a:schemeClr val="bg1"/>
                   </a:solidFill>
                 </a:rPr>
-                <a:t>+</a:t>
-              </a:r>
-              <a:r>
-                <a:rPr kumimoji="1" lang="en-US" altLang="ja-JP" sz="1000" dirty="0">
-                  <a:solidFill>
-                    <a:schemeClr val="bg1"/>
-                  </a:solidFill>
-                </a:rPr>
-                <a:t>5%</a:t>
+                <a:t>+5%</a:t>
               </a:r>
             </a:p>
           </p:txBody>
@@ -7446,14 +8411,14 @@
             <a:p>
               <a:pPr algn="ctr"/>
               <a:r>
-                <a:rPr kumimoji="1" lang="ja-JP" altLang="en-US" sz="1000" dirty="0">
+                <a:rPr lang="ja-JP" altLang="en-US" sz="1000" dirty="0">
                   <a:solidFill>
                     <a:schemeClr val="bg1"/>
                   </a:solidFill>
                 </a:rPr>
                 <a:t>アプリ</a:t>
               </a:r>
-              <a:endParaRPr kumimoji="1" lang="en-US" altLang="ja-JP" sz="1000" dirty="0">
+              <a:endParaRPr lang="en-US" altLang="ja-JP" sz="1000" dirty="0">
                 <a:solidFill>
                   <a:schemeClr val="bg1"/>
                 </a:solidFill>
@@ -7462,7 +8427,7 @@
             <a:p>
               <a:pPr algn="ctr"/>
               <a:r>
-                <a:rPr kumimoji="1" lang="en-US" altLang="ja-JP" sz="1000" dirty="0">
+                <a:rPr lang="en-US" altLang="ja-JP" sz="1000" dirty="0">
                   <a:solidFill>
                     <a:schemeClr val="bg1"/>
                   </a:solidFill>
@@ -7478,15 +8443,7 @@
                     <a:schemeClr val="bg1"/>
                   </a:solidFill>
                 </a:rPr>
-                <a:t>+</a:t>
-              </a:r>
-              <a:r>
-                <a:rPr kumimoji="1" lang="en-US" altLang="ja-JP" sz="1000" dirty="0">
-                  <a:solidFill>
-                    <a:schemeClr val="bg1"/>
-                  </a:solidFill>
-                </a:rPr>
-                <a:t>5%</a:t>
+                <a:t>+5%</a:t>
               </a:r>
             </a:p>
           </p:txBody>
@@ -7543,14 +8500,14 @@
             <a:p>
               <a:pPr algn="ctr"/>
               <a:r>
-                <a:rPr kumimoji="1" lang="ja-JP" altLang="en-US" sz="1000" dirty="0">
+                <a:rPr lang="ja-JP" altLang="en-US" sz="1000" dirty="0">
                   <a:solidFill>
                     <a:schemeClr val="bg1"/>
                   </a:solidFill>
                 </a:rPr>
                 <a:t>アプリ</a:t>
               </a:r>
-              <a:endParaRPr kumimoji="1" lang="en-US" altLang="ja-JP" sz="1000" dirty="0">
+              <a:endParaRPr lang="en-US" altLang="ja-JP" sz="1000" dirty="0">
                 <a:solidFill>
                   <a:schemeClr val="bg1"/>
                 </a:solidFill>
@@ -7559,7 +8516,7 @@
             <a:p>
               <a:pPr algn="ctr"/>
               <a:r>
-                <a:rPr kumimoji="1" lang="en-US" altLang="ja-JP" sz="1000" dirty="0">
+                <a:rPr lang="en-US" altLang="ja-JP" sz="1000" dirty="0">
                   <a:solidFill>
                     <a:schemeClr val="bg1"/>
                   </a:solidFill>
@@ -7575,15 +8532,7 @@
                     <a:schemeClr val="bg1"/>
                   </a:solidFill>
                 </a:rPr>
-                <a:t>+</a:t>
-              </a:r>
-              <a:r>
-                <a:rPr kumimoji="1" lang="en-US" altLang="ja-JP" sz="1000" dirty="0">
-                  <a:solidFill>
-                    <a:schemeClr val="bg1"/>
-                  </a:solidFill>
-                </a:rPr>
-                <a:t>5%</a:t>
+                <a:t>+5%</a:t>
               </a:r>
             </a:p>
           </p:txBody>
@@ -7640,14 +8589,14 @@
             <a:p>
               <a:pPr algn="ctr"/>
               <a:r>
-                <a:rPr kumimoji="1" lang="ja-JP" altLang="en-US" sz="1000" dirty="0">
+                <a:rPr lang="ja-JP" altLang="en-US" sz="1000" dirty="0">
                   <a:solidFill>
                     <a:schemeClr val="bg1"/>
                   </a:solidFill>
                 </a:rPr>
                 <a:t>アプリ</a:t>
               </a:r>
-              <a:endParaRPr kumimoji="1" lang="en-US" altLang="ja-JP" sz="1000" dirty="0">
+              <a:endParaRPr lang="en-US" altLang="ja-JP" sz="1000" dirty="0">
                 <a:solidFill>
                   <a:schemeClr val="bg1"/>
                 </a:solidFill>
@@ -7663,11 +8612,6 @@
                 </a:rPr>
                 <a:t>E</a:t>
               </a:r>
-              <a:endParaRPr kumimoji="1" lang="en-US" altLang="ja-JP" sz="1000" dirty="0">
-                <a:solidFill>
-                  <a:schemeClr val="bg1"/>
-                </a:solidFill>
-              </a:endParaRPr>
             </a:p>
             <a:p>
               <a:pPr algn="ctr"/>
@@ -7677,15 +8621,7 @@
                     <a:schemeClr val="bg1"/>
                   </a:solidFill>
                 </a:rPr>
-                <a:t>+</a:t>
-              </a:r>
-              <a:r>
-                <a:rPr kumimoji="1" lang="en-US" altLang="ja-JP" sz="1000" dirty="0">
-                  <a:solidFill>
-                    <a:schemeClr val="bg1"/>
-                  </a:solidFill>
-                </a:rPr>
-                <a:t>5%</a:t>
+                <a:t>+5%</a:t>
               </a:r>
             </a:p>
           </p:txBody>
@@ -7742,14 +8678,14 @@
             <a:p>
               <a:pPr algn="ctr"/>
               <a:r>
-                <a:rPr kumimoji="1" lang="ja-JP" altLang="en-US" sz="1000" dirty="0">
+                <a:rPr lang="ja-JP" altLang="en-US" sz="1000" dirty="0">
                   <a:solidFill>
                     <a:schemeClr val="bg1"/>
                   </a:solidFill>
                 </a:rPr>
                 <a:t>アプリ</a:t>
               </a:r>
-              <a:endParaRPr kumimoji="1" lang="en-US" altLang="ja-JP" sz="1000" dirty="0">
+              <a:endParaRPr lang="en-US" altLang="ja-JP" sz="1000" dirty="0">
                 <a:solidFill>
                   <a:schemeClr val="bg1"/>
                 </a:solidFill>
@@ -7758,7 +8694,7 @@
             <a:p>
               <a:pPr algn="ctr"/>
               <a:r>
-                <a:rPr kumimoji="1" lang="en-US" altLang="ja-JP" sz="1000" dirty="0">
+                <a:rPr lang="en-US" altLang="ja-JP" sz="1000" dirty="0">
                   <a:solidFill>
                     <a:schemeClr val="bg1"/>
                   </a:solidFill>
@@ -7774,15 +8710,7 @@
                     <a:schemeClr val="bg1"/>
                   </a:solidFill>
                 </a:rPr>
-                <a:t>+</a:t>
-              </a:r>
-              <a:r>
-                <a:rPr kumimoji="1" lang="en-US" altLang="ja-JP" sz="1000" dirty="0">
-                  <a:solidFill>
-                    <a:schemeClr val="bg1"/>
-                  </a:solidFill>
-                </a:rPr>
-                <a:t>5%</a:t>
+                <a:t>+5%</a:t>
               </a:r>
             </a:p>
           </p:txBody>
@@ -7839,14 +8767,14 @@
             <a:p>
               <a:pPr algn="ctr"/>
               <a:r>
-                <a:rPr kumimoji="1" lang="ja-JP" altLang="en-US" sz="1000" dirty="0">
+                <a:rPr lang="ja-JP" altLang="en-US" sz="1000" dirty="0">
                   <a:solidFill>
                     <a:schemeClr val="bg1"/>
                   </a:solidFill>
                 </a:rPr>
                 <a:t>アプリ</a:t>
               </a:r>
-              <a:endParaRPr kumimoji="1" lang="en-US" altLang="ja-JP" sz="1000" dirty="0">
+              <a:endParaRPr lang="en-US" altLang="ja-JP" sz="1000" dirty="0">
                 <a:solidFill>
                   <a:schemeClr val="bg1"/>
                 </a:solidFill>
@@ -7855,7 +8783,7 @@
             <a:p>
               <a:pPr algn="ctr"/>
               <a:r>
-                <a:rPr kumimoji="1" lang="en-US" altLang="ja-JP" sz="1000" dirty="0">
+                <a:rPr lang="en-US" altLang="ja-JP" sz="1000" dirty="0">
                   <a:solidFill>
                     <a:schemeClr val="bg1"/>
                   </a:solidFill>
@@ -7871,15 +8799,7 @@
                     <a:schemeClr val="bg1"/>
                   </a:solidFill>
                 </a:rPr>
-                <a:t>+</a:t>
-              </a:r>
-              <a:r>
-                <a:rPr kumimoji="1" lang="en-US" altLang="ja-JP" sz="1000" dirty="0">
-                  <a:solidFill>
-                    <a:schemeClr val="bg1"/>
-                  </a:solidFill>
-                </a:rPr>
-                <a:t>5%</a:t>
+                <a:t>+5%</a:t>
               </a:r>
             </a:p>
           </p:txBody>
@@ -7936,14 +8856,14 @@
             <a:p>
               <a:pPr algn="ctr"/>
               <a:r>
-                <a:rPr kumimoji="1" lang="ja-JP" altLang="en-US" sz="1000" dirty="0">
+                <a:rPr lang="ja-JP" altLang="en-US" sz="1000" dirty="0">
                   <a:solidFill>
                     <a:schemeClr val="bg1"/>
                   </a:solidFill>
                 </a:rPr>
                 <a:t>アプリ</a:t>
               </a:r>
-              <a:endParaRPr kumimoji="1" lang="en-US" altLang="ja-JP" sz="1000" dirty="0">
+              <a:endParaRPr lang="en-US" altLang="ja-JP" sz="1000" dirty="0">
                 <a:solidFill>
                   <a:schemeClr val="bg1"/>
                 </a:solidFill>
@@ -7952,7 +8872,7 @@
             <a:p>
               <a:pPr algn="ctr"/>
               <a:r>
-                <a:rPr kumimoji="1" lang="en-US" altLang="ja-JP" sz="1000" dirty="0">
+                <a:rPr lang="en-US" altLang="ja-JP" sz="1000" dirty="0">
                   <a:solidFill>
                     <a:schemeClr val="bg1"/>
                   </a:solidFill>
@@ -7968,15 +8888,7 @@
                     <a:schemeClr val="bg1"/>
                   </a:solidFill>
                 </a:rPr>
-                <a:t>+</a:t>
-              </a:r>
-              <a:r>
-                <a:rPr kumimoji="1" lang="en-US" altLang="ja-JP" sz="1000" dirty="0">
-                  <a:solidFill>
-                    <a:schemeClr val="bg1"/>
-                  </a:solidFill>
-                </a:rPr>
-                <a:t>5%</a:t>
+                <a:t>+5%</a:t>
               </a:r>
             </a:p>
           </p:txBody>
@@ -7996,7 +8908,7 @@
         </p:nvGrpSpPr>
         <p:grpSpPr>
           <a:xfrm>
-            <a:off x="5292008" y="1268977"/>
+            <a:off x="6816009" y="1268978"/>
             <a:ext cx="3510039" cy="2070023"/>
             <a:chOff x="611956" y="1088974"/>
             <a:chExt cx="3510039" cy="2070023"/>
@@ -8057,7 +8969,7 @@
             <a:p>
               <a:pPr algn="ctr"/>
               <a:r>
-                <a:rPr kumimoji="1" lang="ja-JP" altLang="en-US" sz="1600" dirty="0">
+                <a:rPr lang="ja-JP" altLang="en-US" sz="1600" dirty="0">
                   <a:solidFill>
                     <a:schemeClr val="bg1"/>
                   </a:solidFill>
@@ -8065,7 +8977,7 @@
                 <a:t>基盤 </a:t>
               </a:r>
               <a:r>
-                <a:rPr kumimoji="1" lang="en-US" altLang="ja-JP" sz="1600" dirty="0">
+                <a:rPr lang="en-US" altLang="ja-JP" sz="1600" dirty="0">
                   <a:solidFill>
                     <a:schemeClr val="bg1"/>
                   </a:solidFill>
@@ -8073,7 +8985,7 @@
                 <a:t>1 </a:t>
               </a:r>
               <a:r>
-                <a:rPr kumimoji="1" lang="ja-JP" altLang="en-US" sz="1600" dirty="0">
+                <a:rPr lang="ja-JP" altLang="en-US" sz="1600" dirty="0">
                   <a:solidFill>
                     <a:schemeClr val="bg1"/>
                   </a:solidFill>
@@ -8135,14 +9047,14 @@
             <a:p>
               <a:pPr algn="ctr"/>
               <a:r>
-                <a:rPr kumimoji="1" lang="ja-JP" altLang="en-US" sz="1000" b="1" dirty="0">
+                <a:rPr lang="ja-JP" altLang="en-US" sz="1000" b="1" dirty="0">
                   <a:solidFill>
                     <a:schemeClr val="bg1"/>
                   </a:solidFill>
                 </a:rPr>
                 <a:t>アプリ</a:t>
               </a:r>
-              <a:endParaRPr kumimoji="1" lang="en-US" altLang="ja-JP" sz="1000" b="1" dirty="0">
+              <a:endParaRPr lang="en-US" altLang="ja-JP" sz="1000" b="1" dirty="0">
                 <a:solidFill>
                   <a:schemeClr val="bg1"/>
                 </a:solidFill>
@@ -8158,11 +9070,6 @@
                 </a:rPr>
                 <a:t>A</a:t>
               </a:r>
-              <a:endParaRPr kumimoji="1" lang="en-US" altLang="ja-JP" sz="1000" b="1" dirty="0">
-                <a:solidFill>
-                  <a:schemeClr val="bg1"/>
-                </a:solidFill>
-              </a:endParaRPr>
             </a:p>
             <a:p>
               <a:pPr algn="ctr"/>
@@ -8182,7 +9089,7 @@
                 </a:rPr>
                 <a:t>倍</a:t>
               </a:r>
-              <a:endParaRPr kumimoji="1" lang="en-US" altLang="ja-JP" sz="1000" b="1" dirty="0">
+              <a:endParaRPr lang="en-US" altLang="ja-JP" sz="1000" b="1" dirty="0">
                 <a:solidFill>
                   <a:schemeClr val="bg1"/>
                 </a:solidFill>
@@ -8245,14 +9152,14 @@
             <a:p>
               <a:pPr algn="ctr"/>
               <a:r>
-                <a:rPr kumimoji="1" lang="ja-JP" altLang="en-US" sz="1000" dirty="0">
+                <a:rPr lang="ja-JP" altLang="en-US" sz="1000" dirty="0">
                   <a:solidFill>
                     <a:schemeClr val="bg1"/>
                   </a:solidFill>
                 </a:rPr>
                 <a:t>アプリ</a:t>
               </a:r>
-              <a:endParaRPr kumimoji="1" lang="en-US" altLang="ja-JP" sz="1000" dirty="0">
+              <a:endParaRPr lang="en-US" altLang="ja-JP" sz="1000" dirty="0">
                 <a:solidFill>
                   <a:schemeClr val="bg1"/>
                 </a:solidFill>
@@ -8261,7 +9168,7 @@
             <a:p>
               <a:pPr algn="ctr"/>
               <a:r>
-                <a:rPr kumimoji="1" lang="en-US" altLang="ja-JP" sz="1000" dirty="0">
+                <a:rPr lang="en-US" altLang="ja-JP" sz="1000" dirty="0">
                   <a:solidFill>
                     <a:schemeClr val="bg1"/>
                   </a:solidFill>
@@ -8272,7 +9179,7 @@
             <a:p>
               <a:pPr algn="ctr"/>
               <a:r>
-                <a:rPr kumimoji="1" lang="en-US" altLang="ja-JP" sz="1000" dirty="0">
+                <a:rPr lang="en-US" altLang="ja-JP" sz="1000" dirty="0">
                   <a:solidFill>
                     <a:schemeClr val="bg1"/>
                   </a:solidFill>
@@ -8280,14 +9187,14 @@
                 <a:t>1</a:t>
               </a:r>
               <a:r>
-                <a:rPr kumimoji="1" lang="ja-JP" altLang="en-US" sz="1000" dirty="0">
+                <a:rPr lang="ja-JP" altLang="en-US" sz="1000" dirty="0">
                   <a:solidFill>
                     <a:schemeClr val="bg1"/>
                   </a:solidFill>
                 </a:rPr>
                 <a:t>倍</a:t>
               </a:r>
-              <a:endParaRPr kumimoji="1" lang="en-US" altLang="ja-JP" sz="1000" dirty="0">
+              <a:endParaRPr lang="en-US" altLang="ja-JP" sz="1000" dirty="0">
                 <a:solidFill>
                   <a:schemeClr val="bg1"/>
                 </a:solidFill>
@@ -8350,14 +9257,14 @@
             <a:p>
               <a:pPr algn="ctr"/>
               <a:r>
-                <a:rPr kumimoji="1" lang="ja-JP" altLang="en-US" sz="1000" dirty="0">
+                <a:rPr lang="ja-JP" altLang="en-US" sz="1000" dirty="0">
                   <a:solidFill>
                     <a:schemeClr val="bg1"/>
                   </a:solidFill>
                 </a:rPr>
                 <a:t>アプリ</a:t>
               </a:r>
-              <a:endParaRPr kumimoji="1" lang="en-US" altLang="ja-JP" sz="1000" dirty="0">
+              <a:endParaRPr lang="en-US" altLang="ja-JP" sz="1000" dirty="0">
                 <a:solidFill>
                   <a:schemeClr val="bg1"/>
                 </a:solidFill>
@@ -8366,7 +9273,7 @@
             <a:p>
               <a:pPr algn="ctr"/>
               <a:r>
-                <a:rPr kumimoji="1" lang="en-US" altLang="ja-JP" sz="1000" dirty="0">
+                <a:rPr lang="en-US" altLang="ja-JP" sz="1000" dirty="0">
                   <a:solidFill>
                     <a:schemeClr val="bg1"/>
                   </a:solidFill>
@@ -8392,7 +9299,7 @@
                 </a:rPr>
                 <a:t>倍</a:t>
               </a:r>
-              <a:endParaRPr kumimoji="1" lang="en-US" altLang="ja-JP" sz="1000" dirty="0">
+              <a:endParaRPr lang="en-US" altLang="ja-JP" sz="1000" dirty="0">
                 <a:solidFill>
                   <a:schemeClr val="bg1"/>
                 </a:solidFill>
@@ -8455,14 +9362,14 @@
             <a:p>
               <a:pPr algn="ctr"/>
               <a:r>
-                <a:rPr kumimoji="1" lang="ja-JP" altLang="en-US" sz="1000" dirty="0">
+                <a:rPr lang="ja-JP" altLang="en-US" sz="1000" dirty="0">
                   <a:solidFill>
                     <a:schemeClr val="bg1"/>
                   </a:solidFill>
                 </a:rPr>
                 <a:t>アプリ</a:t>
               </a:r>
-              <a:endParaRPr kumimoji="1" lang="en-US" altLang="ja-JP" sz="1000" dirty="0">
+              <a:endParaRPr lang="en-US" altLang="ja-JP" sz="1000" dirty="0">
                 <a:solidFill>
                   <a:schemeClr val="bg1"/>
                 </a:solidFill>
@@ -8471,7 +9378,7 @@
             <a:p>
               <a:pPr algn="ctr"/>
               <a:r>
-                <a:rPr kumimoji="1" lang="en-US" altLang="ja-JP" sz="1000" dirty="0">
+                <a:rPr lang="en-US" altLang="ja-JP" sz="1000" dirty="0">
                   <a:solidFill>
                     <a:schemeClr val="bg1"/>
                   </a:solidFill>
@@ -8497,7 +9404,7 @@
                 </a:rPr>
                 <a:t>倍</a:t>
               </a:r>
-              <a:endParaRPr kumimoji="1" lang="en-US" altLang="ja-JP" sz="1000" dirty="0">
+              <a:endParaRPr lang="en-US" altLang="ja-JP" sz="1000" dirty="0">
                 <a:solidFill>
                   <a:schemeClr val="bg1"/>
                 </a:solidFill>
@@ -8560,14 +9467,14 @@
             <a:p>
               <a:pPr algn="ctr"/>
               <a:r>
-                <a:rPr kumimoji="1" lang="ja-JP" altLang="en-US" sz="1000" dirty="0">
+                <a:rPr lang="ja-JP" altLang="en-US" sz="1000" dirty="0">
                   <a:solidFill>
                     <a:schemeClr val="bg1"/>
                   </a:solidFill>
                 </a:rPr>
                 <a:t>アプリ</a:t>
               </a:r>
-              <a:endParaRPr kumimoji="1" lang="en-US" altLang="ja-JP" sz="1000" dirty="0">
+              <a:endParaRPr lang="en-US" altLang="ja-JP" sz="1000" dirty="0">
                 <a:solidFill>
                   <a:schemeClr val="bg1"/>
                 </a:solidFill>
@@ -8583,11 +9490,6 @@
                 </a:rPr>
                 <a:t>E</a:t>
               </a:r>
-              <a:endParaRPr kumimoji="1" lang="en-US" altLang="ja-JP" sz="1000" dirty="0">
-                <a:solidFill>
-                  <a:schemeClr val="bg1"/>
-                </a:solidFill>
-              </a:endParaRPr>
             </a:p>
             <a:p>
               <a:pPr algn="ctr"/>
@@ -8607,7 +9509,7 @@
                 </a:rPr>
                 <a:t>倍</a:t>
               </a:r>
-              <a:endParaRPr kumimoji="1" lang="en-US" altLang="ja-JP" sz="1000" dirty="0">
+              <a:endParaRPr lang="en-US" altLang="ja-JP" sz="1000" dirty="0">
                 <a:solidFill>
                   <a:schemeClr val="bg1"/>
                 </a:solidFill>
@@ -8670,14 +9572,14 @@
             <a:p>
               <a:pPr algn="ctr"/>
               <a:r>
-                <a:rPr kumimoji="1" lang="ja-JP" altLang="en-US" sz="1000" dirty="0">
+                <a:rPr lang="ja-JP" altLang="en-US" sz="1000" dirty="0">
                   <a:solidFill>
                     <a:schemeClr val="bg1"/>
                   </a:solidFill>
                 </a:rPr>
                 <a:t>アプリ</a:t>
               </a:r>
-              <a:endParaRPr kumimoji="1" lang="en-US" altLang="ja-JP" sz="1000" dirty="0">
+              <a:endParaRPr lang="en-US" altLang="ja-JP" sz="1000" dirty="0">
                 <a:solidFill>
                   <a:schemeClr val="bg1"/>
                 </a:solidFill>
@@ -8686,7 +9588,7 @@
             <a:p>
               <a:pPr algn="ctr"/>
               <a:r>
-                <a:rPr kumimoji="1" lang="en-US" altLang="ja-JP" sz="1000" dirty="0">
+                <a:rPr lang="en-US" altLang="ja-JP" sz="1000" dirty="0">
                   <a:solidFill>
                     <a:schemeClr val="bg1"/>
                   </a:solidFill>
@@ -8712,7 +9614,7 @@
                 </a:rPr>
                 <a:t>倍</a:t>
               </a:r>
-              <a:endParaRPr kumimoji="1" lang="en-US" altLang="ja-JP" sz="1000" dirty="0">
+              <a:endParaRPr lang="en-US" altLang="ja-JP" sz="1000" dirty="0">
                 <a:solidFill>
                   <a:schemeClr val="bg1"/>
                 </a:solidFill>
@@ -8775,14 +9677,14 @@
             <a:p>
               <a:pPr algn="ctr"/>
               <a:r>
-                <a:rPr kumimoji="1" lang="ja-JP" altLang="en-US" sz="1000" dirty="0">
+                <a:rPr lang="ja-JP" altLang="en-US" sz="1000" dirty="0">
                   <a:solidFill>
                     <a:schemeClr val="bg1"/>
                   </a:solidFill>
                 </a:rPr>
                 <a:t>アプリ</a:t>
               </a:r>
-              <a:endParaRPr kumimoji="1" lang="en-US" altLang="ja-JP" sz="1000" dirty="0">
+              <a:endParaRPr lang="en-US" altLang="ja-JP" sz="1000" dirty="0">
                 <a:solidFill>
                   <a:schemeClr val="bg1"/>
                 </a:solidFill>
@@ -8791,7 +9693,7 @@
             <a:p>
               <a:pPr algn="ctr"/>
               <a:r>
-                <a:rPr kumimoji="1" lang="en-US" altLang="ja-JP" sz="1000" dirty="0">
+                <a:rPr lang="en-US" altLang="ja-JP" sz="1000" dirty="0">
                   <a:solidFill>
                     <a:schemeClr val="bg1"/>
                   </a:solidFill>
@@ -8817,7 +9719,7 @@
                 </a:rPr>
                 <a:t>倍</a:t>
               </a:r>
-              <a:endParaRPr kumimoji="1" lang="en-US" altLang="ja-JP" sz="1000" dirty="0">
+              <a:endParaRPr lang="en-US" altLang="ja-JP" sz="1000" dirty="0">
                 <a:solidFill>
                   <a:schemeClr val="bg1"/>
                 </a:solidFill>
@@ -8880,14 +9782,14 @@
             <a:p>
               <a:pPr algn="ctr"/>
               <a:r>
-                <a:rPr kumimoji="1" lang="ja-JP" altLang="en-US" sz="1000" dirty="0">
+                <a:rPr lang="ja-JP" altLang="en-US" sz="1000" dirty="0">
                   <a:solidFill>
                     <a:schemeClr val="bg1"/>
                   </a:solidFill>
                 </a:rPr>
                 <a:t>アプリ</a:t>
               </a:r>
-              <a:endParaRPr kumimoji="1" lang="en-US" altLang="ja-JP" sz="1000" dirty="0">
+              <a:endParaRPr lang="en-US" altLang="ja-JP" sz="1000" dirty="0">
                 <a:solidFill>
                   <a:schemeClr val="bg1"/>
                 </a:solidFill>
@@ -8896,7 +9798,7 @@
             <a:p>
               <a:pPr algn="ctr"/>
               <a:r>
-                <a:rPr kumimoji="1" lang="en-US" altLang="ja-JP" sz="1000" dirty="0">
+                <a:rPr lang="en-US" altLang="ja-JP" sz="1000" dirty="0">
                   <a:solidFill>
                     <a:schemeClr val="bg1"/>
                   </a:solidFill>
@@ -8922,7 +9824,7 @@
                 </a:rPr>
                 <a:t>倍</a:t>
               </a:r>
-              <a:endParaRPr kumimoji="1" lang="en-US" altLang="ja-JP" sz="1000" dirty="0">
+              <a:endParaRPr lang="en-US" altLang="ja-JP" sz="1000" dirty="0">
                 <a:solidFill>
                   <a:schemeClr val="bg1"/>
                 </a:solidFill>
@@ -8945,7 +9847,7 @@
         </p:nvSpPr>
         <p:spPr bwMode="auto">
           <a:xfrm>
-            <a:off x="5202007" y="4239009"/>
+            <a:off x="6726008" y="4239010"/>
             <a:ext cx="3690041" cy="270003"/>
           </a:xfrm>
           <a:prstGeom prst="roundRect">
@@ -8981,7 +9883,7 @@
           <a:lstStyle/>
           <a:p>
             <a:pPr algn="ctr"/>
-            <a:endParaRPr kumimoji="1" lang="en-US" dirty="0">
+            <a:endParaRPr lang="en-US" dirty="0">
               <a:solidFill>
                 <a:schemeClr val="tx1">
                   <a:lumMod val="75000"/>
@@ -9007,7 +9909,7 @@
         </p:nvSpPr>
         <p:spPr bwMode="auto">
           <a:xfrm rot="10800000">
-            <a:off x="6732024" y="4599013"/>
+            <a:off x="8256024" y="4599014"/>
             <a:ext cx="540006" cy="450005"/>
           </a:xfrm>
           <a:prstGeom prst="downArrow">
@@ -9042,7 +9944,7 @@
           <a:lstStyle/>
           <a:p>
             <a:pPr algn="ctr"/>
-            <a:endParaRPr kumimoji="1" lang="en-US" dirty="0">
+            <a:endParaRPr lang="en-US" dirty="0">
               <a:solidFill>
                 <a:schemeClr val="tx1">
                   <a:lumMod val="75000"/>
@@ -9134,7 +10036,7 @@
             <a:spLocks noGrp="1"/>
           </p:cNvSpPr>
           <p:nvPr>
-            <p:ph sz="quarter" idx="10"/>
+            <p:ph type="body" sz="quarter" idx="10"/>
           </p:nvPr>
         </p:nvSpPr>
         <p:spPr/>
@@ -9267,7 +10169,7 @@
             <a:spLocks noGrp="1"/>
           </p:cNvSpPr>
           <p:nvPr>
-            <p:ph sz="quarter" idx="10"/>
+            <p:ph type="body" sz="quarter" idx="10"/>
           </p:nvPr>
         </p:nvSpPr>
         <p:spPr/>
@@ -9397,7 +10299,7 @@
             <a:spLocks noGrp="1"/>
           </p:cNvSpPr>
           <p:nvPr>
-            <p:ph sz="quarter" idx="10"/>
+            <p:ph type="body" sz="quarter" idx="10"/>
           </p:nvPr>
         </p:nvSpPr>
         <p:spPr/>
@@ -9580,7 +10482,7 @@
             <a:spLocks noGrp="1"/>
           </p:cNvSpPr>
           <p:nvPr>
-            <p:ph sz="quarter" idx="10"/>
+            <p:ph type="body" sz="quarter" idx="10"/>
           </p:nvPr>
         </p:nvSpPr>
         <p:spPr/>
@@ -9730,7 +10632,7 @@
             <a:spLocks noGrp="1"/>
           </p:cNvSpPr>
           <p:nvPr>
-            <p:ph sz="quarter" idx="10"/>
+            <p:ph type="body" sz="quarter" idx="10"/>
           </p:nvPr>
         </p:nvSpPr>
         <p:spPr/>
@@ -9990,7 +10892,7 @@
             <a:spLocks noGrp="1"/>
           </p:cNvSpPr>
           <p:nvPr>
-            <p:ph sz="quarter" idx="10"/>
+            <p:ph type="body" sz="quarter" idx="10"/>
           </p:nvPr>
         </p:nvSpPr>
         <p:spPr/>
@@ -9999,68 +10901,68 @@
           <a:lstStyle/>
           <a:p>
             <a:r>
-              <a:rPr kumimoji="1" lang="ja-JP" altLang="en-US" sz="1800" dirty="0"/>
+              <a:rPr lang="ja-JP" altLang="en-US" sz="1800" dirty="0"/>
               <a:t>スマホやタブレットは，いま最も高性能なコンピュータの１つ</a:t>
             </a:r>
-            <a:endParaRPr kumimoji="1" lang="en-US" altLang="ja-JP" sz="1800" dirty="0"/>
+            <a:endParaRPr lang="en-US" altLang="ja-JP" sz="1800" dirty="0"/>
           </a:p>
           <a:p>
             <a:pPr lvl="1"/>
             <a:r>
-              <a:rPr kumimoji="1" lang="ja-JP" altLang="en-US" sz="1800" dirty="0"/>
+              <a:rPr lang="ja-JP" altLang="en-US" sz="1800" dirty="0"/>
               <a:t>いわゆるガラケーは組み込みコンピュータの一種だった</a:t>
             </a:r>
-            <a:endParaRPr kumimoji="1" lang="en-US" altLang="ja-JP" sz="1800" dirty="0"/>
+            <a:endParaRPr lang="en-US" altLang="ja-JP" sz="1800" dirty="0"/>
           </a:p>
           <a:p>
             <a:pPr lvl="1"/>
             <a:r>
-              <a:rPr kumimoji="1" lang="ja-JP" altLang="en-US" sz="1800" dirty="0"/>
+              <a:rPr lang="ja-JP" altLang="en-US" sz="1800" dirty="0"/>
               <a:t>スマホでは高度なアプリを動かすためにどんどん高性能化していった</a:t>
             </a:r>
-            <a:endParaRPr kumimoji="1" lang="en-US" altLang="ja-JP" sz="1800" dirty="0"/>
+            <a:endParaRPr lang="en-US" altLang="ja-JP" sz="1800" dirty="0"/>
           </a:p>
           <a:p>
             <a:pPr lvl="2"/>
             <a:r>
-              <a:rPr kumimoji="1" lang="en-US" altLang="ja-JP" sz="1800" dirty="0"/>
+              <a:rPr lang="en-US" altLang="ja-JP" sz="1800" dirty="0"/>
               <a:t>WEB </a:t>
             </a:r>
             <a:r>
-              <a:rPr kumimoji="1" lang="ja-JP" altLang="en-US" sz="1800" dirty="0"/>
+              <a:rPr lang="ja-JP" altLang="en-US" sz="1800" dirty="0"/>
               <a:t>ブラウザの高度化も影響</a:t>
             </a:r>
-            <a:endParaRPr kumimoji="1" lang="en-US" altLang="ja-JP" sz="1800" dirty="0"/>
-          </a:p>
-          <a:p>
-            <a:r>
-              <a:rPr kumimoji="1" lang="ja-JP" altLang="en-US" sz="1800" dirty="0"/>
+            <a:endParaRPr lang="en-US" altLang="ja-JP" sz="1800" dirty="0"/>
+          </a:p>
+          <a:p>
+            <a:r>
+              <a:rPr lang="ja-JP" altLang="en-US" sz="1800" dirty="0"/>
               <a:t>消費電力の縛りが大きいため，あえてゆっくり動かされている事もある</a:t>
             </a:r>
-            <a:endParaRPr kumimoji="1" lang="en-US" altLang="ja-JP" sz="1800" dirty="0"/>
+            <a:endParaRPr lang="en-US" altLang="ja-JP" sz="1800" dirty="0"/>
           </a:p>
           <a:p>
             <a:pPr lvl="1"/>
             <a:r>
-              <a:rPr kumimoji="1" lang="ja-JP" altLang="en-US" sz="1800" dirty="0"/>
+              <a:rPr lang="ja-JP" altLang="en-US" sz="1800" dirty="0"/>
               <a:t>バッテリー駆動される</a:t>
             </a:r>
-            <a:endParaRPr kumimoji="1" lang="en-US" altLang="ja-JP" sz="1800" dirty="0"/>
+            <a:endParaRPr lang="en-US" altLang="ja-JP" sz="1800" dirty="0"/>
           </a:p>
           <a:p>
             <a:pPr lvl="1"/>
             <a:r>
-              <a:rPr kumimoji="1" lang="ja-JP" altLang="en-US" sz="1800" dirty="0"/>
+              <a:rPr lang="ja-JP" altLang="en-US" sz="1800" dirty="0"/>
               <a:t>冷却に制約がある（冷却ファンとか使えない）</a:t>
             </a:r>
-            <a:endParaRPr kumimoji="1" lang="en-US" altLang="ja-JP" sz="1800" dirty="0"/>
-          </a:p>
-          <a:p>
-            <a:r>
-              <a:rPr kumimoji="1" lang="ja-JP" altLang="en-US" sz="1800" dirty="0"/>
+            <a:endParaRPr lang="en-US" altLang="ja-JP" sz="1800" dirty="0"/>
+          </a:p>
+          <a:p>
+            <a:r>
+              <a:rPr lang="ja-JP" altLang="en-US" sz="1800" dirty="0"/>
               <a:t>お値段は数万円から最近は１０万円を超えることも</a:t>
             </a:r>
-            <a:endParaRPr kumimoji="1" lang="en-US" altLang="ja-JP" sz="1800" dirty="0"/>
+            <a:endParaRPr lang="en-US" altLang="ja-JP" sz="1800" dirty="0"/>
           </a:p>
         </p:txBody>
       </p:sp>
@@ -10144,7 +11046,7 @@
             <a:spLocks noGrp="1"/>
           </p:cNvSpPr>
           <p:nvPr>
-            <p:ph sz="quarter" idx="10"/>
+            <p:ph type="body" sz="quarter" idx="10"/>
           </p:nvPr>
         </p:nvSpPr>
         <p:spPr/>
@@ -10305,7 +11207,7 @@
             <a:spLocks noGrp="1"/>
           </p:cNvSpPr>
           <p:nvPr>
-            <p:ph sz="quarter" idx="10"/>
+            <p:ph type="body" sz="quarter" idx="10"/>
           </p:nvPr>
         </p:nvSpPr>
         <p:spPr/>
@@ -10462,7 +11364,7 @@
             <a:spLocks noGrp="1"/>
           </p:cNvSpPr>
           <p:nvPr>
-            <p:ph sz="quarter" idx="10"/>
+            <p:ph type="body" sz="quarter" idx="10"/>
           </p:nvPr>
         </p:nvSpPr>
         <p:spPr/>
@@ -10564,7 +11466,7 @@
               <a:rPr kumimoji="1" lang="ja-JP" altLang="en-US" dirty="0"/>
               <a:t>目的とする「速さ」の違い</a:t>
             </a:r>
-            <a:endParaRPr kumimoji="1" lang="en-US" sz="3600" dirty="0"/>
+            <a:endParaRPr lang="en-US" sz="3600" dirty="0"/>
           </a:p>
         </p:txBody>
       </p:sp>
@@ -10581,7 +11483,7 @@
             <a:spLocks noGrp="1"/>
           </p:cNvSpPr>
           <p:nvPr>
-            <p:ph sz="quarter" idx="10"/>
+            <p:ph type="body" sz="quarter" idx="10"/>
           </p:nvPr>
         </p:nvSpPr>
         <p:spPr/>
@@ -10590,19 +11492,19 @@
           <a:lstStyle/>
           <a:p>
             <a:r>
-              <a:rPr kumimoji="1" lang="ja-JP" altLang="en-US" sz="1800" dirty="0"/>
+              <a:rPr lang="ja-JP" altLang="en-US" sz="1800" dirty="0"/>
               <a:t>スーパーコンピュータ</a:t>
             </a:r>
-            <a:endParaRPr kumimoji="1" lang="en-US" altLang="ja-JP" sz="1800" dirty="0"/>
+            <a:endParaRPr lang="en-US" altLang="ja-JP" sz="1800" dirty="0"/>
           </a:p>
           <a:p>
             <a:pPr lvl="1"/>
             <a:r>
-              <a:rPr kumimoji="1" lang="ja-JP" altLang="en-US" sz="1800" dirty="0"/>
+              <a:rPr lang="ja-JP" altLang="en-US" sz="1800" dirty="0"/>
               <a:t>いかに多くの計算</a:t>
             </a:r>
             <a:r>
-              <a:rPr kumimoji="1" lang="ja-JP" altLang="en-US" sz="1800" dirty="0">
+              <a:rPr lang="ja-JP" altLang="en-US" sz="1800" dirty="0">
                 <a:solidFill>
                   <a:schemeClr val="accent6"/>
                 </a:solidFill>
@@ -10610,58 +11512,58 @@
               <a:t>「量」</a:t>
             </a:r>
             <a:r>
-              <a:rPr kumimoji="1" lang="ja-JP" altLang="en-US" sz="1800" dirty="0"/>
+              <a:rPr lang="ja-JP" altLang="en-US" sz="1800" dirty="0"/>
               <a:t>をさばくかを重視</a:t>
             </a:r>
-            <a:endParaRPr kumimoji="1" lang="en-US" altLang="ja-JP" sz="1800" dirty="0"/>
+            <a:endParaRPr lang="en-US" altLang="ja-JP" sz="1800" dirty="0"/>
           </a:p>
           <a:p>
             <a:pPr lvl="2"/>
             <a:r>
-              <a:rPr kumimoji="1" lang="ja-JP" altLang="en-US" sz="1800" dirty="0"/>
+              <a:rPr lang="ja-JP" altLang="en-US" sz="1800" dirty="0"/>
               <a:t>科学技術計算（気象のシミュレーションとか）が主な対象</a:t>
             </a:r>
-            <a:endParaRPr kumimoji="1" lang="en-US" altLang="ja-JP" sz="1800" dirty="0"/>
+            <a:endParaRPr lang="en-US" altLang="ja-JP" sz="1800" dirty="0"/>
           </a:p>
           <a:p>
             <a:pPr lvl="2"/>
             <a:r>
-              <a:rPr kumimoji="1" lang="ja-JP" altLang="en-US" sz="1800" dirty="0"/>
+              <a:rPr lang="ja-JP" altLang="en-US" sz="1800" dirty="0"/>
               <a:t>地球を細かく区切ってシミュレーションとか</a:t>
             </a:r>
-            <a:endParaRPr kumimoji="1" lang="en-US" altLang="ja-JP" sz="1800" dirty="0"/>
+            <a:endParaRPr lang="en-US" altLang="ja-JP" sz="1800" dirty="0"/>
           </a:p>
           <a:p>
             <a:pPr lvl="1"/>
             <a:r>
-              <a:rPr kumimoji="1" lang="ja-JP" altLang="en-US" sz="1800" dirty="0"/>
+              <a:rPr lang="ja-JP" altLang="en-US" sz="1800" dirty="0"/>
               <a:t>車で言うとダンプカーみたいなもの</a:t>
             </a:r>
-            <a:endParaRPr kumimoji="1" lang="en-US" altLang="ja-JP" sz="1800" dirty="0"/>
+            <a:endParaRPr lang="en-US" altLang="ja-JP" sz="1800" dirty="0"/>
           </a:p>
           <a:p>
             <a:pPr lvl="2"/>
             <a:r>
-              <a:rPr kumimoji="1" lang="ja-JP" altLang="en-US" sz="1800" dirty="0"/>
+              <a:rPr lang="ja-JP" altLang="en-US" sz="1800" dirty="0"/>
               <a:t>時間あたりで大量の物資を運べるが，速度は速いわけではない</a:t>
             </a:r>
-            <a:endParaRPr kumimoji="1" lang="en-US" altLang="ja-JP" sz="1800" dirty="0"/>
-          </a:p>
-          <a:p>
-            <a:r>
-              <a:rPr kumimoji="1" lang="ja-JP" altLang="en-US" sz="1800" dirty="0"/>
+            <a:endParaRPr lang="en-US" altLang="ja-JP" sz="1800" dirty="0"/>
+          </a:p>
+          <a:p>
+            <a:r>
+              <a:rPr lang="ja-JP" altLang="en-US" sz="1800" dirty="0"/>
               <a:t>パソコンやスマホ</a:t>
             </a:r>
-            <a:endParaRPr kumimoji="1" lang="en-US" altLang="ja-JP" sz="1800" dirty="0"/>
+            <a:endParaRPr lang="en-US" altLang="ja-JP" sz="1800" dirty="0"/>
           </a:p>
           <a:p>
             <a:pPr lvl="1"/>
             <a:r>
-              <a:rPr kumimoji="1" lang="ja-JP" altLang="en-US" sz="1800" dirty="0"/>
+              <a:rPr lang="ja-JP" altLang="en-US" sz="1800" dirty="0"/>
               <a:t>量は多くないが，いかに</a:t>
             </a:r>
             <a:r>
-              <a:rPr kumimoji="1" lang="ja-JP" altLang="en-US" sz="1800" dirty="0">
+              <a:rPr lang="ja-JP" altLang="en-US" sz="1800" dirty="0">
                 <a:solidFill>
                   <a:schemeClr val="accent6"/>
                 </a:solidFill>
@@ -10669,42 +11571,42 @@
               <a:t>「短時間で」</a:t>
             </a:r>
             <a:r>
-              <a:rPr kumimoji="1" lang="ja-JP" altLang="en-US" sz="1800" dirty="0"/>
+              <a:rPr lang="ja-JP" altLang="en-US" sz="1800" dirty="0"/>
               <a:t>計算を終わらせられるかを重視</a:t>
             </a:r>
-            <a:endParaRPr kumimoji="1" lang="en-US" altLang="ja-JP" sz="1800" dirty="0"/>
+            <a:endParaRPr lang="en-US" altLang="ja-JP" sz="1800" dirty="0"/>
           </a:p>
           <a:p>
             <a:pPr lvl="2"/>
             <a:r>
-              <a:rPr kumimoji="1" lang="ja-JP" altLang="en-US" sz="1800" dirty="0"/>
+              <a:rPr lang="ja-JP" altLang="en-US" sz="1800" dirty="0"/>
               <a:t>ブラウザとかのアプリケーションが対象</a:t>
             </a:r>
-            <a:endParaRPr kumimoji="1" lang="en-US" altLang="ja-JP" sz="1800" dirty="0"/>
+            <a:endParaRPr lang="en-US" altLang="ja-JP" sz="1800" dirty="0"/>
           </a:p>
           <a:p>
             <a:pPr lvl="2"/>
             <a:r>
-              <a:rPr kumimoji="1" lang="ja-JP" altLang="en-US" sz="1800" dirty="0"/>
+              <a:rPr lang="ja-JP" altLang="en-US" sz="1800" dirty="0"/>
               <a:t>タップしたらすぐに反応するようにとか</a:t>
             </a:r>
-            <a:endParaRPr kumimoji="1" lang="en-US" altLang="ja-JP" sz="1800" dirty="0"/>
+            <a:endParaRPr lang="en-US" altLang="ja-JP" sz="1800" dirty="0"/>
           </a:p>
           <a:p>
             <a:pPr lvl="1"/>
             <a:r>
-              <a:rPr kumimoji="1" lang="ja-JP" altLang="en-US" sz="1800" dirty="0"/>
+              <a:rPr lang="ja-JP" altLang="en-US" sz="1800" dirty="0"/>
               <a:t>車でいうとレース用車のようなもの</a:t>
             </a:r>
-            <a:endParaRPr kumimoji="1" lang="en-US" altLang="ja-JP" sz="1800" dirty="0"/>
+            <a:endParaRPr lang="en-US" altLang="ja-JP" sz="1800" dirty="0"/>
           </a:p>
           <a:p>
             <a:pPr lvl="2"/>
             <a:r>
-              <a:rPr kumimoji="1" lang="ja-JP" altLang="en-US" sz="1800" dirty="0"/>
+              <a:rPr lang="ja-JP" altLang="en-US" sz="1800" dirty="0"/>
               <a:t>速度は速いが，多くの量を運べるわけではない</a:t>
             </a:r>
-            <a:endParaRPr kumimoji="1" lang="en-US" sz="1800" dirty="0"/>
+            <a:endParaRPr lang="en-US" sz="1800" dirty="0"/>
           </a:p>
         </p:txBody>
       </p:sp>
@@ -10788,12 +11690,12 @@
             <a:spLocks noGrp="1"/>
           </p:cNvSpPr>
           <p:nvPr>
-            <p:ph sz="quarter" idx="10"/>
+            <p:ph type="body" sz="quarter" idx="10"/>
           </p:nvPr>
         </p:nvSpPr>
         <p:spPr>
           <a:xfrm>
-            <a:off x="611956" y="1088974"/>
+            <a:off x="2135956" y="1088975"/>
             <a:ext cx="8280092" cy="2610029"/>
           </a:xfrm>
         </p:spPr>
@@ -10802,49 +11704,49 @@
           <a:lstStyle/>
           <a:p>
             <a:r>
-              <a:rPr kumimoji="1" lang="ja-JP" altLang="en-US" sz="1800" dirty="0"/>
+              <a:rPr lang="ja-JP" altLang="en-US" sz="1800" dirty="0"/>
               <a:t>典型的には数千台とかのコンピュータを大量に束ねたものになっている</a:t>
             </a:r>
-            <a:endParaRPr kumimoji="1" lang="en-US" altLang="ja-JP" sz="1800" dirty="0"/>
+            <a:endParaRPr lang="en-US" altLang="ja-JP" sz="1800" dirty="0"/>
           </a:p>
           <a:p>
             <a:pPr lvl="1"/>
             <a:r>
-              <a:rPr kumimoji="1" lang="ja-JP" altLang="en-US" sz="1800" dirty="0"/>
+              <a:rPr lang="ja-JP" altLang="en-US" sz="1800" dirty="0"/>
               <a:t>電力を供給するために専用の変電所を建てたりすることも</a:t>
             </a:r>
-            <a:endParaRPr kumimoji="1" lang="en-US" altLang="ja-JP" sz="1800" dirty="0"/>
-          </a:p>
-          <a:p>
-            <a:r>
-              <a:rPr kumimoji="1" lang="ja-JP" altLang="en-US" sz="1800" dirty="0"/>
+            <a:endParaRPr lang="en-US" altLang="ja-JP" sz="1800" dirty="0"/>
+          </a:p>
+          <a:p>
+            <a:r>
+              <a:rPr lang="ja-JP" altLang="en-US" sz="1800" dirty="0"/>
               <a:t>お値段は桁違いに高い</a:t>
             </a:r>
-            <a:endParaRPr kumimoji="1" lang="en-US" altLang="ja-JP" sz="1800" dirty="0"/>
+            <a:endParaRPr lang="en-US" altLang="ja-JP" sz="1800" dirty="0"/>
           </a:p>
           <a:p>
             <a:pPr lvl="1"/>
             <a:r>
-              <a:rPr kumimoji="1" lang="ja-JP" altLang="en-US" sz="1800" dirty="0"/>
+              <a:rPr lang="ja-JP" altLang="en-US" sz="1800" dirty="0"/>
               <a:t>富岳の場合</a:t>
             </a:r>
             <a:r>
-              <a:rPr kumimoji="1" lang="en-US" altLang="ja-JP" sz="1800" dirty="0"/>
+              <a:rPr lang="en-US" altLang="ja-JP" sz="1800" dirty="0"/>
               <a:t>1300 </a:t>
             </a:r>
             <a:r>
-              <a:rPr kumimoji="1" lang="ja-JP" altLang="en-US" sz="1800" dirty="0"/>
+              <a:rPr lang="ja-JP" altLang="en-US" sz="1800" dirty="0"/>
               <a:t>億円</a:t>
             </a:r>
-            <a:endParaRPr kumimoji="1" lang="en-US" altLang="ja-JP" sz="1800" dirty="0"/>
+            <a:endParaRPr lang="en-US" altLang="ja-JP" sz="1800" dirty="0"/>
           </a:p>
           <a:p>
             <a:pPr lvl="1"/>
             <a:r>
-              <a:rPr kumimoji="1" lang="ja-JP" altLang="en-US" sz="1800" dirty="0"/>
+              <a:rPr lang="ja-JP" altLang="en-US" sz="1800" dirty="0"/>
               <a:t>（以下は，富岳が設置されている神戸の理研に行った時の写真</a:t>
             </a:r>
-            <a:endParaRPr kumimoji="1" lang="en-US" altLang="ja-JP" sz="1800" dirty="0"/>
+            <a:endParaRPr lang="en-US" altLang="ja-JP" sz="1800" dirty="0"/>
           </a:p>
         </p:txBody>
       </p:sp>
@@ -10876,7 +11778,7 @@
         </p:blipFill>
         <p:spPr>
           <a:xfrm>
-            <a:off x="1151962" y="3969005"/>
+            <a:off x="2675962" y="3969006"/>
             <a:ext cx="3000034" cy="2250025"/>
           </a:xfrm>
           <a:prstGeom prst="rect">
@@ -10912,7 +11814,7 @@
         </p:blipFill>
         <p:spPr>
           <a:xfrm>
-            <a:off x="5022005" y="3969005"/>
+            <a:off x="6546006" y="3969006"/>
             <a:ext cx="3027593" cy="2270695"/>
           </a:xfrm>
           <a:prstGeom prst="rect">
@@ -11000,12 +11902,12 @@
             <a:spLocks noGrp="1"/>
           </p:cNvSpPr>
           <p:nvPr>
-            <p:ph sz="quarter" idx="10"/>
+            <p:ph type="body" sz="quarter" idx="10"/>
           </p:nvPr>
         </p:nvSpPr>
         <p:spPr>
           <a:xfrm>
-            <a:off x="611956" y="1178975"/>
+            <a:off x="2135956" y="1178976"/>
             <a:ext cx="8280092" cy="990011"/>
           </a:xfrm>
         </p:spPr>
@@ -11014,70 +11916,66 @@
           <a:lstStyle/>
           <a:p>
             <a:r>
-              <a:rPr lang="en-US" altLang="ja-JP" sz="1800" b="0" i="0" dirty="0">
+              <a:rPr lang="en-US" altLang="ja-JP" sz="1800" dirty="0">
                 <a:solidFill>
                   <a:srgbClr val="333333"/>
                 </a:solidFill>
-                <a:effectLst/>
                 <a:latin typeface="Lucida Grande"/>
               </a:rPr>
               <a:t>2021</a:t>
             </a:r>
             <a:r>
-              <a:rPr lang="ja-JP" altLang="en-US" sz="1800" b="0" i="0" dirty="0">
+              <a:rPr lang="ja-JP" altLang="en-US" sz="1800" dirty="0">
                 <a:solidFill>
                   <a:srgbClr val="333333"/>
                 </a:solidFill>
-                <a:effectLst/>
                 <a:latin typeface="Lucida Grande"/>
               </a:rPr>
               <a:t>年に「京コンピュータ前駅」から「</a:t>
             </a:r>
             <a:r>
-              <a:rPr kumimoji="1" lang="ja-JP" altLang="en-US" sz="1800" dirty="0"/>
+              <a:rPr lang="ja-JP" altLang="en-US" sz="1800" dirty="0"/>
               <a:t>計算科学センター駅</a:t>
             </a:r>
             <a:r>
-              <a:rPr lang="ja-JP" altLang="en-US" sz="1800" b="0" i="0" dirty="0">
+              <a:rPr lang="ja-JP" altLang="en-US" sz="1800" dirty="0">
                 <a:solidFill>
                   <a:srgbClr val="333333"/>
                 </a:solidFill>
-                <a:effectLst/>
                 <a:latin typeface="Lucida Grande"/>
               </a:rPr>
               <a:t>」に変更</a:t>
             </a:r>
-            <a:endParaRPr lang="en-US" altLang="ja-JP" sz="1800" b="0" i="0" dirty="0">
+            <a:endParaRPr lang="en-US" altLang="ja-JP" sz="1800" dirty="0">
               <a:solidFill>
                 <a:srgbClr val="333333"/>
               </a:solidFill>
-              <a:effectLst/>
               <a:latin typeface="Lucida Grande"/>
             </a:endParaRPr>
           </a:p>
           <a:p>
             <a:pPr lvl="1"/>
             <a:r>
-              <a:rPr kumimoji="1" lang="ja-JP" altLang="en-US" sz="1800" dirty="0"/>
+              <a:rPr lang="ja-JP" altLang="en-US" sz="1800" dirty="0"/>
               <a:t>「京」はここに設置されていた先代のスーパーコンピュータ</a:t>
             </a:r>
-            <a:endParaRPr kumimoji="1" lang="en-US" altLang="ja-JP" sz="1800" dirty="0"/>
+            <a:endParaRPr lang="en-US" altLang="ja-JP" sz="1800" dirty="0"/>
           </a:p>
           <a:p>
             <a:pPr lvl="1"/>
             <a:r>
-              <a:rPr kumimoji="1" lang="ja-JP" altLang="en-US" sz="1800" dirty="0"/>
+              <a:rPr lang="ja-JP" altLang="en-US" sz="1800" dirty="0"/>
               <a:t>神戸のポートアイランドにある</a:t>
             </a:r>
-            <a:endParaRPr kumimoji="1" lang="en-US" altLang="ja-JP" sz="1800" dirty="0"/>
+            <a:endParaRPr lang="en-US" altLang="ja-JP" sz="1800" dirty="0"/>
           </a:p>
           <a:p>
             <a:pPr lvl="2"/>
             <a:r>
-              <a:rPr kumimoji="1" lang="ja-JP" altLang="en-US" sz="1800" dirty="0"/>
+              <a:rPr lang="ja-JP" altLang="en-US" sz="1800" dirty="0"/>
               <a:t>三ノ宮からは（がんばれば）歩いて行ける</a:t>
             </a:r>
-            <a:endParaRPr kumimoji="1" lang="en-US" sz="1800" dirty="0"/>
+            <a:endParaRPr lang="en-US" sz="1800" dirty="0"/>
           </a:p>
         </p:txBody>
       </p:sp>
@@ -11103,7 +12001,7 @@
         </p:blipFill>
         <p:spPr>
           <a:xfrm>
-            <a:off x="701957" y="2548021"/>
+            <a:off x="2225957" y="2548022"/>
             <a:ext cx="4990950" cy="4007071"/>
           </a:xfrm>
           <a:prstGeom prst="rect">
@@ -11139,7 +12037,7 @@
         </p:blipFill>
         <p:spPr>
           <a:xfrm>
-            <a:off x="5832014" y="2528990"/>
+            <a:off x="7356014" y="2528990"/>
             <a:ext cx="2880032" cy="2160024"/>
           </a:xfrm>
           <a:prstGeom prst="rect">
@@ -11231,7 +12129,7 @@
             <a:spLocks noGrp="1"/>
           </p:cNvSpPr>
           <p:nvPr>
-            <p:ph sz="quarter" idx="10"/>
+            <p:ph type="body" sz="quarter" idx="10"/>
           </p:nvPr>
         </p:nvSpPr>
         <p:spPr/>
@@ -11253,7 +12151,7 @@
             <a:pPr lvl="1"/>
             <a:r>
               <a:rPr kumimoji="1" lang="ja-JP" altLang="en-US" dirty="0"/>
-              <a:t>ニューラルネットの処理の大部分は「行列積」に落とし込まれる</a:t>
+              <a:t>ニューラルネットの処理の大部分は「行列積」と「メモリアクセス」に帰着される</a:t>
             </a:r>
             <a:endParaRPr kumimoji="1" lang="en-US" altLang="ja-JP" dirty="0"/>
           </a:p>
@@ -11271,12 +12169,9 @@
               <a:rPr kumimoji="1" lang="en-US" altLang="ja-JP" dirty="0"/>
               <a:t>= </a:t>
             </a:r>
-            <a:br>
-              <a:rPr kumimoji="1" lang="en-US" altLang="ja-JP" dirty="0"/>
-            </a:br>
             <a:r>
               <a:rPr kumimoji="1" lang="ja-JP" altLang="en-US" dirty="0"/>
-              <a:t>概ね巨大な行列積に特化したコンピュータ</a:t>
+              <a:t>概ね行列積に特化したコンピュータ</a:t>
             </a:r>
             <a:endParaRPr kumimoji="1" lang="en-US" altLang="ja-JP" dirty="0"/>
           </a:p>
@@ -11288,7 +12183,7 @@
             </a:r>
             <a:r>
               <a:rPr lang="en-US" altLang="ja-JP" dirty="0"/>
-              <a:t>2025</a:t>
+              <a:t>2026</a:t>
             </a:r>
             <a:r>
               <a:rPr lang="ja-JP" altLang="en-US" dirty="0"/>
@@ -11382,7 +12277,7 @@
             <a:spLocks noGrp="1"/>
           </p:cNvSpPr>
           <p:nvPr>
-            <p:ph sz="quarter" idx="10"/>
+            <p:ph type="body" sz="quarter" idx="10"/>
           </p:nvPr>
         </p:nvSpPr>
         <p:spPr/>
@@ -11550,7 +12445,7 @@
             <a:spLocks noGrp="1"/>
           </p:cNvSpPr>
           <p:nvPr>
-            <p:ph sz="quarter" idx="10"/>
+            <p:ph type="body" sz="quarter" idx="10"/>
           </p:nvPr>
         </p:nvSpPr>
         <p:spPr/>
@@ -11635,6 +12530,53 @@
           <a:chExt cx="0" cy="0"/>
         </a:xfrm>
       </p:grpSpPr>
+      <p:pic>
+        <p:nvPicPr>
+          <p:cNvPr id="1026" name="Picture 2" descr="March 2022 onward">
+            <a:extLst>
+              <a:ext uri="{FF2B5EF4-FFF2-40B4-BE49-F238E27FC236}">
+                <a16:creationId xmlns:a16="http://schemas.microsoft.com/office/drawing/2014/main" id="{6323D9F9-E361-3D50-CC97-245A006FB9EE}"/>
+              </a:ext>
+            </a:extLst>
+          </p:cNvPr>
+          <p:cNvPicPr>
+            <a:picLocks noChangeAspect="1" noChangeArrowheads="1"/>
+          </p:cNvPicPr>
+          <p:nvPr/>
+        </p:nvPicPr>
+        <p:blipFill>
+          <a:blip r:embed="rId2" cstate="print">
+            <a:extLst>
+              <a:ext uri="{28A0092B-C50C-407E-A947-70E740481C1C}">
+                <a14:useLocalDpi xmlns:a14="http://schemas.microsoft.com/office/drawing/2010/main" val="0"/>
+              </a:ext>
+            </a:extLst>
+          </a:blip>
+          <a:srcRect/>
+          <a:stretch>
+            <a:fillRect/>
+          </a:stretch>
+        </p:blipFill>
+        <p:spPr bwMode="auto">
+          <a:xfrm>
+            <a:off x="2765963" y="1178975"/>
+            <a:ext cx="728970" cy="728970"/>
+          </a:xfrm>
+          <a:prstGeom prst="rect">
+            <a:avLst/>
+          </a:prstGeom>
+          <a:noFill/>
+          <a:extLst>
+            <a:ext uri="{909E8E84-426E-40DD-AFC4-6F175D3DCCD1}">
+              <a14:hiddenFill xmlns:a14="http://schemas.microsoft.com/office/drawing/2010/main">
+                <a:solidFill>
+                  <a:srgbClr val="FFFFFF"/>
+                </a:solidFill>
+              </a14:hiddenFill>
+            </a:ext>
+          </a:extLst>
+        </p:spPr>
+      </p:pic>
       <p:sp>
         <p:nvSpPr>
           <p:cNvPr id="2" name="タイトル 1"/>
@@ -11666,41 +12608,13 @@
         </p:nvGrpSpPr>
         <p:grpSpPr>
           <a:xfrm>
-            <a:off x="1061961" y="1178975"/>
-            <a:ext cx="990011" cy="1362730"/>
-            <a:chOff x="782449" y="2107410"/>
-            <a:chExt cx="1289862" cy="1722734"/>
+            <a:off x="2585962" y="1673650"/>
+            <a:ext cx="990011" cy="958055"/>
+            <a:chOff x="782449" y="2618991"/>
+            <a:chExt cx="1289862" cy="1211153"/>
           </a:xfrm>
           <a:effectLst/>
         </p:grpSpPr>
-        <p:pic>
-          <p:nvPicPr>
-            <p:cNvPr id="5" name="図 4"/>
-            <p:cNvPicPr>
-              <a:picLocks noChangeAspect="1"/>
-            </p:cNvPicPr>
-            <p:nvPr/>
-          </p:nvPicPr>
-          <p:blipFill>
-            <a:blip r:embed="rId2"/>
-            <a:stretch>
-              <a:fillRect/>
-            </a:stretch>
-          </p:blipFill>
-          <p:spPr>
-            <a:xfrm rot="20190373">
-              <a:off x="1013249" y="2107410"/>
-              <a:ext cx="734880" cy="676863"/>
-            </a:xfrm>
-            <a:prstGeom prst="rect">
-              <a:avLst/>
-            </a:prstGeom>
-            <a:ln>
-              <a:noFill/>
-            </a:ln>
-            <a:effectLst/>
-          </p:spPr>
-        </p:pic>
         <p:pic>
           <p:nvPicPr>
             <p:cNvPr id="6" name="図 5"/>
@@ -11774,7 +12688,7 @@
         </p:blipFill>
         <p:spPr>
           <a:xfrm>
-            <a:off x="3491988" y="1178975"/>
+            <a:off x="5015989" y="1178976"/>
             <a:ext cx="1588187" cy="1542447"/>
           </a:xfrm>
           <a:prstGeom prst="rect">
@@ -11795,7 +12709,7 @@
         </p:nvGrpSpPr>
         <p:grpSpPr>
           <a:xfrm>
-            <a:off x="5562011" y="1808982"/>
+            <a:off x="7086012" y="1808982"/>
             <a:ext cx="720009" cy="540006"/>
             <a:chOff x="5382008" y="2888994"/>
             <a:chExt cx="720009" cy="540006"/>
@@ -11891,7 +12805,7 @@
         </p:nvGrpSpPr>
         <p:grpSpPr>
           <a:xfrm rot="5400000">
-            <a:off x="7182028" y="3879006"/>
+            <a:off x="8706029" y="3879006"/>
             <a:ext cx="720009" cy="540006"/>
             <a:chOff x="6143425" y="3248998"/>
             <a:chExt cx="720009" cy="540006"/>
@@ -11987,7 +12901,7 @@
         </p:nvSpPr>
         <p:spPr>
           <a:xfrm>
-            <a:off x="701957" y="2978995"/>
+            <a:off x="2225957" y="2978995"/>
             <a:ext cx="1620018" cy="369332"/>
           </a:xfrm>
           <a:prstGeom prst="rect">
@@ -12002,7 +12916,7 @@
           <a:lstStyle/>
           <a:p>
             <a:r>
-              <a:rPr kumimoji="1" lang="ja-JP" altLang="en-US" sz="2000" dirty="0">
+              <a:rPr lang="ja-JP" altLang="en-US" sz="2000" dirty="0">
                 <a:solidFill>
                   <a:schemeClr val="tx1">
                     <a:lumMod val="75000"/>
@@ -12023,7 +12937,7 @@
         </p:nvSpPr>
         <p:spPr>
           <a:xfrm>
-            <a:off x="2861981" y="2978995"/>
+            <a:off x="4385981" y="2978995"/>
             <a:ext cx="1620018" cy="369332"/>
           </a:xfrm>
           <a:prstGeom prst="rect">
@@ -12038,7 +12952,7 @@
           <a:lstStyle/>
           <a:p>
             <a:r>
-              <a:rPr kumimoji="1" lang="ja-JP" altLang="en-US" sz="2000" dirty="0">
+              <a:rPr lang="ja-JP" altLang="en-US" sz="2000" dirty="0">
                 <a:solidFill>
                   <a:schemeClr val="tx1">
                     <a:lumMod val="75000"/>
@@ -12059,7 +12973,7 @@
         </p:nvSpPr>
         <p:spPr>
           <a:xfrm>
-            <a:off x="6732024" y="2978995"/>
+            <a:off x="8256024" y="2978995"/>
             <a:ext cx="1620018" cy="369332"/>
           </a:xfrm>
           <a:prstGeom prst="rect">
@@ -12075,7 +12989,7 @@
           <a:p>
             <a:pPr algn="ctr"/>
             <a:r>
-              <a:rPr kumimoji="1" lang="ja-JP" altLang="en-US" sz="2000" dirty="0">
+              <a:rPr lang="ja-JP" altLang="en-US" sz="2000" dirty="0">
                 <a:solidFill>
                   <a:schemeClr val="tx1">
                     <a:lumMod val="75000"/>
@@ -12086,7 +13000,7 @@
               <a:t>ハードウェアは</a:t>
             </a:r>
             <a:br>
-              <a:rPr kumimoji="1" lang="en-US" altLang="ja-JP" sz="2000" dirty="0">
+              <a:rPr lang="en-US" altLang="ja-JP" sz="2000" dirty="0">
                 <a:solidFill>
                   <a:schemeClr val="tx1">
                     <a:lumMod val="75000"/>
@@ -12096,7 +13010,7 @@
               </a:rPr>
             </a:br>
             <a:r>
-              <a:rPr kumimoji="1" lang="ja-JP" altLang="en-US" sz="2000" dirty="0">
+              <a:rPr lang="ja-JP" altLang="en-US" sz="2000" dirty="0">
                 <a:solidFill>
                   <a:schemeClr val="tx1">
                     <a:lumMod val="75000"/>
@@ -12138,7 +13052,7 @@
         </p:blipFill>
         <p:spPr bwMode="auto">
           <a:xfrm>
-            <a:off x="6642023" y="1358977"/>
+            <a:off x="8166023" y="1358978"/>
             <a:ext cx="1672150" cy="1442229"/>
           </a:xfrm>
           <a:prstGeom prst="rect">
@@ -12170,7 +13084,7 @@
         </p:nvGrpSpPr>
         <p:grpSpPr>
           <a:xfrm>
-            <a:off x="2411976" y="1718981"/>
+            <a:off x="3935977" y="1718981"/>
             <a:ext cx="720009" cy="540006"/>
             <a:chOff x="5382008" y="2888994"/>
             <a:chExt cx="720009" cy="540006"/>
@@ -12305,7 +13219,7 @@
         </p:blipFill>
         <p:spPr bwMode="auto">
           <a:xfrm>
-            <a:off x="6642023" y="4689014"/>
+            <a:off x="8166023" y="4689014"/>
             <a:ext cx="1442420" cy="1080012"/>
           </a:xfrm>
           <a:prstGeom prst="rect">
@@ -12352,7 +13266,7 @@
         </p:blipFill>
         <p:spPr bwMode="auto">
           <a:xfrm>
-            <a:off x="7362031" y="5049018"/>
+            <a:off x="8886032" y="5049019"/>
             <a:ext cx="1086185" cy="1178975"/>
           </a:xfrm>
           <a:prstGeom prst="rect">
@@ -12386,7 +13300,7 @@
         </p:nvSpPr>
         <p:spPr bwMode="auto">
           <a:xfrm>
-            <a:off x="71950" y="3609002"/>
+            <a:off x="1595950" y="3609002"/>
             <a:ext cx="5574768" cy="2700030"/>
           </a:xfrm>
           <a:prstGeom prst="rect">
@@ -12832,7 +13746,7 @@
             <a:spLocks noGrp="1"/>
           </p:cNvSpPr>
           <p:nvPr>
-            <p:ph sz="quarter" idx="10"/>
+            <p:ph type="body" sz="quarter" idx="10"/>
           </p:nvPr>
         </p:nvSpPr>
         <p:spPr/>
@@ -12988,7 +13902,7 @@
         </p:blipFill>
         <p:spPr>
           <a:xfrm>
-            <a:off x="6282019" y="4149008"/>
+            <a:off x="7806019" y="4149008"/>
             <a:ext cx="1800020" cy="2351150"/>
           </a:xfrm>
           <a:prstGeom prst="rect">
@@ -13076,7 +13990,7 @@
             <a:spLocks noGrp="1"/>
           </p:cNvSpPr>
           <p:nvPr>
-            <p:ph sz="quarter" idx="10"/>
+            <p:ph type="body" sz="quarter" idx="10"/>
           </p:nvPr>
         </p:nvSpPr>
         <p:spPr/>
@@ -13206,12 +14120,12 @@
             <a:spLocks noGrp="1"/>
           </p:cNvSpPr>
           <p:nvPr>
-            <p:ph sz="quarter" idx="10"/>
+            <p:ph type="body" sz="quarter" idx="10"/>
           </p:nvPr>
         </p:nvSpPr>
         <p:spPr>
           <a:xfrm>
-            <a:off x="431954" y="1088974"/>
+            <a:off x="1955954" y="1088974"/>
             <a:ext cx="8532044" cy="5220058"/>
           </a:xfrm>
         </p:spPr>
@@ -13323,7 +14237,7 @@
             <a:spLocks noGrp="1"/>
           </p:cNvSpPr>
           <p:nvPr>
-            <p:ph sz="quarter" idx="10"/>
+            <p:ph type="body" sz="quarter" idx="10"/>
           </p:nvPr>
         </p:nvSpPr>
         <p:spPr/>
@@ -13492,7 +14406,7 @@
         </p:nvSpPr>
         <p:spPr>
           <a:xfrm>
-            <a:off x="1331964" y="5049018"/>
+            <a:off x="2855964" y="5049019"/>
             <a:ext cx="7200080" cy="1259707"/>
           </a:xfrm>
         </p:spPr>
@@ -13525,7 +14439,7 @@
         </p:nvSpPr>
         <p:spPr bwMode="auto">
           <a:xfrm>
-            <a:off x="971960" y="1358977"/>
+            <a:off x="2495960" y="1358977"/>
             <a:ext cx="8100090" cy="3329730"/>
           </a:xfrm>
           <a:prstGeom prst="rect">
@@ -13792,11 +14706,10 @@
           </a:lstStyle>
           <a:p>
             <a:pPr marL="360000" lvl="1" indent="0">
-              <a:buFont typeface="メイリオ" panose="020B0604030504040204" pitchFamily="50" charset="-128"/>
               <a:buNone/>
             </a:pPr>
             <a:r>
-              <a:rPr lang="en-US" altLang="ja-JP" sz="2000" kern="0" dirty="0">
+              <a:rPr lang="en-US" altLang="ja-JP" kern="0" dirty="0">
                 <a:latin typeface="Consolas" panose="020B0609020204030204" pitchFamily="49" charset="0"/>
               </a:rPr>
               <a:t>for (int k = 0; k &lt; SIZE; k++) {</a:t>
@@ -13804,23 +14717,22 @@
           </a:p>
           <a:p>
             <a:pPr marL="360000" lvl="1" indent="0">
-              <a:buFont typeface="メイリオ" panose="020B0604030504040204" pitchFamily="50" charset="-128"/>
               <a:buNone/>
             </a:pPr>
             <a:r>
-              <a:rPr lang="en-US" altLang="ja-JP" sz="2000" kern="0" dirty="0">
+              <a:rPr lang="en-US" altLang="ja-JP" kern="0" dirty="0">
                 <a:latin typeface="Consolas" panose="020B0609020204030204" pitchFamily="49" charset="0"/>
               </a:rPr>
               <a:t>    for (int j = 0; j &lt; SIZE; </a:t>
             </a:r>
             <a:r>
-              <a:rPr lang="en-US" altLang="ja-JP" sz="2000" kern="0" dirty="0" err="1">
+              <a:rPr lang="en-US" altLang="ja-JP" kern="0" dirty="0" err="1">
                 <a:latin typeface="Consolas" panose="020B0609020204030204" pitchFamily="49" charset="0"/>
               </a:rPr>
               <a:t>j++</a:t>
             </a:r>
             <a:r>
-              <a:rPr lang="en-US" altLang="ja-JP" sz="2000" kern="0" dirty="0">
+              <a:rPr lang="en-US" altLang="ja-JP" kern="0" dirty="0">
                 <a:latin typeface="Consolas" panose="020B0609020204030204" pitchFamily="49" charset="0"/>
               </a:rPr>
               <a:t>) {</a:t>
@@ -13828,11 +14740,10 @@
           </a:p>
           <a:p>
             <a:pPr marL="360000" lvl="1" indent="0">
-              <a:buFont typeface="メイリオ" panose="020B0604030504040204" pitchFamily="50" charset="-128"/>
               <a:buNone/>
             </a:pPr>
             <a:r>
-              <a:rPr lang="en-US" altLang="ja-JP" sz="2000" kern="0" dirty="0">
+              <a:rPr lang="en-US" altLang="ja-JP" kern="0" dirty="0">
                 <a:latin typeface="Consolas" panose="020B0609020204030204" pitchFamily="49" charset="0"/>
               </a:rPr>
               <a:t>        for (int i = 0; i &lt; SIZE; i++) {</a:t>
@@ -13840,11 +14751,10 @@
           </a:p>
           <a:p>
             <a:pPr marL="360000" lvl="1" indent="0">
-              <a:buFont typeface="メイリオ" panose="020B0604030504040204" pitchFamily="50" charset="-128"/>
               <a:buNone/>
             </a:pPr>
             <a:r>
-              <a:rPr lang="en-US" altLang="ja-JP" sz="2000" kern="0" dirty="0">
+              <a:rPr lang="en-US" altLang="ja-JP" kern="0" dirty="0">
                 <a:latin typeface="Consolas" panose="020B0609020204030204" pitchFamily="49" charset="0"/>
               </a:rPr>
               <a:t>            a[k][j] += b[k][i] * c[i][j];</a:t>
@@ -13852,11 +14762,10 @@
           </a:p>
           <a:p>
             <a:pPr marL="360000" lvl="1" indent="0">
-              <a:buFont typeface="メイリオ" panose="020B0604030504040204" pitchFamily="50" charset="-128"/>
               <a:buNone/>
             </a:pPr>
             <a:r>
-              <a:rPr lang="en-US" altLang="ja-JP" sz="2000" kern="0" dirty="0">
+              <a:rPr lang="en-US" altLang="ja-JP" kern="0" dirty="0">
                 <a:latin typeface="Consolas" panose="020B0609020204030204" pitchFamily="49" charset="0"/>
               </a:rPr>
               <a:t>        }</a:t>
@@ -13864,11 +14773,10 @@
           </a:p>
           <a:p>
             <a:pPr marL="360000" lvl="1" indent="0">
-              <a:buFont typeface="メイリオ" panose="020B0604030504040204" pitchFamily="50" charset="-128"/>
               <a:buNone/>
             </a:pPr>
             <a:r>
-              <a:rPr lang="en-US" altLang="ja-JP" sz="2000" kern="0" dirty="0">
+              <a:rPr lang="en-US" altLang="ja-JP" kern="0" dirty="0">
                 <a:latin typeface="Consolas" panose="020B0609020204030204" pitchFamily="49" charset="0"/>
               </a:rPr>
               <a:t>    }</a:t>
@@ -13876,11 +14784,10 @@
           </a:p>
           <a:p>
             <a:pPr marL="360000" lvl="1" indent="0">
-              <a:buFont typeface="メイリオ" panose="020B0604030504040204" pitchFamily="50" charset="-128"/>
               <a:buNone/>
             </a:pPr>
             <a:r>
-              <a:rPr lang="en-US" altLang="ja-JP" sz="2000" kern="0" dirty="0">
+              <a:rPr lang="en-US" altLang="ja-JP" kern="0" dirty="0">
                 <a:latin typeface="Consolas" panose="020B0609020204030204" pitchFamily="49" charset="0"/>
               </a:rPr>
               <a:t>}</a:t>
@@ -13949,7 +14856,7 @@
               <a:rPr kumimoji="1" lang="en-US" altLang="ja-JP" dirty="0"/>
             </a:br>
             <a:r>
-              <a:rPr kumimoji="1" lang="ja-JP" altLang="en-US" sz="1800" dirty="0"/>
+              <a:rPr lang="ja-JP" altLang="en-US" sz="1800" dirty="0"/>
               <a:t>（ここは今日は別にきちんと理解しないでも良い）</a:t>
             </a:r>
           </a:p>
@@ -13967,7 +14874,7 @@
         </p:nvSpPr>
         <p:spPr>
           <a:xfrm>
-            <a:off x="431954" y="5229020"/>
+            <a:off x="1955954" y="5229021"/>
             <a:ext cx="8100090" cy="1259707"/>
           </a:xfrm>
         </p:spPr>
@@ -14083,7 +14990,7 @@
         </p:nvSpPr>
         <p:spPr bwMode="auto">
           <a:xfrm>
-            <a:off x="971960" y="2978995"/>
+            <a:off x="2495961" y="2978996"/>
             <a:ext cx="7470083" cy="2430027"/>
           </a:xfrm>
           <a:prstGeom prst="rect">
@@ -14353,7 +15260,6 @@
               <a:lnSpc>
                 <a:spcPct val="100000"/>
               </a:lnSpc>
-              <a:buFont typeface="メイリオ" panose="020B0604030504040204" pitchFamily="50" charset="-128"/>
               <a:buNone/>
             </a:pPr>
             <a:r>
@@ -14368,7 +15274,6 @@
               <a:lnSpc>
                 <a:spcPct val="100000"/>
               </a:lnSpc>
-              <a:buFont typeface="メイリオ" panose="020B0604030504040204" pitchFamily="50" charset="-128"/>
               <a:buNone/>
             </a:pPr>
             <a:r>
@@ -14395,7 +15300,6 @@
               <a:lnSpc>
                 <a:spcPct val="100000"/>
               </a:lnSpc>
-              <a:buFont typeface="メイリオ" panose="020B0604030504040204" pitchFamily="50" charset="-128"/>
               <a:buNone/>
             </a:pPr>
             <a:r>
@@ -14410,7 +15314,6 @@
               <a:lnSpc>
                 <a:spcPct val="100000"/>
               </a:lnSpc>
-              <a:buFont typeface="メイリオ" panose="020B0604030504040204" pitchFamily="50" charset="-128"/>
               <a:buNone/>
             </a:pPr>
             <a:r>
@@ -14425,7 +15328,6 @@
               <a:lnSpc>
                 <a:spcPct val="100000"/>
               </a:lnSpc>
-              <a:buFont typeface="メイリオ" panose="020B0604030504040204" pitchFamily="50" charset="-128"/>
               <a:buNone/>
             </a:pPr>
             <a:r>
@@ -14440,7 +15342,6 @@
               <a:lnSpc>
                 <a:spcPct val="100000"/>
               </a:lnSpc>
-              <a:buFont typeface="メイリオ" panose="020B0604030504040204" pitchFamily="50" charset="-128"/>
               <a:buNone/>
             </a:pPr>
             <a:r>
@@ -14455,7 +15356,6 @@
               <a:lnSpc>
                 <a:spcPct val="100000"/>
               </a:lnSpc>
-              <a:buFont typeface="メイリオ" panose="020B0604030504040204" pitchFamily="50" charset="-128"/>
               <a:buNone/>
             </a:pPr>
             <a:r>
@@ -14485,7 +15385,7 @@
         </p:nvSpPr>
         <p:spPr bwMode="auto">
           <a:xfrm>
-            <a:off x="1331964" y="1178975"/>
+            <a:off x="2855964" y="1178975"/>
             <a:ext cx="1440016" cy="1440016"/>
           </a:xfrm>
           <a:prstGeom prst="rect">
@@ -14520,7 +15420,7 @@
           <a:lstStyle/>
           <a:p>
             <a:pPr algn="ctr"/>
-            <a:endParaRPr kumimoji="1" lang="ja-JP" altLang="en-US" dirty="0">
+            <a:endParaRPr lang="ja-JP" altLang="en-US" dirty="0">
               <a:solidFill>
                 <a:schemeClr val="tx1">
                   <a:lumMod val="75000"/>
@@ -14540,7 +15440,7 @@
         </p:nvSpPr>
         <p:spPr bwMode="auto">
           <a:xfrm>
-            <a:off x="3491988" y="1178975"/>
+            <a:off x="5015988" y="1178975"/>
             <a:ext cx="1440016" cy="1440016"/>
           </a:xfrm>
           <a:prstGeom prst="rect">
@@ -14575,7 +15475,7 @@
           <a:lstStyle/>
           <a:p>
             <a:pPr algn="ctr"/>
-            <a:endParaRPr kumimoji="1" lang="ja-JP" altLang="en-US" dirty="0">
+            <a:endParaRPr lang="ja-JP" altLang="en-US" dirty="0">
               <a:solidFill>
                 <a:schemeClr val="tx1">
                   <a:lumMod val="75000"/>
@@ -14595,7 +15495,7 @@
         </p:nvSpPr>
         <p:spPr bwMode="auto">
           <a:xfrm>
-            <a:off x="5652012" y="1178975"/>
+            <a:off x="7176012" y="1178976"/>
             <a:ext cx="1440016" cy="1350015"/>
           </a:xfrm>
           <a:prstGeom prst="rect">
@@ -14630,7 +15530,7 @@
           <a:lstStyle/>
           <a:p>
             <a:pPr algn="ctr"/>
-            <a:endParaRPr kumimoji="1" lang="ja-JP" altLang="en-US" dirty="0">
+            <a:endParaRPr lang="ja-JP" altLang="en-US" dirty="0">
               <a:solidFill>
                 <a:schemeClr val="tx1">
                   <a:lumMod val="75000"/>
@@ -14650,7 +15550,7 @@
         </p:nvSpPr>
         <p:spPr bwMode="auto">
           <a:xfrm>
-            <a:off x="1691968" y="908972"/>
+            <a:off x="3215969" y="908972"/>
             <a:ext cx="720007" cy="360004"/>
           </a:xfrm>
           <a:prstGeom prst="rect">
@@ -14689,7 +15589,7 @@
           <a:p>
             <a:pPr algn="ctr"/>
             <a:r>
-              <a:rPr kumimoji="1" lang="en-US" altLang="ja-JP" sz="1600" dirty="0">
+              <a:rPr lang="en-US" altLang="ja-JP" sz="1600" dirty="0">
                 <a:solidFill>
                   <a:schemeClr val="tx1">
                     <a:lumMod val="75000"/>
@@ -14700,7 +15600,7 @@
               </a:rPr>
               <a:t>a</a:t>
             </a:r>
-            <a:endParaRPr kumimoji="1" lang="ja-JP" altLang="en-US" sz="1600" dirty="0">
+            <a:endParaRPr lang="ja-JP" altLang="en-US" sz="1600" dirty="0">
               <a:solidFill>
                 <a:schemeClr val="tx1">
                   <a:lumMod val="75000"/>
@@ -14720,7 +15620,7 @@
         </p:nvSpPr>
         <p:spPr bwMode="auto">
           <a:xfrm>
-            <a:off x="3761991" y="908972"/>
+            <a:off x="5285992" y="908972"/>
             <a:ext cx="720007" cy="360004"/>
           </a:xfrm>
           <a:prstGeom prst="rect">
@@ -14759,7 +15659,7 @@
           <a:p>
             <a:pPr algn="ctr"/>
             <a:r>
-              <a:rPr kumimoji="1" lang="en-US" altLang="ja-JP" sz="1600" dirty="0">
+              <a:rPr lang="en-US" altLang="ja-JP" sz="1600" dirty="0">
                 <a:solidFill>
                   <a:schemeClr val="tx1">
                     <a:lumMod val="75000"/>
@@ -14770,7 +15670,7 @@
               </a:rPr>
               <a:t>b</a:t>
             </a:r>
-            <a:endParaRPr kumimoji="1" lang="ja-JP" altLang="en-US" sz="1600" dirty="0">
+            <a:endParaRPr lang="ja-JP" altLang="en-US" sz="1600" dirty="0">
               <a:solidFill>
                 <a:schemeClr val="tx1">
                   <a:lumMod val="75000"/>
@@ -14790,7 +15690,7 @@
         </p:nvSpPr>
         <p:spPr bwMode="auto">
           <a:xfrm>
-            <a:off x="6012016" y="908972"/>
+            <a:off x="7536017" y="908972"/>
             <a:ext cx="720007" cy="360004"/>
           </a:xfrm>
           <a:prstGeom prst="rect">
@@ -14829,7 +15729,7 @@
           <a:p>
             <a:pPr algn="ctr"/>
             <a:r>
-              <a:rPr kumimoji="1" lang="en-US" altLang="ja-JP" sz="1600" dirty="0">
+              <a:rPr lang="en-US" altLang="ja-JP" sz="1600" dirty="0">
                 <a:solidFill>
                   <a:schemeClr val="tx1">
                     <a:lumMod val="75000"/>
@@ -14840,7 +15740,7 @@
               </a:rPr>
               <a:t>c</a:t>
             </a:r>
-            <a:endParaRPr kumimoji="1" lang="ja-JP" altLang="en-US" sz="1600" dirty="0">
+            <a:endParaRPr lang="ja-JP" altLang="en-US" sz="1600" dirty="0">
               <a:solidFill>
                 <a:schemeClr val="tx1">
                   <a:lumMod val="75000"/>
@@ -14860,7 +15760,7 @@
         </p:nvSpPr>
         <p:spPr bwMode="auto">
           <a:xfrm>
-            <a:off x="1691968" y="1538979"/>
+            <a:off x="3215968" y="1538979"/>
             <a:ext cx="360004" cy="360004"/>
           </a:xfrm>
           <a:prstGeom prst="rect">
@@ -14896,7 +15796,7 @@
           <a:p>
             <a:pPr algn="ctr"/>
             <a:r>
-              <a:rPr kumimoji="1" lang="en-US" altLang="ja-JP" dirty="0">
+              <a:rPr lang="en-US" altLang="ja-JP" dirty="0">
                 <a:solidFill>
                   <a:schemeClr val="tx1">
                     <a:lumMod val="75000"/>
@@ -14907,7 +15807,7 @@
               </a:rPr>
               <a:t>a[k][j]</a:t>
             </a:r>
-            <a:endParaRPr kumimoji="1" lang="ja-JP" altLang="en-US" dirty="0">
+            <a:endParaRPr lang="ja-JP" altLang="en-US" dirty="0">
               <a:solidFill>
                 <a:schemeClr val="tx1">
                   <a:lumMod val="75000"/>
@@ -14927,7 +15827,7 @@
         </p:nvSpPr>
         <p:spPr bwMode="auto">
           <a:xfrm>
-            <a:off x="2771980" y="908972"/>
+            <a:off x="4295981" y="908972"/>
             <a:ext cx="720007" cy="360004"/>
           </a:xfrm>
           <a:prstGeom prst="rect">
@@ -14966,7 +15866,7 @@
           <a:p>
             <a:pPr algn="ctr"/>
             <a:r>
-              <a:rPr kumimoji="1" lang="en-US" altLang="ja-JP" sz="1600" dirty="0">
+              <a:rPr lang="en-US" altLang="ja-JP" sz="1600" dirty="0">
                 <a:solidFill>
                   <a:schemeClr val="tx1">
                     <a:lumMod val="75000"/>
@@ -14977,7 +15877,7 @@
               </a:rPr>
               <a:t>=</a:t>
             </a:r>
-            <a:endParaRPr kumimoji="1" lang="ja-JP" altLang="en-US" sz="1600" dirty="0">
+            <a:endParaRPr lang="ja-JP" altLang="en-US" sz="1600" dirty="0">
               <a:solidFill>
                 <a:schemeClr val="tx1">
                   <a:lumMod val="75000"/>
@@ -14997,7 +15897,7 @@
         </p:nvSpPr>
         <p:spPr bwMode="auto">
           <a:xfrm>
-            <a:off x="4932004" y="908972"/>
+            <a:off x="6456005" y="908972"/>
             <a:ext cx="720007" cy="360004"/>
           </a:xfrm>
           <a:prstGeom prst="rect">
@@ -15036,7 +15936,7 @@
           <a:p>
             <a:pPr algn="ctr"/>
             <a:r>
-              <a:rPr kumimoji="1" lang="en-US" altLang="ja-JP" sz="1600" dirty="0">
+              <a:rPr lang="en-US" altLang="ja-JP" sz="1600" dirty="0">
                 <a:solidFill>
                   <a:schemeClr val="tx1">
                     <a:lumMod val="75000"/>
@@ -15047,7 +15947,7 @@
               </a:rPr>
               <a:t>×</a:t>
             </a:r>
-            <a:endParaRPr kumimoji="1" lang="ja-JP" altLang="en-US" sz="1600" dirty="0">
+            <a:endParaRPr lang="ja-JP" altLang="en-US" sz="1600" dirty="0">
               <a:solidFill>
                 <a:schemeClr val="tx1">
                   <a:lumMod val="75000"/>
@@ -15067,7 +15967,7 @@
         </p:nvSpPr>
         <p:spPr bwMode="auto">
           <a:xfrm>
-            <a:off x="3491988" y="1538979"/>
+            <a:off x="5015988" y="1538979"/>
             <a:ext cx="1440016" cy="360004"/>
           </a:xfrm>
           <a:prstGeom prst="rect">
@@ -15103,7 +16003,7 @@
           <a:p>
             <a:pPr algn="ctr"/>
             <a:r>
-              <a:rPr kumimoji="1" lang="en-US" altLang="ja-JP" dirty="0">
+              <a:rPr lang="en-US" altLang="ja-JP" dirty="0">
                 <a:solidFill>
                   <a:schemeClr val="tx1">
                     <a:lumMod val="75000"/>
@@ -15115,7 +16015,7 @@
               <a:t>b[k][</a:t>
             </a:r>
             <a:r>
-              <a:rPr kumimoji="1" lang="en-US" altLang="ja-JP" dirty="0" err="1">
+              <a:rPr lang="en-US" altLang="ja-JP" dirty="0" err="1">
                 <a:solidFill>
                   <a:schemeClr val="tx1">
                     <a:lumMod val="75000"/>
@@ -15127,7 +16027,7 @@
               <a:t>i</a:t>
             </a:r>
             <a:r>
-              <a:rPr kumimoji="1" lang="en-US" altLang="ja-JP" dirty="0">
+              <a:rPr lang="en-US" altLang="ja-JP" dirty="0">
                 <a:solidFill>
                   <a:schemeClr val="tx1">
                     <a:lumMod val="75000"/>
@@ -15138,7 +16038,7 @@
               </a:rPr>
               <a:t>]</a:t>
             </a:r>
-            <a:endParaRPr kumimoji="1" lang="ja-JP" altLang="en-US" dirty="0">
+            <a:endParaRPr lang="ja-JP" altLang="en-US" dirty="0">
               <a:solidFill>
                 <a:schemeClr val="tx1">
                   <a:lumMod val="75000"/>
@@ -15158,7 +16058,7 @@
         </p:nvSpPr>
         <p:spPr bwMode="auto">
           <a:xfrm>
-            <a:off x="6012016" y="1178974"/>
+            <a:off x="7536016" y="1178975"/>
             <a:ext cx="360004" cy="1350015"/>
           </a:xfrm>
           <a:prstGeom prst="rect">
@@ -15194,7 +16094,7 @@
           <a:p>
             <a:pPr algn="ctr"/>
             <a:r>
-              <a:rPr kumimoji="1" lang="en-US" altLang="ja-JP" dirty="0">
+              <a:rPr lang="en-US" altLang="ja-JP" dirty="0">
                 <a:solidFill>
                   <a:schemeClr val="tx1">
                     <a:lumMod val="75000"/>
@@ -15206,7 +16106,7 @@
               <a:t>c[</a:t>
             </a:r>
             <a:r>
-              <a:rPr kumimoji="1" lang="en-US" altLang="ja-JP" dirty="0" err="1">
+              <a:rPr lang="en-US" altLang="ja-JP" dirty="0" err="1">
                 <a:solidFill>
                   <a:schemeClr val="tx1">
                     <a:lumMod val="75000"/>
@@ -15218,7 +16118,7 @@
               <a:t>i</a:t>
             </a:r>
             <a:r>
-              <a:rPr kumimoji="1" lang="en-US" altLang="ja-JP" dirty="0">
+              <a:rPr lang="en-US" altLang="ja-JP" dirty="0">
                 <a:solidFill>
                   <a:schemeClr val="tx1">
                     <a:lumMod val="75000"/>
@@ -15229,7 +16129,7 @@
               </a:rPr>
               <a:t>][j]</a:t>
             </a:r>
-            <a:endParaRPr kumimoji="1" lang="ja-JP" altLang="en-US" dirty="0">
+            <a:endParaRPr lang="ja-JP" altLang="en-US" dirty="0">
               <a:solidFill>
                 <a:schemeClr val="tx1">
                   <a:lumMod val="75000"/>
@@ -15313,7 +16213,7 @@
         </p:nvSpPr>
         <p:spPr>
           <a:xfrm>
-            <a:off x="431954" y="3699004"/>
+            <a:off x="1955954" y="3699004"/>
             <a:ext cx="8460094" cy="3060034"/>
           </a:xfrm>
         </p:spPr>
@@ -15389,7 +16289,7 @@
         </p:nvSpPr>
         <p:spPr bwMode="auto">
           <a:xfrm>
-            <a:off x="1331964" y="1358977"/>
+            <a:off x="2855965" y="1358978"/>
             <a:ext cx="7470083" cy="2430027"/>
           </a:xfrm>
           <a:prstGeom prst="rect">
@@ -15656,7 +16556,6 @@
           </a:lstStyle>
           <a:p>
             <a:pPr marL="360000" lvl="1" indent="0">
-              <a:buFont typeface="メイリオ" panose="020B0604030504040204" pitchFamily="50" charset="-128"/>
               <a:buNone/>
             </a:pPr>
             <a:r>
@@ -15680,7 +16579,6 @@
           </a:p>
           <a:p>
             <a:pPr marL="360000" lvl="1" indent="0">
-              <a:buFont typeface="メイリオ" panose="020B0604030504040204" pitchFamily="50" charset="-128"/>
               <a:buNone/>
             </a:pPr>
             <a:r>
@@ -15716,7 +16614,6 @@
           </a:p>
           <a:p>
             <a:pPr marL="360000" lvl="1" indent="0">
-              <a:buFont typeface="メイリオ" panose="020B0604030504040204" pitchFamily="50" charset="-128"/>
               <a:buNone/>
             </a:pPr>
             <a:r>
@@ -15776,7 +16673,6 @@
           </a:p>
           <a:p>
             <a:pPr marL="360000" lvl="1" indent="0">
-              <a:buFont typeface="メイリオ" panose="020B0604030504040204" pitchFamily="50" charset="-128"/>
               <a:buNone/>
             </a:pPr>
             <a:r>
@@ -15812,7 +16708,6 @@
           </a:p>
           <a:p>
             <a:pPr marL="360000" lvl="1" indent="0">
-              <a:buFont typeface="メイリオ" panose="020B0604030504040204" pitchFamily="50" charset="-128"/>
               <a:buNone/>
             </a:pPr>
             <a:r>
@@ -15824,7 +16719,6 @@
           </a:p>
           <a:p>
             <a:pPr marL="360000" lvl="1" indent="0">
-              <a:buFont typeface="メイリオ" panose="020B0604030504040204" pitchFamily="50" charset="-128"/>
               <a:buNone/>
             </a:pPr>
             <a:r>
@@ -15836,7 +16730,6 @@
           </a:p>
           <a:p>
             <a:pPr marL="360000" lvl="1" indent="0">
-              <a:buFont typeface="メイリオ" panose="020B0604030504040204" pitchFamily="50" charset="-128"/>
               <a:buNone/>
             </a:pPr>
             <a:r>
@@ -15928,12 +16821,12 @@
             <a:spLocks noGrp="1"/>
           </p:cNvSpPr>
           <p:nvPr>
-            <p:ph sz="quarter" idx="10"/>
+            <p:ph type="body" sz="quarter" idx="10"/>
           </p:nvPr>
         </p:nvSpPr>
         <p:spPr>
           <a:xfrm>
-            <a:off x="611956" y="4599013"/>
+            <a:off x="2135956" y="4599014"/>
             <a:ext cx="8280092" cy="1350015"/>
           </a:xfrm>
         </p:spPr>
@@ -16010,7 +16903,7 @@
         </p:nvSpPr>
         <p:spPr bwMode="auto">
           <a:xfrm>
-            <a:off x="4391998" y="1808982"/>
+            <a:off x="5915998" y="1808983"/>
             <a:ext cx="5040056" cy="2070023"/>
           </a:xfrm>
           <a:prstGeom prst="rect">
@@ -16375,7 +17268,6 @@
           </a:p>
           <a:p>
             <a:pPr marL="360000" lvl="1" indent="0">
-              <a:buFont typeface="メイリオ" panose="020B0604030504040204" pitchFamily="50" charset="-128"/>
               <a:buNone/>
             </a:pPr>
             <a:r>
@@ -16387,7 +17279,6 @@
           </a:p>
           <a:p>
             <a:pPr marL="360000" lvl="1" indent="0">
-              <a:buFont typeface="メイリオ" panose="020B0604030504040204" pitchFamily="50" charset="-128"/>
               <a:buNone/>
             </a:pPr>
             <a:r>
@@ -16399,7 +17290,6 @@
           </a:p>
           <a:p>
             <a:pPr marL="360000" lvl="1" indent="0">
-              <a:buFont typeface="メイリオ" panose="020B0604030504040204" pitchFamily="50" charset="-128"/>
               <a:buNone/>
             </a:pPr>
             <a:r>
@@ -16417,7 +17307,6 @@
           </a:p>
           <a:p>
             <a:pPr marL="360000" lvl="1" indent="0">
-              <a:buFont typeface="メイリオ" panose="020B0604030504040204" pitchFamily="50" charset="-128"/>
               <a:buNone/>
             </a:pPr>
             <a:r>
@@ -16462,7 +17351,7 @@
         </p:nvSpPr>
         <p:spPr bwMode="auto">
           <a:xfrm>
-            <a:off x="-108052" y="1628980"/>
+            <a:off x="1415949" y="1628980"/>
             <a:ext cx="4770053" cy="2160024"/>
           </a:xfrm>
           <a:prstGeom prst="rect">
@@ -16845,7 +17734,6 @@
           </a:p>
           <a:p>
             <a:pPr marL="360000" lvl="1" indent="0">
-              <a:buFont typeface="メイリオ" panose="020B0604030504040204" pitchFamily="50" charset="-128"/>
               <a:buNone/>
             </a:pPr>
             <a:r>
@@ -16857,7 +17745,6 @@
           </a:p>
           <a:p>
             <a:pPr marL="360000" lvl="1" indent="0">
-              <a:buFont typeface="メイリオ" panose="020B0604030504040204" pitchFamily="50" charset="-128"/>
               <a:buNone/>
             </a:pPr>
             <a:r>
@@ -16869,7 +17756,6 @@
           </a:p>
           <a:p>
             <a:pPr marL="360000" lvl="1" indent="0">
-              <a:buFont typeface="メイリオ" panose="020B0604030504040204" pitchFamily="50" charset="-128"/>
               <a:buNone/>
             </a:pPr>
             <a:r>
@@ -16881,7 +17767,6 @@
           </a:p>
           <a:p>
             <a:pPr marL="360000" lvl="1" indent="0">
-              <a:buFont typeface="メイリオ" panose="020B0604030504040204" pitchFamily="50" charset="-128"/>
               <a:buNone/>
             </a:pPr>
             <a:r>
@@ -16913,7 +17798,7 @@
         </p:nvCxnSpPr>
         <p:spPr bwMode="auto">
           <a:xfrm>
-            <a:off x="4121995" y="2258987"/>
+            <a:off x="5645996" y="2258988"/>
             <a:ext cx="990011" cy="270003"/>
           </a:xfrm>
           <a:prstGeom prst="straightConnector1">
@@ -16948,7 +17833,7 @@
         </p:nvCxnSpPr>
         <p:spPr bwMode="auto">
           <a:xfrm flipV="1">
-            <a:off x="4391998" y="2258987"/>
+            <a:off x="5915998" y="2258988"/>
             <a:ext cx="720008" cy="270003"/>
           </a:xfrm>
           <a:prstGeom prst="straightConnector1">
@@ -17047,7 +17932,7 @@
             <a:spLocks noGrp="1"/>
           </p:cNvSpPr>
           <p:nvPr>
-            <p:ph sz="quarter" idx="10"/>
+            <p:ph type="body" sz="quarter" idx="10"/>
           </p:nvPr>
         </p:nvSpPr>
         <p:spPr/>
@@ -17212,7 +18097,7 @@
             <a:spLocks noGrp="1"/>
           </p:cNvSpPr>
           <p:nvPr>
-            <p:ph sz="quarter" idx="10"/>
+            <p:ph type="body" sz="quarter" idx="10"/>
           </p:nvPr>
         </p:nvSpPr>
         <p:spPr/>
@@ -17332,7 +18217,7 @@
             <a:spLocks noGrp="1"/>
           </p:cNvSpPr>
           <p:nvPr>
-            <p:ph sz="quarter" idx="10"/>
+            <p:ph type="body" sz="quarter" idx="10"/>
           </p:nvPr>
         </p:nvSpPr>
         <p:spPr/>
@@ -17488,7 +18373,7 @@
             <a:spLocks noGrp="1"/>
           </p:cNvSpPr>
           <p:nvPr>
-            <p:ph sz="quarter" idx="10"/>
+            <p:ph type="body" sz="quarter" idx="10"/>
           </p:nvPr>
         </p:nvSpPr>
         <p:spPr/>
@@ -17627,7 +18512,7 @@
             <a:spLocks noGrp="1"/>
           </p:cNvSpPr>
           <p:nvPr>
-            <p:ph sz="quarter" idx="10"/>
+            <p:ph type="body" sz="quarter" idx="10"/>
           </p:nvPr>
         </p:nvSpPr>
         <p:spPr/>
@@ -17738,16 +18623,46 @@
             <p:ph type="title"/>
           </p:nvPr>
         </p:nvSpPr>
+        <p:spPr>
+          <a:xfrm>
+            <a:off x="1415948" y="0"/>
+            <a:ext cx="10776052" cy="908972"/>
+          </a:xfrm>
+        </p:spPr>
+        <p:txBody>
+          <a:bodyPr/>
+          <a:lstStyle/>
+          <a:p>
+            <a:r>
+              <a:rPr lang="ja-JP" altLang="en-US" dirty="0"/>
+              <a:t>参考資料</a:t>
+            </a:r>
+            <a:endParaRPr lang="en-US" dirty="0"/>
+          </a:p>
+        </p:txBody>
+      </p:sp>
+      <p:sp>
+        <p:nvSpPr>
+          <p:cNvPr id="4" name="テキスト プレースホルダー 3">
+            <a:extLst>
+              <a:ext uri="{FF2B5EF4-FFF2-40B4-BE49-F238E27FC236}">
+                <a16:creationId xmlns:a16="http://schemas.microsoft.com/office/drawing/2014/main" id="{96038507-DEFF-2BA0-D90C-13A6FCCE4441}"/>
+              </a:ext>
+            </a:extLst>
+          </p:cNvPr>
+          <p:cNvSpPr>
+            <a:spLocks noGrp="1"/>
+          </p:cNvSpPr>
+          <p:nvPr>
+            <p:ph type="body" sz="quarter" idx="10"/>
+          </p:nvPr>
+        </p:nvSpPr>
         <p:spPr/>
         <p:txBody>
           <a:bodyPr/>
           <a:lstStyle/>
           <a:p>
-            <a:r>
-              <a:rPr kumimoji="1" lang="ja-JP" altLang="en-US" dirty="0"/>
-              <a:t>参考資料</a:t>
-            </a:r>
-            <a:endParaRPr kumimoji="1" lang="en-US" dirty="0"/>
+            <a:endParaRPr lang="ja-JP" altLang="en-US"/>
           </a:p>
         </p:txBody>
       </p:sp>
@@ -17764,7 +18679,7 @@
             <a:picLocks noGrp="1" noChangeAspect="1"/>
           </p:cNvPicPr>
           <p:nvPr>
-            <p:ph sz="quarter" idx="10"/>
+            <p:ph sz="quarter" idx="4294967295"/>
           </p:nvPr>
         </p:nvPicPr>
         <p:blipFill>
@@ -17781,8 +18696,8 @@
         </p:blipFill>
         <p:spPr>
           <a:xfrm>
-            <a:off x="1331964" y="1358977"/>
-            <a:ext cx="6449662" cy="4837247"/>
+            <a:off x="2045955" y="1088974"/>
+            <a:ext cx="7380082" cy="5534608"/>
           </a:xfrm>
         </p:spPr>
       </p:pic>
@@ -17866,7 +18781,7 @@
             <a:spLocks noGrp="1"/>
           </p:cNvSpPr>
           <p:nvPr>
-            <p:ph sz="quarter" idx="10"/>
+            <p:ph type="body" sz="quarter" idx="10"/>
           </p:nvPr>
         </p:nvSpPr>
         <p:spPr/>
@@ -18028,7 +18943,7 @@
             <a:spLocks noGrp="1"/>
           </p:cNvSpPr>
           <p:nvPr>
-            <p:ph sz="quarter" idx="10"/>
+            <p:ph type="body" sz="quarter" idx="10"/>
           </p:nvPr>
         </p:nvSpPr>
         <p:spPr/>
